--- a/Equip_33/Results/Presentation.pptx
+++ b/Equip_33/Results/Presentation.pptx
@@ -5,17 +5,21 @@
     <p:sldMasterId id="2147483648" r:id="rId1"/>
   </p:sldMasterIdLst>
   <p:notesMasterIdLst>
-    <p:notesMasterId r:id="rId10"/>
+    <p:notesMasterId r:id="rId14"/>
   </p:notesMasterIdLst>
   <p:sldIdLst>
     <p:sldId id="256" r:id="rId2"/>
-    <p:sldId id="271" r:id="rId3"/>
+    <p:sldId id="297" r:id="rId3"/>
     <p:sldId id="288" r:id="rId4"/>
-    <p:sldId id="287" r:id="rId5"/>
-    <p:sldId id="263" r:id="rId6"/>
-    <p:sldId id="265" r:id="rId7"/>
-    <p:sldId id="293" r:id="rId8"/>
-    <p:sldId id="275" r:id="rId9"/>
+    <p:sldId id="294" r:id="rId5"/>
+    <p:sldId id="295" r:id="rId6"/>
+    <p:sldId id="296" r:id="rId7"/>
+    <p:sldId id="287" r:id="rId8"/>
+    <p:sldId id="263" r:id="rId9"/>
+    <p:sldId id="265" r:id="rId10"/>
+    <p:sldId id="293" r:id="rId11"/>
+    <p:sldId id="275" r:id="rId12"/>
+    <p:sldId id="271" r:id="rId13"/>
   </p:sldIdLst>
   <p:sldSz cx="9144000" cy="6858000" type="screen4x3"/>
   <p:notesSz cx="6858000" cy="9144000"/>
@@ -120,8 +124,11 @@
         <p14:section name="Sección predeterminada" id="{7642808D-74B7-4E4C-BA10-810E52EA849E}">
           <p14:sldIdLst>
             <p14:sldId id="256"/>
-            <p14:sldId id="271"/>
+            <p14:sldId id="297"/>
             <p14:sldId id="288"/>
+            <p14:sldId id="294"/>
+            <p14:sldId id="295"/>
+            <p14:sldId id="296"/>
             <p14:sldId id="287"/>
             <p14:sldId id="263"/>
             <p14:sldId id="265"/>
@@ -131,18 +138,19 @@
           <p14:sldIdLst>
             <p14:sldId id="293"/>
             <p14:sldId id="275"/>
+            <p14:sldId id="271"/>
           </p14:sldIdLst>
         </p14:section>
       </p14:sectionLst>
     </p:ext>
     <p:ext uri="{EFAFB233-063F-42B5-8137-9DF3F51BA10A}">
       <p15:sldGuideLst xmlns:p15="http://schemas.microsoft.com/office/powerpoint/2012/main">
-        <p15:guide id="1" orient="horz" pos="2160">
+        <p15:guide id="1" orient="horz" pos="2160" userDrawn="1">
           <p15:clr>
             <a:srgbClr val="A4A3A4"/>
           </p15:clr>
         </p15:guide>
-        <p15:guide id="2" pos="2880">
+        <p15:guide id="2" pos="2880" userDrawn="1">
           <p15:clr>
             <a:srgbClr val="A4A3A4"/>
           </p15:clr>
@@ -235,7 +243,7 @@
           <a:p>
             <a:fld id="{BFF758AA-3774-4FDF-89E1-1FCDCF42BDA0}" type="datetimeFigureOut">
               <a:rPr lang="es-ES" smtClean="0"/>
-              <a:t>01/07/2026</a:t>
+              <a:t>02/07/2026</a:t>
             </a:fld>
             <a:endParaRPr lang="es-ES"/>
           </a:p>
@@ -529,7 +537,12 @@
             <p:ph type="sldImg"/>
           </p:nvPr>
         </p:nvSpPr>
-        <p:spPr/>
+        <p:spPr>
+          <a:xfrm>
+            <a:off x="1371600" y="1143000"/>
+            <a:ext cx="4114800" cy="3086100"/>
+          </a:xfrm>
+        </p:spPr>
       </p:sp>
       <p:sp>
         <p:nvSpPr>
@@ -577,6 +590,189 @@
     <p:extLst>
       <p:ext uri="{BB962C8B-B14F-4D97-AF65-F5344CB8AC3E}">
         <p14:creationId xmlns:p14="http://schemas.microsoft.com/office/powerpoint/2010/main" val="3534157736"/>
+      </p:ext>
+    </p:extLst>
+  </p:cSld>
+  <p:clrMapOvr>
+    <a:masterClrMapping/>
+  </p:clrMapOvr>
+</p:notes>
+</file>
+
+<file path=ppt/notesSlides/notesSlide10.xml><?xml version="1.0" encoding="utf-8"?>
+<p:notes xmlns:a="http://schemas.openxmlformats.org/drawingml/2006/main" xmlns:r="http://schemas.openxmlformats.org/officeDocument/2006/relationships" xmlns:p="http://schemas.openxmlformats.org/presentationml/2006/main">
+  <p:cSld>
+    <p:spTree>
+      <p:nvGrpSpPr>
+        <p:cNvPr id="1" name=""/>
+        <p:cNvGrpSpPr/>
+        <p:nvPr/>
+      </p:nvGrpSpPr>
+      <p:grpSpPr>
+        <a:xfrm>
+          <a:off x="0" y="0"/>
+          <a:ext cx="0" cy="0"/>
+          <a:chOff x="0" y="0"/>
+          <a:chExt cx="0" cy="0"/>
+        </a:xfrm>
+      </p:grpSpPr>
+      <p:sp>
+        <p:nvSpPr>
+          <p:cNvPr id="2" name="Marcador de imagen de diapositiva 1"/>
+          <p:cNvSpPr>
+            <a:spLocks noGrp="1" noRot="1" noChangeAspect="1"/>
+          </p:cNvSpPr>
+          <p:nvPr>
+            <p:ph type="sldImg"/>
+          </p:nvPr>
+        </p:nvSpPr>
+        <p:spPr>
+          <a:xfrm>
+            <a:off x="1371600" y="1143000"/>
+            <a:ext cx="4114800" cy="3086100"/>
+          </a:xfrm>
+        </p:spPr>
+      </p:sp>
+      <p:sp>
+        <p:nvSpPr>
+          <p:cNvPr id="3" name="Marcador de notas 2"/>
+          <p:cNvSpPr>
+            <a:spLocks noGrp="1"/>
+          </p:cNvSpPr>
+          <p:nvPr>
+            <p:ph type="body" idx="1"/>
+          </p:nvPr>
+        </p:nvSpPr>
+        <p:spPr/>
+        <p:txBody>
+          <a:bodyPr/>
+          <a:lstStyle/>
+          <a:p>
+            <a:endParaRPr lang="es-ES" dirty="0"/>
+          </a:p>
+        </p:txBody>
+      </p:sp>
+      <p:sp>
+        <p:nvSpPr>
+          <p:cNvPr id="4" name="Marcador de número de diapositiva 3"/>
+          <p:cNvSpPr>
+            <a:spLocks noGrp="1"/>
+          </p:cNvSpPr>
+          <p:nvPr>
+            <p:ph type="sldNum" sz="quarter" idx="5"/>
+          </p:nvPr>
+        </p:nvSpPr>
+        <p:spPr/>
+        <p:txBody>
+          <a:bodyPr/>
+          <a:lstStyle/>
+          <a:p>
+            <a:fld id="{9413C43C-4BC7-4BE8-990F-AB729AAC449F}" type="slidenum">
+              <a:rPr lang="es-ES" smtClean="0"/>
+              <a:t>10</a:t>
+            </a:fld>
+            <a:endParaRPr lang="es-ES"/>
+          </a:p>
+        </p:txBody>
+      </p:sp>
+    </p:spTree>
+    <p:extLst>
+      <p:ext uri="{BB962C8B-B14F-4D97-AF65-F5344CB8AC3E}">
+        <p14:creationId xmlns:p14="http://schemas.microsoft.com/office/powerpoint/2010/main" val="1030088077"/>
+      </p:ext>
+    </p:extLst>
+  </p:cSld>
+  <p:clrMapOvr>
+    <a:masterClrMapping/>
+  </p:clrMapOvr>
+</p:notes>
+</file>
+
+<file path=ppt/notesSlides/notesSlide11.xml><?xml version="1.0" encoding="utf-8"?>
+<p:notes xmlns:a="http://schemas.openxmlformats.org/drawingml/2006/main" xmlns:r="http://schemas.openxmlformats.org/officeDocument/2006/relationships" xmlns:p="http://schemas.openxmlformats.org/presentationml/2006/main">
+  <p:cSld>
+    <p:spTree>
+      <p:nvGrpSpPr>
+        <p:cNvPr id="1" name=""/>
+        <p:cNvGrpSpPr/>
+        <p:nvPr/>
+      </p:nvGrpSpPr>
+      <p:grpSpPr>
+        <a:xfrm>
+          <a:off x="0" y="0"/>
+          <a:ext cx="0" cy="0"/>
+          <a:chOff x="0" y="0"/>
+          <a:chExt cx="0" cy="0"/>
+        </a:xfrm>
+      </p:grpSpPr>
+      <p:sp>
+        <p:nvSpPr>
+          <p:cNvPr id="2" name="Marcador de imagen de diapositiva 1"/>
+          <p:cNvSpPr>
+            <a:spLocks noGrp="1" noRot="1" noChangeAspect="1"/>
+          </p:cNvSpPr>
+          <p:nvPr>
+            <p:ph type="sldImg"/>
+          </p:nvPr>
+        </p:nvSpPr>
+        <p:spPr>
+          <a:xfrm>
+            <a:off x="1371600" y="1143000"/>
+            <a:ext cx="4114800" cy="3086100"/>
+          </a:xfrm>
+        </p:spPr>
+      </p:sp>
+      <p:sp>
+        <p:nvSpPr>
+          <p:cNvPr id="3" name="Marcador de notas 2"/>
+          <p:cNvSpPr>
+            <a:spLocks noGrp="1"/>
+          </p:cNvSpPr>
+          <p:nvPr>
+            <p:ph type="body" idx="1"/>
+          </p:nvPr>
+        </p:nvSpPr>
+        <p:spPr/>
+        <p:txBody>
+          <a:bodyPr/>
+          <a:lstStyle/>
+          <a:p>
+            <a:pPr marL="342900" indent="-342900">
+              <a:buFont typeface="+mj-lt"/>
+              <a:buAutoNum type="arabicPeriod"/>
+              <a:defRPr sz="1600"/>
+            </a:pPr>
+            <a:endParaRPr lang="es-ES" dirty="0"/>
+          </a:p>
+        </p:txBody>
+      </p:sp>
+      <p:sp>
+        <p:nvSpPr>
+          <p:cNvPr id="4" name="Marcador de número de diapositiva 3"/>
+          <p:cNvSpPr>
+            <a:spLocks noGrp="1"/>
+          </p:cNvSpPr>
+          <p:nvPr>
+            <p:ph type="sldNum" sz="quarter" idx="5"/>
+          </p:nvPr>
+        </p:nvSpPr>
+        <p:spPr/>
+        <p:txBody>
+          <a:bodyPr/>
+          <a:lstStyle/>
+          <a:p>
+            <a:fld id="{9413C43C-4BC7-4BE8-990F-AB729AAC449F}" type="slidenum">
+              <a:rPr lang="es-ES" smtClean="0"/>
+              <a:t>11</a:t>
+            </a:fld>
+            <a:endParaRPr lang="es-ES"/>
+          </a:p>
+        </p:txBody>
+      </p:sp>
+    </p:spTree>
+    <p:extLst>
+      <p:ext uri="{BB962C8B-B14F-4D97-AF65-F5344CB8AC3E}">
+        <p14:creationId xmlns:p14="http://schemas.microsoft.com/office/powerpoint/2010/main" val="645745187"/>
       </p:ext>
     </p:extLst>
   </p:cSld>
@@ -613,23 +809,33 @@
             <p:ph type="sldImg"/>
           </p:nvPr>
         </p:nvSpPr>
+        <p:spPr>
+          <a:xfrm>
+            <a:off x="1371600" y="1143000"/>
+            <a:ext cx="4114800" cy="3086100"/>
+          </a:xfrm>
+        </p:spPr>
+      </p:sp>
+      <p:sp>
+        <p:nvSpPr>
+          <p:cNvPr id="3" name="Marcador de notas 2"/>
+          <p:cNvSpPr>
+            <a:spLocks noGrp="1"/>
+          </p:cNvSpPr>
+          <p:nvPr>
+            <p:ph type="body" idx="1"/>
+          </p:nvPr>
+        </p:nvSpPr>
         <p:spPr/>
-      </p:sp>
-      <p:sp>
-        <p:nvSpPr>
-          <p:cNvPr id="3" name="Marcador de notas 2"/>
-          <p:cNvSpPr>
-            <a:spLocks noGrp="1"/>
-          </p:cNvSpPr>
-          <p:nvPr>
-            <p:ph type="body" idx="1"/>
-          </p:nvPr>
-        </p:nvSpPr>
-        <p:spPr/>
         <p:txBody>
           <a:bodyPr/>
           <a:lstStyle/>
           <a:p>
+            <a:pPr marL="342900" indent="-342900">
+              <a:buFont typeface="+mj-lt"/>
+              <a:buAutoNum type="arabicPeriod"/>
+              <a:defRPr sz="1600"/>
+            </a:pPr>
             <a:endParaRPr lang="es-ES" dirty="0"/>
           </a:p>
         </p:txBody>
@@ -651,7 +857,7 @@
           <a:p>
             <a:fld id="{9413C43C-4BC7-4BE8-990F-AB729AAC449F}" type="slidenum">
               <a:rPr lang="es-ES" smtClean="0"/>
-              <a:t>3</a:t>
+              <a:t>2</a:t>
             </a:fld>
             <a:endParaRPr lang="es-ES"/>
           </a:p>
@@ -660,7 +866,7 @@
     </p:spTree>
     <p:extLst>
       <p:ext uri="{BB962C8B-B14F-4D97-AF65-F5344CB8AC3E}">
-        <p14:creationId xmlns:p14="http://schemas.microsoft.com/office/powerpoint/2010/main" val="494064845"/>
+        <p14:creationId xmlns:p14="http://schemas.microsoft.com/office/powerpoint/2010/main" val="2986518126"/>
       </p:ext>
     </p:extLst>
   </p:cSld>
@@ -697,24 +903,29 @@
             <p:ph type="sldImg"/>
           </p:nvPr>
         </p:nvSpPr>
+        <p:spPr>
+          <a:xfrm>
+            <a:off x="1371600" y="1143000"/>
+            <a:ext cx="4114800" cy="3086100"/>
+          </a:xfrm>
+        </p:spPr>
+      </p:sp>
+      <p:sp>
+        <p:nvSpPr>
+          <p:cNvPr id="3" name="Marcador de notas 2"/>
+          <p:cNvSpPr>
+            <a:spLocks noGrp="1"/>
+          </p:cNvSpPr>
+          <p:nvPr>
+            <p:ph type="body" idx="1"/>
+          </p:nvPr>
+        </p:nvSpPr>
         <p:spPr/>
-      </p:sp>
-      <p:sp>
-        <p:nvSpPr>
-          <p:cNvPr id="3" name="Marcador de notas 2"/>
-          <p:cNvSpPr>
-            <a:spLocks noGrp="1"/>
-          </p:cNvSpPr>
-          <p:nvPr>
-            <p:ph type="body" idx="1"/>
-          </p:nvPr>
-        </p:nvSpPr>
-        <p:spPr/>
         <p:txBody>
           <a:bodyPr/>
           <a:lstStyle/>
           <a:p>
-            <a:endParaRPr lang="es-ES" u="sng" dirty="0"/>
+            <a:endParaRPr lang="es-ES" dirty="0"/>
           </a:p>
         </p:txBody>
       </p:sp>
@@ -735,7 +946,7 @@
           <a:p>
             <a:fld id="{9413C43C-4BC7-4BE8-990F-AB729AAC449F}" type="slidenum">
               <a:rPr lang="es-ES" smtClean="0"/>
-              <a:t>4</a:t>
+              <a:t>3</a:t>
             </a:fld>
             <a:endParaRPr lang="es-ES"/>
           </a:p>
@@ -744,7 +955,7 @@
     </p:spTree>
     <p:extLst>
       <p:ext uri="{BB962C8B-B14F-4D97-AF65-F5344CB8AC3E}">
-        <p14:creationId xmlns:p14="http://schemas.microsoft.com/office/powerpoint/2010/main" val="47757868"/>
+        <p14:creationId xmlns:p14="http://schemas.microsoft.com/office/powerpoint/2010/main" val="494064845"/>
       </p:ext>
     </p:extLst>
   </p:cSld>
@@ -781,7 +992,12 @@
             <p:ph type="sldImg"/>
           </p:nvPr>
         </p:nvSpPr>
-        <p:spPr/>
+        <p:spPr>
+          <a:xfrm>
+            <a:off x="1371600" y="1143000"/>
+            <a:ext cx="4114800" cy="3086100"/>
+          </a:xfrm>
+        </p:spPr>
       </p:sp>
       <p:sp>
         <p:nvSpPr>
@@ -819,7 +1035,7 @@
           <a:p>
             <a:fld id="{9413C43C-4BC7-4BE8-990F-AB729AAC449F}" type="slidenum">
               <a:rPr lang="es-ES" smtClean="0"/>
-              <a:t>5</a:t>
+              <a:t>4</a:t>
             </a:fld>
             <a:endParaRPr lang="es-ES"/>
           </a:p>
@@ -828,7 +1044,7 @@
     </p:spTree>
     <p:extLst>
       <p:ext uri="{BB962C8B-B14F-4D97-AF65-F5344CB8AC3E}">
-        <p14:creationId xmlns:p14="http://schemas.microsoft.com/office/powerpoint/2010/main" val="1715100"/>
+        <p14:creationId xmlns:p14="http://schemas.microsoft.com/office/powerpoint/2010/main" val="2683463772"/>
       </p:ext>
     </p:extLst>
   </p:cSld>
@@ -865,7 +1081,12 @@
             <p:ph type="sldImg"/>
           </p:nvPr>
         </p:nvSpPr>
-        <p:spPr/>
+        <p:spPr>
+          <a:xfrm>
+            <a:off x="1371600" y="1143000"/>
+            <a:ext cx="4114800" cy="3086100"/>
+          </a:xfrm>
+        </p:spPr>
       </p:sp>
       <p:sp>
         <p:nvSpPr>
@@ -903,7 +1124,7 @@
           <a:p>
             <a:fld id="{9413C43C-4BC7-4BE8-990F-AB729AAC449F}" type="slidenum">
               <a:rPr lang="es-ES" smtClean="0"/>
-              <a:t>6</a:t>
+              <a:t>5</a:t>
             </a:fld>
             <a:endParaRPr lang="es-ES"/>
           </a:p>
@@ -912,7 +1133,7 @@
     </p:spTree>
     <p:extLst>
       <p:ext uri="{BB962C8B-B14F-4D97-AF65-F5344CB8AC3E}">
-        <p14:creationId xmlns:p14="http://schemas.microsoft.com/office/powerpoint/2010/main" val="3320887364"/>
+        <p14:creationId xmlns:p14="http://schemas.microsoft.com/office/powerpoint/2010/main" val="1192110330"/>
       </p:ext>
     </p:extLst>
   </p:cSld>
@@ -949,7 +1170,12 @@
             <p:ph type="sldImg"/>
           </p:nvPr>
         </p:nvSpPr>
-        <p:spPr/>
+        <p:spPr>
+          <a:xfrm>
+            <a:off x="1371600" y="1143000"/>
+            <a:ext cx="4114800" cy="3086100"/>
+          </a:xfrm>
+        </p:spPr>
       </p:sp>
       <p:sp>
         <p:nvSpPr>
@@ -987,7 +1213,7 @@
           <a:p>
             <a:fld id="{9413C43C-4BC7-4BE8-990F-AB729AAC449F}" type="slidenum">
               <a:rPr lang="es-ES" smtClean="0"/>
-              <a:t>7</a:t>
+              <a:t>6</a:t>
             </a:fld>
             <a:endParaRPr lang="es-ES"/>
           </a:p>
@@ -996,7 +1222,7 @@
     </p:spTree>
     <p:extLst>
       <p:ext uri="{BB962C8B-B14F-4D97-AF65-F5344CB8AC3E}">
-        <p14:creationId xmlns:p14="http://schemas.microsoft.com/office/powerpoint/2010/main" val="1030088077"/>
+        <p14:creationId xmlns:p14="http://schemas.microsoft.com/office/powerpoint/2010/main" val="260814300"/>
       </p:ext>
     </p:extLst>
   </p:cSld>
@@ -1033,7 +1259,101 @@
             <p:ph type="sldImg"/>
           </p:nvPr>
         </p:nvSpPr>
+        <p:spPr>
+          <a:xfrm>
+            <a:off x="1371600" y="1143000"/>
+            <a:ext cx="4114800" cy="3086100"/>
+          </a:xfrm>
+        </p:spPr>
+      </p:sp>
+      <p:sp>
+        <p:nvSpPr>
+          <p:cNvPr id="3" name="Marcador de notas 2"/>
+          <p:cNvSpPr>
+            <a:spLocks noGrp="1"/>
+          </p:cNvSpPr>
+          <p:nvPr>
+            <p:ph type="body" idx="1"/>
+          </p:nvPr>
+        </p:nvSpPr>
         <p:spPr/>
+        <p:txBody>
+          <a:bodyPr/>
+          <a:lstStyle/>
+          <a:p>
+            <a:endParaRPr lang="es-ES" u="sng" dirty="0"/>
+          </a:p>
+        </p:txBody>
+      </p:sp>
+      <p:sp>
+        <p:nvSpPr>
+          <p:cNvPr id="4" name="Marcador de número de diapositiva 3"/>
+          <p:cNvSpPr>
+            <a:spLocks noGrp="1"/>
+          </p:cNvSpPr>
+          <p:nvPr>
+            <p:ph type="sldNum" sz="quarter" idx="5"/>
+          </p:nvPr>
+        </p:nvSpPr>
+        <p:spPr/>
+        <p:txBody>
+          <a:bodyPr/>
+          <a:lstStyle/>
+          <a:p>
+            <a:fld id="{9413C43C-4BC7-4BE8-990F-AB729AAC449F}" type="slidenum">
+              <a:rPr lang="es-ES" smtClean="0"/>
+              <a:t>7</a:t>
+            </a:fld>
+            <a:endParaRPr lang="es-ES"/>
+          </a:p>
+        </p:txBody>
+      </p:sp>
+    </p:spTree>
+    <p:extLst>
+      <p:ext uri="{BB962C8B-B14F-4D97-AF65-F5344CB8AC3E}">
+        <p14:creationId xmlns:p14="http://schemas.microsoft.com/office/powerpoint/2010/main" val="47757868"/>
+      </p:ext>
+    </p:extLst>
+  </p:cSld>
+  <p:clrMapOvr>
+    <a:masterClrMapping/>
+  </p:clrMapOvr>
+</p:notes>
+</file>
+
+<file path=ppt/notesSlides/notesSlide8.xml><?xml version="1.0" encoding="utf-8"?>
+<p:notes xmlns:a="http://schemas.openxmlformats.org/drawingml/2006/main" xmlns:r="http://schemas.openxmlformats.org/officeDocument/2006/relationships" xmlns:p="http://schemas.openxmlformats.org/presentationml/2006/main">
+  <p:cSld>
+    <p:spTree>
+      <p:nvGrpSpPr>
+        <p:cNvPr id="1" name=""/>
+        <p:cNvGrpSpPr/>
+        <p:nvPr/>
+      </p:nvGrpSpPr>
+      <p:grpSpPr>
+        <a:xfrm>
+          <a:off x="0" y="0"/>
+          <a:ext cx="0" cy="0"/>
+          <a:chOff x="0" y="0"/>
+          <a:chExt cx="0" cy="0"/>
+        </a:xfrm>
+      </p:grpSpPr>
+      <p:sp>
+        <p:nvSpPr>
+          <p:cNvPr id="2" name="Marcador de imagen de diapositiva 1"/>
+          <p:cNvSpPr>
+            <a:spLocks noGrp="1" noRot="1" noChangeAspect="1"/>
+          </p:cNvSpPr>
+          <p:nvPr>
+            <p:ph type="sldImg"/>
+          </p:nvPr>
+        </p:nvSpPr>
+        <p:spPr>
+          <a:xfrm>
+            <a:off x="1371600" y="1143000"/>
+            <a:ext cx="4114800" cy="3086100"/>
+          </a:xfrm>
+        </p:spPr>
       </p:sp>
       <p:sp>
         <p:nvSpPr>
@@ -1050,11 +1370,6 @@
           <a:bodyPr/>
           <a:lstStyle/>
           <a:p>
-            <a:pPr marL="342900" indent="-342900">
-              <a:buFont typeface="+mj-lt"/>
-              <a:buAutoNum type="arabicPeriod"/>
-              <a:defRPr sz="1600"/>
-            </a:pPr>
             <a:endParaRPr lang="es-ES" dirty="0"/>
           </a:p>
         </p:txBody>
@@ -1085,7 +1400,96 @@
     </p:spTree>
     <p:extLst>
       <p:ext uri="{BB962C8B-B14F-4D97-AF65-F5344CB8AC3E}">
-        <p14:creationId xmlns:p14="http://schemas.microsoft.com/office/powerpoint/2010/main" val="645745187"/>
+        <p14:creationId xmlns:p14="http://schemas.microsoft.com/office/powerpoint/2010/main" val="1715100"/>
+      </p:ext>
+    </p:extLst>
+  </p:cSld>
+  <p:clrMapOvr>
+    <a:masterClrMapping/>
+  </p:clrMapOvr>
+</p:notes>
+</file>
+
+<file path=ppt/notesSlides/notesSlide9.xml><?xml version="1.0" encoding="utf-8"?>
+<p:notes xmlns:a="http://schemas.openxmlformats.org/drawingml/2006/main" xmlns:r="http://schemas.openxmlformats.org/officeDocument/2006/relationships" xmlns:p="http://schemas.openxmlformats.org/presentationml/2006/main">
+  <p:cSld>
+    <p:spTree>
+      <p:nvGrpSpPr>
+        <p:cNvPr id="1" name=""/>
+        <p:cNvGrpSpPr/>
+        <p:nvPr/>
+      </p:nvGrpSpPr>
+      <p:grpSpPr>
+        <a:xfrm>
+          <a:off x="0" y="0"/>
+          <a:ext cx="0" cy="0"/>
+          <a:chOff x="0" y="0"/>
+          <a:chExt cx="0" cy="0"/>
+        </a:xfrm>
+      </p:grpSpPr>
+      <p:sp>
+        <p:nvSpPr>
+          <p:cNvPr id="2" name="Marcador de imagen de diapositiva 1"/>
+          <p:cNvSpPr>
+            <a:spLocks noGrp="1" noRot="1" noChangeAspect="1"/>
+          </p:cNvSpPr>
+          <p:nvPr>
+            <p:ph type="sldImg"/>
+          </p:nvPr>
+        </p:nvSpPr>
+        <p:spPr>
+          <a:xfrm>
+            <a:off x="1371600" y="1143000"/>
+            <a:ext cx="4114800" cy="3086100"/>
+          </a:xfrm>
+        </p:spPr>
+      </p:sp>
+      <p:sp>
+        <p:nvSpPr>
+          <p:cNvPr id="3" name="Marcador de notas 2"/>
+          <p:cNvSpPr>
+            <a:spLocks noGrp="1"/>
+          </p:cNvSpPr>
+          <p:nvPr>
+            <p:ph type="body" idx="1"/>
+          </p:nvPr>
+        </p:nvSpPr>
+        <p:spPr/>
+        <p:txBody>
+          <a:bodyPr/>
+          <a:lstStyle/>
+          <a:p>
+            <a:endParaRPr lang="es-ES" dirty="0"/>
+          </a:p>
+        </p:txBody>
+      </p:sp>
+      <p:sp>
+        <p:nvSpPr>
+          <p:cNvPr id="4" name="Marcador de número de diapositiva 3"/>
+          <p:cNvSpPr>
+            <a:spLocks noGrp="1"/>
+          </p:cNvSpPr>
+          <p:nvPr>
+            <p:ph type="sldNum" sz="quarter" idx="5"/>
+          </p:nvPr>
+        </p:nvSpPr>
+        <p:spPr/>
+        <p:txBody>
+          <a:bodyPr/>
+          <a:lstStyle/>
+          <a:p>
+            <a:fld id="{9413C43C-4BC7-4BE8-990F-AB729AAC449F}" type="slidenum">
+              <a:rPr lang="es-ES" smtClean="0"/>
+              <a:t>9</a:t>
+            </a:fld>
+            <a:endParaRPr lang="es-ES"/>
+          </a:p>
+        </p:txBody>
+      </p:sp>
+    </p:spTree>
+    <p:extLst>
+      <p:ext uri="{BB962C8B-B14F-4D97-AF65-F5344CB8AC3E}">
+        <p14:creationId xmlns:p14="http://schemas.microsoft.com/office/powerpoint/2010/main" val="3320887364"/>
       </p:ext>
     </p:extLst>
   </p:cSld>
@@ -1124,7 +1528,7 @@
         </p:nvSpPr>
         <p:spPr>
           <a:xfrm>
-            <a:off x="685800" y="2130425"/>
+            <a:off x="685800" y="2130430"/>
             <a:ext cx="7772400" cy="1470025"/>
           </a:xfrm>
         </p:spPr>
@@ -1168,7 +1572,7 @@
                 </a:solidFill>
               </a:defRPr>
             </a:lvl1pPr>
-            <a:lvl2pPr marL="457200" indent="0" algn="ctr">
+            <a:lvl2pPr marL="457178" indent="0" algn="ctr">
               <a:buNone/>
               <a:defRPr>
                 <a:solidFill>
@@ -1178,7 +1582,7 @@
                 </a:solidFill>
               </a:defRPr>
             </a:lvl2pPr>
-            <a:lvl3pPr marL="914400" indent="0" algn="ctr">
+            <a:lvl3pPr marL="914354" indent="0" algn="ctr">
               <a:buNone/>
               <a:defRPr>
                 <a:solidFill>
@@ -1188,7 +1592,7 @@
                 </a:solidFill>
               </a:defRPr>
             </a:lvl3pPr>
-            <a:lvl4pPr marL="1371600" indent="0" algn="ctr">
+            <a:lvl4pPr marL="1371532" indent="0" algn="ctr">
               <a:buNone/>
               <a:defRPr>
                 <a:solidFill>
@@ -1198,7 +1602,7 @@
                 </a:solidFill>
               </a:defRPr>
             </a:lvl4pPr>
-            <a:lvl5pPr marL="1828800" indent="0" algn="ctr">
+            <a:lvl5pPr marL="1828709" indent="0" algn="ctr">
               <a:buNone/>
               <a:defRPr>
                 <a:solidFill>
@@ -1208,7 +1612,7 @@
                 </a:solidFill>
               </a:defRPr>
             </a:lvl5pPr>
-            <a:lvl6pPr marL="2286000" indent="0" algn="ctr">
+            <a:lvl6pPr marL="2285886" indent="0" algn="ctr">
               <a:buNone/>
               <a:defRPr>
                 <a:solidFill>
@@ -1218,7 +1622,7 @@
                 </a:solidFill>
               </a:defRPr>
             </a:lvl6pPr>
-            <a:lvl7pPr marL="2743200" indent="0" algn="ctr">
+            <a:lvl7pPr marL="2743062" indent="0" algn="ctr">
               <a:buNone/>
               <a:defRPr>
                 <a:solidFill>
@@ -1228,7 +1632,7 @@
                 </a:solidFill>
               </a:defRPr>
             </a:lvl7pPr>
-            <a:lvl8pPr marL="3200400" indent="0" algn="ctr">
+            <a:lvl8pPr marL="3200240" indent="0" algn="ctr">
               <a:buNone/>
               <a:defRPr>
                 <a:solidFill>
@@ -1238,7 +1642,7 @@
                 </a:solidFill>
               </a:defRPr>
             </a:lvl8pPr>
-            <a:lvl9pPr marL="3657600" indent="0" algn="ctr">
+            <a:lvl9pPr marL="3657418" indent="0" algn="ctr">
               <a:buNone/>
               <a:defRPr>
                 <a:solidFill>
@@ -1274,7 +1678,7 @@
           <a:p>
             <a:fld id="{5BCAD085-E8A6-8845-BD4E-CB4CCA059FC4}" type="datetimeFigureOut">
               <a:rPr lang="en-US" smtClean="0"/>
-              <a:t>7/1/2026</a:t>
+              <a:t>7/2/2026</a:t>
             </a:fld>
             <a:endParaRPr lang="en-US"/>
           </a:p>
@@ -1454,7 +1858,7 @@
           <a:p>
             <a:fld id="{5BCAD085-E8A6-8845-BD4E-CB4CCA059FC4}" type="datetimeFigureOut">
               <a:rPr lang="en-US" smtClean="0"/>
-              <a:t>7/1/2026</a:t>
+              <a:t>7/2/2026</a:t>
             </a:fld>
             <a:endParaRPr lang="en-US"/>
           </a:p>
@@ -1556,7 +1960,7 @@
         </p:nvSpPr>
         <p:spPr>
           <a:xfrm>
-            <a:off x="6629400" y="274638"/>
+            <a:off x="6629400" y="274643"/>
             <a:ext cx="2057400" cy="5851525"/>
           </a:xfrm>
         </p:spPr>
@@ -1583,7 +1987,7 @@
         </p:nvSpPr>
         <p:spPr>
           <a:xfrm>
-            <a:off x="457200" y="274638"/>
+            <a:off x="457200" y="274643"/>
             <a:ext cx="6019800" cy="5851525"/>
           </a:xfrm>
         </p:spPr>
@@ -1644,7 +2048,7 @@
           <a:p>
             <a:fld id="{5BCAD085-E8A6-8845-BD4E-CB4CCA059FC4}" type="datetimeFigureOut">
               <a:rPr lang="en-US" smtClean="0"/>
-              <a:t>7/1/2026</a:t>
+              <a:t>7/2/2026</a:t>
             </a:fld>
             <a:endParaRPr lang="en-US"/>
           </a:p>
@@ -1824,7 +2228,7 @@
           <a:p>
             <a:fld id="{5BCAD085-E8A6-8845-BD4E-CB4CCA059FC4}" type="datetimeFigureOut">
               <a:rPr lang="en-US" smtClean="0"/>
-              <a:t>7/1/2026</a:t>
+              <a:t>7/2/2026</a:t>
             </a:fld>
             <a:endParaRPr lang="en-US"/>
           </a:p>
@@ -1926,7 +2330,7 @@
         </p:nvSpPr>
         <p:spPr>
           <a:xfrm>
-            <a:off x="722313" y="4406900"/>
+            <a:off x="722313" y="4406905"/>
             <a:ext cx="7772400" cy="1362075"/>
           </a:xfrm>
         </p:spPr>
@@ -1974,7 +2378,7 @@
                 </a:solidFill>
               </a:defRPr>
             </a:lvl1pPr>
-            <a:lvl2pPr marL="457200" indent="0">
+            <a:lvl2pPr marL="457178" indent="0">
               <a:buNone/>
               <a:defRPr sz="1800">
                 <a:solidFill>
@@ -1984,7 +2388,7 @@
                 </a:solidFill>
               </a:defRPr>
             </a:lvl2pPr>
-            <a:lvl3pPr marL="914400" indent="0">
+            <a:lvl3pPr marL="914354" indent="0">
               <a:buNone/>
               <a:defRPr sz="1600">
                 <a:solidFill>
@@ -1994,7 +2398,7 @@
                 </a:solidFill>
               </a:defRPr>
             </a:lvl3pPr>
-            <a:lvl4pPr marL="1371600" indent="0">
+            <a:lvl4pPr marL="1371532" indent="0">
               <a:buNone/>
               <a:defRPr sz="1400">
                 <a:solidFill>
@@ -2004,7 +2408,7 @@
                 </a:solidFill>
               </a:defRPr>
             </a:lvl4pPr>
-            <a:lvl5pPr marL="1828800" indent="0">
+            <a:lvl5pPr marL="1828709" indent="0">
               <a:buNone/>
               <a:defRPr sz="1400">
                 <a:solidFill>
@@ -2014,7 +2418,7 @@
                 </a:solidFill>
               </a:defRPr>
             </a:lvl5pPr>
-            <a:lvl6pPr marL="2286000" indent="0">
+            <a:lvl6pPr marL="2285886" indent="0">
               <a:buNone/>
               <a:defRPr sz="1400">
                 <a:solidFill>
@@ -2024,7 +2428,7 @@
                 </a:solidFill>
               </a:defRPr>
             </a:lvl6pPr>
-            <a:lvl7pPr marL="2743200" indent="0">
+            <a:lvl7pPr marL="2743062" indent="0">
               <a:buNone/>
               <a:defRPr sz="1400">
                 <a:solidFill>
@@ -2034,7 +2438,7 @@
                 </a:solidFill>
               </a:defRPr>
             </a:lvl7pPr>
-            <a:lvl8pPr marL="3200400" indent="0">
+            <a:lvl8pPr marL="3200240" indent="0">
               <a:buNone/>
               <a:defRPr sz="1400">
                 <a:solidFill>
@@ -2044,7 +2448,7 @@
                 </a:solidFill>
               </a:defRPr>
             </a:lvl8pPr>
-            <a:lvl9pPr marL="3657600" indent="0">
+            <a:lvl9pPr marL="3657418" indent="0">
               <a:buNone/>
               <a:defRPr sz="1400">
                 <a:solidFill>
@@ -2081,7 +2485,7 @@
           <a:p>
             <a:fld id="{5BCAD085-E8A6-8845-BD4E-CB4CCA059FC4}" type="datetimeFigureOut">
               <a:rPr lang="en-US" smtClean="0"/>
-              <a:t>7/1/2026</a:t>
+              <a:t>7/2/2026</a:t>
             </a:fld>
             <a:endParaRPr lang="en-US"/>
           </a:p>
@@ -2205,7 +2609,7 @@
         </p:nvSpPr>
         <p:spPr>
           <a:xfrm>
-            <a:off x="457200" y="1600200"/>
+            <a:off x="457200" y="1600205"/>
             <a:ext cx="4038600" cy="4525963"/>
           </a:xfrm>
         </p:spPr>
@@ -2289,7 +2693,7 @@
         </p:nvSpPr>
         <p:spPr>
           <a:xfrm>
-            <a:off x="4648200" y="1600200"/>
+            <a:off x="4648200" y="1600205"/>
             <a:ext cx="4038600" cy="4525963"/>
           </a:xfrm>
         </p:spPr>
@@ -2378,7 +2782,7 @@
           <a:p>
             <a:fld id="{5BCAD085-E8A6-8845-BD4E-CB4CCA059FC4}" type="datetimeFigureOut">
               <a:rPr lang="en-US" smtClean="0"/>
-              <a:t>7/1/2026</a:t>
+              <a:t>7/2/2026</a:t>
             </a:fld>
             <a:endParaRPr lang="en-US"/>
           </a:p>
@@ -2507,7 +2911,7 @@
         <p:spPr>
           <a:xfrm>
             <a:off x="457200" y="1535113"/>
-            <a:ext cx="4040188" cy="639762"/>
+            <a:ext cx="4040188" cy="639763"/>
           </a:xfrm>
         </p:spPr>
         <p:txBody>
@@ -2517,35 +2921,35 @@
               <a:buNone/>
               <a:defRPr sz="2400" b="1"/>
             </a:lvl1pPr>
-            <a:lvl2pPr marL="457200" indent="0">
+            <a:lvl2pPr marL="457178" indent="0">
               <a:buNone/>
               <a:defRPr sz="2000" b="1"/>
             </a:lvl2pPr>
-            <a:lvl3pPr marL="914400" indent="0">
+            <a:lvl3pPr marL="914354" indent="0">
               <a:buNone/>
               <a:defRPr sz="1800" b="1"/>
             </a:lvl3pPr>
-            <a:lvl4pPr marL="1371600" indent="0">
+            <a:lvl4pPr marL="1371532" indent="0">
               <a:buNone/>
               <a:defRPr sz="1600" b="1"/>
             </a:lvl4pPr>
-            <a:lvl5pPr marL="1828800" indent="0">
+            <a:lvl5pPr marL="1828709" indent="0">
               <a:buNone/>
               <a:defRPr sz="1600" b="1"/>
             </a:lvl5pPr>
-            <a:lvl6pPr marL="2286000" indent="0">
+            <a:lvl6pPr marL="2285886" indent="0">
               <a:buNone/>
               <a:defRPr sz="1600" b="1"/>
             </a:lvl6pPr>
-            <a:lvl7pPr marL="2743200" indent="0">
+            <a:lvl7pPr marL="2743062" indent="0">
               <a:buNone/>
               <a:defRPr sz="1600" b="1"/>
             </a:lvl7pPr>
-            <a:lvl8pPr marL="3200400" indent="0">
+            <a:lvl8pPr marL="3200240" indent="0">
               <a:buNone/>
               <a:defRPr sz="1600" b="1"/>
             </a:lvl8pPr>
-            <a:lvl9pPr marL="3657600" indent="0">
+            <a:lvl9pPr marL="3657418" indent="0">
               <a:buNone/>
               <a:defRPr sz="1600" b="1"/>
             </a:lvl9pPr>
@@ -2655,8 +3059,8 @@
         </p:nvSpPr>
         <p:spPr>
           <a:xfrm>
-            <a:off x="4645025" y="1535113"/>
-            <a:ext cx="4041775" cy="639762"/>
+            <a:off x="4645029" y="1535113"/>
+            <a:ext cx="4041775" cy="639763"/>
           </a:xfrm>
         </p:spPr>
         <p:txBody>
@@ -2666,35 +3070,35 @@
               <a:buNone/>
               <a:defRPr sz="2400" b="1"/>
             </a:lvl1pPr>
-            <a:lvl2pPr marL="457200" indent="0">
+            <a:lvl2pPr marL="457178" indent="0">
               <a:buNone/>
               <a:defRPr sz="2000" b="1"/>
             </a:lvl2pPr>
-            <a:lvl3pPr marL="914400" indent="0">
+            <a:lvl3pPr marL="914354" indent="0">
               <a:buNone/>
               <a:defRPr sz="1800" b="1"/>
             </a:lvl3pPr>
-            <a:lvl4pPr marL="1371600" indent="0">
+            <a:lvl4pPr marL="1371532" indent="0">
               <a:buNone/>
               <a:defRPr sz="1600" b="1"/>
             </a:lvl4pPr>
-            <a:lvl5pPr marL="1828800" indent="0">
+            <a:lvl5pPr marL="1828709" indent="0">
               <a:buNone/>
               <a:defRPr sz="1600" b="1"/>
             </a:lvl5pPr>
-            <a:lvl6pPr marL="2286000" indent="0">
+            <a:lvl6pPr marL="2285886" indent="0">
               <a:buNone/>
               <a:defRPr sz="1600" b="1"/>
             </a:lvl6pPr>
-            <a:lvl7pPr marL="2743200" indent="0">
+            <a:lvl7pPr marL="2743062" indent="0">
               <a:buNone/>
               <a:defRPr sz="1600" b="1"/>
             </a:lvl7pPr>
-            <a:lvl8pPr marL="3200400" indent="0">
+            <a:lvl8pPr marL="3200240" indent="0">
               <a:buNone/>
               <a:defRPr sz="1600" b="1"/>
             </a:lvl8pPr>
-            <a:lvl9pPr marL="3657600" indent="0">
+            <a:lvl9pPr marL="3657418" indent="0">
               <a:buNone/>
               <a:defRPr sz="1600" b="1"/>
             </a:lvl9pPr>
@@ -2720,7 +3124,7 @@
         </p:nvSpPr>
         <p:spPr>
           <a:xfrm>
-            <a:off x="4645025" y="2174875"/>
+            <a:off x="4645029" y="2174875"/>
             <a:ext cx="4041775" cy="3951288"/>
           </a:xfrm>
         </p:spPr>
@@ -2809,7 +3213,7 @@
           <a:p>
             <a:fld id="{5BCAD085-E8A6-8845-BD4E-CB4CCA059FC4}" type="datetimeFigureOut">
               <a:rPr lang="en-US" smtClean="0"/>
-              <a:t>7/1/2026</a:t>
+              <a:t>7/2/2026</a:t>
             </a:fld>
             <a:endParaRPr lang="en-US"/>
           </a:p>
@@ -2938,7 +3342,7 @@
           <a:p>
             <a:fld id="{5BCAD085-E8A6-8845-BD4E-CB4CCA059FC4}" type="datetimeFigureOut">
               <a:rPr lang="en-US" smtClean="0"/>
-              <a:t>7/1/2026</a:t>
+              <a:t>7/2/2026</a:t>
             </a:fld>
             <a:endParaRPr lang="en-US"/>
           </a:p>
@@ -3045,7 +3449,7 @@
           <a:p>
             <a:fld id="{5BCAD085-E8A6-8845-BD4E-CB4CCA059FC4}" type="datetimeFigureOut">
               <a:rPr lang="en-US" smtClean="0"/>
-              <a:t>7/1/2026</a:t>
+              <a:t>7/2/2026</a:t>
             </a:fld>
             <a:endParaRPr lang="en-US"/>
           </a:p>
@@ -3147,8 +3551,8 @@
         </p:nvSpPr>
         <p:spPr>
           <a:xfrm>
-            <a:off x="457200" y="273050"/>
-            <a:ext cx="3008313" cy="1162050"/>
+            <a:off x="457204" y="273049"/>
+            <a:ext cx="3008313" cy="1162051"/>
           </a:xfrm>
         </p:spPr>
         <p:txBody>
@@ -3178,7 +3582,7 @@
         </p:nvSpPr>
         <p:spPr>
           <a:xfrm>
-            <a:off x="3575050" y="273050"/>
+            <a:off x="3575050" y="273056"/>
             <a:ext cx="5111750" cy="5853113"/>
           </a:xfrm>
         </p:spPr>
@@ -3262,7 +3666,7 @@
         </p:nvSpPr>
         <p:spPr>
           <a:xfrm>
-            <a:off x="457200" y="1435100"/>
+            <a:off x="457204" y="1435104"/>
             <a:ext cx="3008313" cy="4691063"/>
           </a:xfrm>
         </p:spPr>
@@ -3273,35 +3677,35 @@
               <a:buNone/>
               <a:defRPr sz="1400"/>
             </a:lvl1pPr>
-            <a:lvl2pPr marL="457200" indent="0">
+            <a:lvl2pPr marL="457178" indent="0">
               <a:buNone/>
               <a:defRPr sz="1200"/>
             </a:lvl2pPr>
-            <a:lvl3pPr marL="914400" indent="0">
+            <a:lvl3pPr marL="914354" indent="0">
               <a:buNone/>
               <a:defRPr sz="1000"/>
             </a:lvl3pPr>
-            <a:lvl4pPr marL="1371600" indent="0">
+            <a:lvl4pPr marL="1371532" indent="0">
               <a:buNone/>
               <a:defRPr sz="900"/>
             </a:lvl4pPr>
-            <a:lvl5pPr marL="1828800" indent="0">
+            <a:lvl5pPr marL="1828709" indent="0">
               <a:buNone/>
               <a:defRPr sz="900"/>
             </a:lvl5pPr>
-            <a:lvl6pPr marL="2286000" indent="0">
+            <a:lvl6pPr marL="2285886" indent="0">
               <a:buNone/>
               <a:defRPr sz="900"/>
             </a:lvl6pPr>
-            <a:lvl7pPr marL="2743200" indent="0">
+            <a:lvl7pPr marL="2743062" indent="0">
               <a:buNone/>
               <a:defRPr sz="900"/>
             </a:lvl7pPr>
-            <a:lvl8pPr marL="3200400" indent="0">
+            <a:lvl8pPr marL="3200240" indent="0">
               <a:buNone/>
               <a:defRPr sz="900"/>
             </a:lvl8pPr>
-            <a:lvl9pPr marL="3657600" indent="0">
+            <a:lvl9pPr marL="3657418" indent="0">
               <a:buNone/>
               <a:defRPr sz="900"/>
             </a:lvl9pPr>
@@ -3332,7 +3736,7 @@
           <a:p>
             <a:fld id="{5BCAD085-E8A6-8845-BD4E-CB4CCA059FC4}" type="datetimeFigureOut">
               <a:rPr lang="en-US" smtClean="0"/>
-              <a:t>7/1/2026</a:t>
+              <a:t>7/2/2026</a:t>
             </a:fld>
             <a:endParaRPr lang="en-US"/>
           </a:p>
@@ -3435,7 +3839,7 @@
         <p:spPr>
           <a:xfrm>
             <a:off x="1792288" y="4800600"/>
-            <a:ext cx="5486400" cy="566738"/>
+            <a:ext cx="5486400" cy="566739"/>
           </a:xfrm>
         </p:spPr>
         <p:txBody>
@@ -3476,35 +3880,35 @@
               <a:buNone/>
               <a:defRPr sz="3200"/>
             </a:lvl1pPr>
-            <a:lvl2pPr marL="457200" indent="0">
+            <a:lvl2pPr marL="457178" indent="0">
               <a:buNone/>
               <a:defRPr sz="2800"/>
             </a:lvl2pPr>
-            <a:lvl3pPr marL="914400" indent="0">
+            <a:lvl3pPr marL="914354" indent="0">
               <a:buNone/>
               <a:defRPr sz="2400"/>
             </a:lvl3pPr>
-            <a:lvl4pPr marL="1371600" indent="0">
+            <a:lvl4pPr marL="1371532" indent="0">
               <a:buNone/>
               <a:defRPr sz="2000"/>
             </a:lvl4pPr>
-            <a:lvl5pPr marL="1828800" indent="0">
+            <a:lvl5pPr marL="1828709" indent="0">
               <a:buNone/>
               <a:defRPr sz="2000"/>
             </a:lvl5pPr>
-            <a:lvl6pPr marL="2286000" indent="0">
+            <a:lvl6pPr marL="2285886" indent="0">
               <a:buNone/>
               <a:defRPr sz="2000"/>
             </a:lvl6pPr>
-            <a:lvl7pPr marL="2743200" indent="0">
+            <a:lvl7pPr marL="2743062" indent="0">
               <a:buNone/>
               <a:defRPr sz="2000"/>
             </a:lvl7pPr>
-            <a:lvl8pPr marL="3200400" indent="0">
+            <a:lvl8pPr marL="3200240" indent="0">
               <a:buNone/>
               <a:defRPr sz="2000"/>
             </a:lvl8pPr>
-            <a:lvl9pPr marL="3657600" indent="0">
+            <a:lvl9pPr marL="3657418" indent="0">
               <a:buNone/>
               <a:defRPr sz="2000"/>
             </a:lvl9pPr>
@@ -3527,7 +3931,7 @@
         <p:spPr>
           <a:xfrm>
             <a:off x="1792288" y="5367338"/>
-            <a:ext cx="5486400" cy="804862"/>
+            <a:ext cx="5486400" cy="804863"/>
           </a:xfrm>
         </p:spPr>
         <p:txBody>
@@ -3537,35 +3941,35 @@
               <a:buNone/>
               <a:defRPr sz="1400"/>
             </a:lvl1pPr>
-            <a:lvl2pPr marL="457200" indent="0">
+            <a:lvl2pPr marL="457178" indent="0">
               <a:buNone/>
               <a:defRPr sz="1200"/>
             </a:lvl2pPr>
-            <a:lvl3pPr marL="914400" indent="0">
+            <a:lvl3pPr marL="914354" indent="0">
               <a:buNone/>
               <a:defRPr sz="1000"/>
             </a:lvl3pPr>
-            <a:lvl4pPr marL="1371600" indent="0">
+            <a:lvl4pPr marL="1371532" indent="0">
               <a:buNone/>
               <a:defRPr sz="900"/>
             </a:lvl4pPr>
-            <a:lvl5pPr marL="1828800" indent="0">
+            <a:lvl5pPr marL="1828709" indent="0">
               <a:buNone/>
               <a:defRPr sz="900"/>
             </a:lvl5pPr>
-            <a:lvl6pPr marL="2286000" indent="0">
+            <a:lvl6pPr marL="2285886" indent="0">
               <a:buNone/>
               <a:defRPr sz="900"/>
             </a:lvl6pPr>
-            <a:lvl7pPr marL="2743200" indent="0">
+            <a:lvl7pPr marL="2743062" indent="0">
               <a:buNone/>
               <a:defRPr sz="900"/>
             </a:lvl7pPr>
-            <a:lvl8pPr marL="3200400" indent="0">
+            <a:lvl8pPr marL="3200240" indent="0">
               <a:buNone/>
               <a:defRPr sz="900"/>
             </a:lvl8pPr>
-            <a:lvl9pPr marL="3657600" indent="0">
+            <a:lvl9pPr marL="3657418" indent="0">
               <a:buNone/>
               <a:defRPr sz="900"/>
             </a:lvl9pPr>
@@ -3596,7 +4000,7 @@
           <a:p>
             <a:fld id="{5BCAD085-E8A6-8845-BD4E-CB4CCA059FC4}" type="datetimeFigureOut">
               <a:rPr lang="en-US" smtClean="0"/>
-              <a:t>7/1/2026</a:t>
+              <a:t>7/2/2026</a:t>
             </a:fld>
             <a:endParaRPr lang="en-US"/>
           </a:p>
@@ -3703,7 +4107,7 @@
         </p:nvSpPr>
         <p:spPr>
           <a:xfrm>
-            <a:off x="457200" y="274638"/>
+            <a:off x="457200" y="274639"/>
             <a:ext cx="8229600" cy="1143000"/>
           </a:xfrm>
           <a:prstGeom prst="rect">
@@ -3735,7 +4139,7 @@
         </p:nvSpPr>
         <p:spPr>
           <a:xfrm>
-            <a:off x="457200" y="1600200"/>
+            <a:off x="457200" y="1600205"/>
             <a:ext cx="8229600" cy="4525963"/>
           </a:xfrm>
           <a:prstGeom prst="rect">
@@ -3796,7 +4200,7 @@
         </p:nvSpPr>
         <p:spPr>
           <a:xfrm>
-            <a:off x="457200" y="6356350"/>
+            <a:off x="457200" y="6356355"/>
             <a:ext cx="2133600" cy="365125"/>
           </a:xfrm>
           <a:prstGeom prst="rect">
@@ -3819,7 +4223,7 @@
           <a:p>
             <a:fld id="{5BCAD085-E8A6-8845-BD4E-CB4CCA059FC4}" type="datetimeFigureOut">
               <a:rPr lang="en-US" smtClean="0"/>
-              <a:t>7/1/2026</a:t>
+              <a:t>7/2/2026</a:t>
             </a:fld>
             <a:endParaRPr lang="en-US"/>
           </a:p>
@@ -3837,7 +4241,7 @@
         </p:nvSpPr>
         <p:spPr>
           <a:xfrm>
-            <a:off x="3124200" y="6356350"/>
+            <a:off x="3124200" y="6356355"/>
             <a:ext cx="2895600" cy="365125"/>
           </a:xfrm>
           <a:prstGeom prst="rect">
@@ -3874,7 +4278,7 @@
         </p:nvSpPr>
         <p:spPr>
           <a:xfrm>
-            <a:off x="6553200" y="6356350"/>
+            <a:off x="6553200" y="6356355"/>
             <a:ext cx="2133600" cy="365125"/>
           </a:xfrm>
           <a:prstGeom prst="rect">
@@ -3938,7 +4342,7 @@
   </mc:AlternateContent>
   <p:txStyles>
     <p:titleStyle>
-      <a:lvl1pPr algn="ctr" defTabSz="457200" rtl="0" eaLnBrk="1" latinLnBrk="0" hangingPunct="1">
+      <a:lvl1pPr algn="ctr" defTabSz="457178" rtl="0" eaLnBrk="1" latinLnBrk="0" hangingPunct="1">
         <a:spcBef>
           <a:spcPct val="0"/>
         </a:spcBef>
@@ -3954,7 +4358,7 @@
       </a:lvl1pPr>
     </p:titleStyle>
     <p:bodyStyle>
-      <a:lvl1pPr marL="342900" indent="-342900" algn="l" defTabSz="457200" rtl="0" eaLnBrk="1" latinLnBrk="0" hangingPunct="1">
+      <a:lvl1pPr marL="342882" indent="-342882" algn="l" defTabSz="457178" rtl="0" eaLnBrk="1" latinLnBrk="0" hangingPunct="1">
         <a:spcBef>
           <a:spcPct val="20000"/>
         </a:spcBef>
@@ -3969,7 +4373,7 @@
           <a:cs typeface="+mn-cs"/>
         </a:defRPr>
       </a:lvl1pPr>
-      <a:lvl2pPr marL="742950" indent="-285750" algn="l" defTabSz="457200" rtl="0" eaLnBrk="1" latinLnBrk="0" hangingPunct="1">
+      <a:lvl2pPr marL="742913" indent="-285737" algn="l" defTabSz="457178" rtl="0" eaLnBrk="1" latinLnBrk="0" hangingPunct="1">
         <a:spcBef>
           <a:spcPct val="20000"/>
         </a:spcBef>
@@ -3984,7 +4388,7 @@
           <a:cs typeface="+mn-cs"/>
         </a:defRPr>
       </a:lvl2pPr>
-      <a:lvl3pPr marL="1143000" indent="-228600" algn="l" defTabSz="457200" rtl="0" eaLnBrk="1" latinLnBrk="0" hangingPunct="1">
+      <a:lvl3pPr marL="1142942" indent="-228589" algn="l" defTabSz="457178" rtl="0" eaLnBrk="1" latinLnBrk="0" hangingPunct="1">
         <a:spcBef>
           <a:spcPct val="20000"/>
         </a:spcBef>
@@ -3999,7 +4403,7 @@
           <a:cs typeface="+mn-cs"/>
         </a:defRPr>
       </a:lvl3pPr>
-      <a:lvl4pPr marL="1600200" indent="-228600" algn="l" defTabSz="457200" rtl="0" eaLnBrk="1" latinLnBrk="0" hangingPunct="1">
+      <a:lvl4pPr marL="1600120" indent="-228589" algn="l" defTabSz="457178" rtl="0" eaLnBrk="1" latinLnBrk="0" hangingPunct="1">
         <a:spcBef>
           <a:spcPct val="20000"/>
         </a:spcBef>
@@ -4014,7 +4418,7 @@
           <a:cs typeface="+mn-cs"/>
         </a:defRPr>
       </a:lvl4pPr>
-      <a:lvl5pPr marL="2057400" indent="-228600" algn="l" defTabSz="457200" rtl="0" eaLnBrk="1" latinLnBrk="0" hangingPunct="1">
+      <a:lvl5pPr marL="2057298" indent="-228589" algn="l" defTabSz="457178" rtl="0" eaLnBrk="1" latinLnBrk="0" hangingPunct="1">
         <a:spcBef>
           <a:spcPct val="20000"/>
         </a:spcBef>
@@ -4029,7 +4433,7 @@
           <a:cs typeface="+mn-cs"/>
         </a:defRPr>
       </a:lvl5pPr>
-      <a:lvl6pPr marL="2514600" indent="-228600" algn="l" defTabSz="457200" rtl="0" eaLnBrk="1" latinLnBrk="0" hangingPunct="1">
+      <a:lvl6pPr marL="2514474" indent="-228589" algn="l" defTabSz="457178" rtl="0" eaLnBrk="1" latinLnBrk="0" hangingPunct="1">
         <a:spcBef>
           <a:spcPct val="20000"/>
         </a:spcBef>
@@ -4044,7 +4448,7 @@
           <a:cs typeface="+mn-cs"/>
         </a:defRPr>
       </a:lvl6pPr>
-      <a:lvl7pPr marL="2971800" indent="-228600" algn="l" defTabSz="457200" rtl="0" eaLnBrk="1" latinLnBrk="0" hangingPunct="1">
+      <a:lvl7pPr marL="2971652" indent="-228589" algn="l" defTabSz="457178" rtl="0" eaLnBrk="1" latinLnBrk="0" hangingPunct="1">
         <a:spcBef>
           <a:spcPct val="20000"/>
         </a:spcBef>
@@ -4059,7 +4463,7 @@
           <a:cs typeface="+mn-cs"/>
         </a:defRPr>
       </a:lvl7pPr>
-      <a:lvl8pPr marL="3429000" indent="-228600" algn="l" defTabSz="457200" rtl="0" eaLnBrk="1" latinLnBrk="0" hangingPunct="1">
+      <a:lvl8pPr marL="3428829" indent="-228589" algn="l" defTabSz="457178" rtl="0" eaLnBrk="1" latinLnBrk="0" hangingPunct="1">
         <a:spcBef>
           <a:spcPct val="20000"/>
         </a:spcBef>
@@ -4074,7 +4478,7 @@
           <a:cs typeface="+mn-cs"/>
         </a:defRPr>
       </a:lvl8pPr>
-      <a:lvl9pPr marL="3886200" indent="-228600" algn="l" defTabSz="457200" rtl="0" eaLnBrk="1" latinLnBrk="0" hangingPunct="1">
+      <a:lvl9pPr marL="3886006" indent="-228589" algn="l" defTabSz="457178" rtl="0" eaLnBrk="1" latinLnBrk="0" hangingPunct="1">
         <a:spcBef>
           <a:spcPct val="20000"/>
         </a:spcBef>
@@ -4094,7 +4498,7 @@
       <a:defPPr>
         <a:defRPr lang="en-US"/>
       </a:defPPr>
-      <a:lvl1pPr marL="0" algn="l" defTabSz="457200" rtl="0" eaLnBrk="1" latinLnBrk="0" hangingPunct="1">
+      <a:lvl1pPr marL="0" algn="l" defTabSz="457178" rtl="0" eaLnBrk="1" latinLnBrk="0" hangingPunct="1">
         <a:defRPr sz="1800" kern="1200">
           <a:solidFill>
             <a:schemeClr val="tx1"/>
@@ -4104,7 +4508,7 @@
           <a:cs typeface="+mn-cs"/>
         </a:defRPr>
       </a:lvl1pPr>
-      <a:lvl2pPr marL="457200" algn="l" defTabSz="457200" rtl="0" eaLnBrk="1" latinLnBrk="0" hangingPunct="1">
+      <a:lvl2pPr marL="457178" algn="l" defTabSz="457178" rtl="0" eaLnBrk="1" latinLnBrk="0" hangingPunct="1">
         <a:defRPr sz="1800" kern="1200">
           <a:solidFill>
             <a:schemeClr val="tx1"/>
@@ -4114,7 +4518,7 @@
           <a:cs typeface="+mn-cs"/>
         </a:defRPr>
       </a:lvl2pPr>
-      <a:lvl3pPr marL="914400" algn="l" defTabSz="457200" rtl="0" eaLnBrk="1" latinLnBrk="0" hangingPunct="1">
+      <a:lvl3pPr marL="914354" algn="l" defTabSz="457178" rtl="0" eaLnBrk="1" latinLnBrk="0" hangingPunct="1">
         <a:defRPr sz="1800" kern="1200">
           <a:solidFill>
             <a:schemeClr val="tx1"/>
@@ -4124,7 +4528,7 @@
           <a:cs typeface="+mn-cs"/>
         </a:defRPr>
       </a:lvl3pPr>
-      <a:lvl4pPr marL="1371600" algn="l" defTabSz="457200" rtl="0" eaLnBrk="1" latinLnBrk="0" hangingPunct="1">
+      <a:lvl4pPr marL="1371532" algn="l" defTabSz="457178" rtl="0" eaLnBrk="1" latinLnBrk="0" hangingPunct="1">
         <a:defRPr sz="1800" kern="1200">
           <a:solidFill>
             <a:schemeClr val="tx1"/>
@@ -4134,7 +4538,7 @@
           <a:cs typeface="+mn-cs"/>
         </a:defRPr>
       </a:lvl4pPr>
-      <a:lvl5pPr marL="1828800" algn="l" defTabSz="457200" rtl="0" eaLnBrk="1" latinLnBrk="0" hangingPunct="1">
+      <a:lvl5pPr marL="1828709" algn="l" defTabSz="457178" rtl="0" eaLnBrk="1" latinLnBrk="0" hangingPunct="1">
         <a:defRPr sz="1800" kern="1200">
           <a:solidFill>
             <a:schemeClr val="tx1"/>
@@ -4144,7 +4548,7 @@
           <a:cs typeface="+mn-cs"/>
         </a:defRPr>
       </a:lvl5pPr>
-      <a:lvl6pPr marL="2286000" algn="l" defTabSz="457200" rtl="0" eaLnBrk="1" latinLnBrk="0" hangingPunct="1">
+      <a:lvl6pPr marL="2285886" algn="l" defTabSz="457178" rtl="0" eaLnBrk="1" latinLnBrk="0" hangingPunct="1">
         <a:defRPr sz="1800" kern="1200">
           <a:solidFill>
             <a:schemeClr val="tx1"/>
@@ -4154,7 +4558,7 @@
           <a:cs typeface="+mn-cs"/>
         </a:defRPr>
       </a:lvl6pPr>
-      <a:lvl7pPr marL="2743200" algn="l" defTabSz="457200" rtl="0" eaLnBrk="1" latinLnBrk="0" hangingPunct="1">
+      <a:lvl7pPr marL="2743062" algn="l" defTabSz="457178" rtl="0" eaLnBrk="1" latinLnBrk="0" hangingPunct="1">
         <a:defRPr sz="1800" kern="1200">
           <a:solidFill>
             <a:schemeClr val="tx1"/>
@@ -4164,7 +4568,7 @@
           <a:cs typeface="+mn-cs"/>
         </a:defRPr>
       </a:lvl7pPr>
-      <a:lvl8pPr marL="3200400" algn="l" defTabSz="457200" rtl="0" eaLnBrk="1" latinLnBrk="0" hangingPunct="1">
+      <a:lvl8pPr marL="3200240" algn="l" defTabSz="457178" rtl="0" eaLnBrk="1" latinLnBrk="0" hangingPunct="1">
         <a:defRPr sz="1800" kern="1200">
           <a:solidFill>
             <a:schemeClr val="tx1"/>
@@ -4174,7 +4578,7 @@
           <a:cs typeface="+mn-cs"/>
         </a:defRPr>
       </a:lvl8pPr>
-      <a:lvl9pPr marL="3657600" algn="l" defTabSz="457200" rtl="0" eaLnBrk="1" latinLnBrk="0" hangingPunct="1">
+      <a:lvl9pPr marL="3657418" algn="l" defTabSz="457178" rtl="0" eaLnBrk="1" latinLnBrk="0" hangingPunct="1">
         <a:defRPr sz="1800" kern="1200">
           <a:solidFill>
             <a:schemeClr val="tx1"/>
@@ -4218,8 +4622,8 @@
         </p:nvSpPr>
         <p:spPr>
           <a:xfrm>
-            <a:off x="4868182" y="4786086"/>
-            <a:ext cx="3486150" cy="1600200"/>
+            <a:off x="5096785" y="598551"/>
+            <a:ext cx="3486151" cy="1600200"/>
           </a:xfrm>
         </p:spPr>
         <p:txBody>
@@ -4249,48 +4653,52 @@
             </a:pPr>
             <a:r>
               <a:rPr lang="en-US" sz="1800" b="1" dirty="0">
-                <a:effectLst/>
                 <a:latin typeface="Calibri" panose="020F0502020204030204" pitchFamily="34" charset="0"/>
                 <a:ea typeface="Calibri" panose="020F0502020204030204" pitchFamily="34" charset="0"/>
                 <a:cs typeface="Times New Roman" panose="02020603050405020304" pitchFamily="18" charset="0"/>
               </a:rPr>
-              <a:t>DPT. XXXX</a:t>
+              <a:t>Dpt. </a:t>
+            </a:r>
+            <a:r>
+              <a:rPr lang="en-US" sz="1800" b="1" dirty="0" err="1">
+                <a:latin typeface="Calibri" panose="020F0502020204030204" pitchFamily="34" charset="0"/>
+                <a:ea typeface="Calibri" panose="020F0502020204030204" pitchFamily="34" charset="0"/>
+                <a:cs typeface="Times New Roman" panose="02020603050405020304" pitchFamily="18" charset="0"/>
+              </a:rPr>
+              <a:t>Analistas</a:t>
+            </a:r>
+            <a:r>
+              <a:rPr lang="en-US" sz="1800" b="1" dirty="0">
+                <a:latin typeface="Calibri" panose="020F0502020204030204" pitchFamily="34" charset="0"/>
+                <a:ea typeface="Calibri" panose="020F0502020204030204" pitchFamily="34" charset="0"/>
+                <a:cs typeface="Times New Roman" panose="02020603050405020304" pitchFamily="18" charset="0"/>
+              </a:rPr>
+              <a:t> de Datos de RRHH</a:t>
             </a:r>
             <a:br>
               <a:rPr lang="en-US" sz="1800" dirty="0">
-                <a:effectLst/>
                 <a:latin typeface="Calibri" panose="020F0502020204030204" pitchFamily="34" charset="0"/>
                 <a:ea typeface="Calibri" panose="020F0502020204030204" pitchFamily="34" charset="0"/>
                 <a:cs typeface="Times New Roman" panose="02020603050405020304" pitchFamily="18" charset="0"/>
               </a:rPr>
             </a:br>
             <a:r>
+              <a:rPr lang="en-US" sz="1800" dirty="0" err="1">
+                <a:latin typeface="Calibri" panose="020F0502020204030204" pitchFamily="34" charset="0"/>
+                <a:ea typeface="Calibri" panose="020F0502020204030204" pitchFamily="34" charset="0"/>
+                <a:cs typeface="Times New Roman" panose="02020603050405020304" pitchFamily="18" charset="0"/>
+              </a:rPr>
+              <a:t>Reunión</a:t>
+            </a:r>
+            <a:r>
               <a:rPr lang="en-US" sz="1800" dirty="0">
                 <a:latin typeface="Calibri" panose="020F0502020204030204" pitchFamily="34" charset="0"/>
                 <a:ea typeface="Calibri" panose="020F0502020204030204" pitchFamily="34" charset="0"/>
                 <a:cs typeface="Times New Roman" panose="02020603050405020304" pitchFamily="18" charset="0"/>
               </a:rPr>
-              <a:t>EMPRESA</a:t>
-            </a:r>
-            <a:br>
-              <a:rPr lang="en-US" sz="1800" dirty="0">
-                <a:effectLst/>
-                <a:latin typeface="Calibri" panose="020F0502020204030204" pitchFamily="34" charset="0"/>
-                <a:ea typeface="Calibri" panose="020F0502020204030204" pitchFamily="34" charset="0"/>
-                <a:cs typeface="Times New Roman" panose="02020603050405020304" pitchFamily="18" charset="0"/>
-              </a:rPr>
-            </a:br>
-            <a:r>
-              <a:rPr lang="en-US" sz="1800" dirty="0">
-                <a:effectLst/>
-                <a:latin typeface="Calibri" panose="020F0502020204030204" pitchFamily="34" charset="0"/>
-                <a:ea typeface="Calibri" panose="020F0502020204030204" pitchFamily="34" charset="0"/>
-                <a:cs typeface="Times New Roman" panose="02020603050405020304" pitchFamily="18" charset="0"/>
-              </a:rPr>
-              <a:t>XX-XX-2026</a:t>
+              <a:t> 06/07/2026</a:t>
             </a:r>
             <a:endParaRPr lang="es-ES" sz="1800" dirty="0">
-              <a:effectLst/>
               <a:latin typeface="Calibri" panose="020F0502020204030204" pitchFamily="34" charset="0"/>
               <a:ea typeface="Calibri" panose="020F0502020204030204" pitchFamily="34" charset="0"/>
               <a:cs typeface="Times New Roman" panose="02020603050405020304" pitchFamily="18" charset="0"/>
@@ -4308,53 +4716,6 @@
           </a:p>
         </p:txBody>
       </p:sp>
-      <p:pic>
-        <p:nvPicPr>
-          <p:cNvPr id="4" name="Picture 2" descr="Barcelona Activa - IT Academy | Digital Future Society">
-            <a:extLst>
-              <a:ext uri="{FF2B5EF4-FFF2-40B4-BE49-F238E27FC236}">
-                <a16:creationId xmlns:a16="http://schemas.microsoft.com/office/drawing/2014/main" id="{D585895B-3D46-BDBA-08B8-39E08F99D555}"/>
-              </a:ext>
-            </a:extLst>
-          </p:cNvPr>
-          <p:cNvPicPr>
-            <a:picLocks noChangeAspect="1" noChangeArrowheads="1"/>
-          </p:cNvPicPr>
-          <p:nvPr/>
-        </p:nvPicPr>
-        <p:blipFill rotWithShape="1">
-          <a:blip r:embed="rId3">
-            <a:extLst>
-              <a:ext uri="{28A0092B-C50C-407E-A947-70E740481C1C}">
-                <a14:useLocalDpi xmlns:a14="http://schemas.microsoft.com/office/drawing/2010/main" val="0"/>
-              </a:ext>
-            </a:extLst>
-          </a:blip>
-          <a:srcRect l="2923" t="36984" r="1369" b="34461"/>
-          <a:stretch>
-            <a:fillRect/>
-          </a:stretch>
-        </p:blipFill>
-        <p:spPr bwMode="auto">
-          <a:xfrm>
-            <a:off x="644306" y="536280"/>
-            <a:ext cx="2068839" cy="616525"/>
-          </a:xfrm>
-          <a:prstGeom prst="rect">
-            <a:avLst/>
-          </a:prstGeom>
-          <a:noFill/>
-          <a:extLst>
-            <a:ext uri="{909E8E84-426E-40DD-AFC4-6F175D3DCCD1}">
-              <a14:hiddenFill xmlns:a14="http://schemas.microsoft.com/office/drawing/2010/main">
-                <a:solidFill>
-                  <a:srgbClr val="FFFFFF"/>
-                </a:solidFill>
-              </a14:hiddenFill>
-            </a:ext>
-          </a:extLst>
-        </p:spPr>
-      </p:pic>
       <p:sp>
         <p:nvSpPr>
           <p:cNvPr id="6" name="Título 5">
@@ -4373,7 +4734,7 @@
         </p:nvSpPr>
         <p:spPr>
           <a:xfrm>
-            <a:off x="457200" y="2628900"/>
+            <a:off x="457200" y="3069442"/>
             <a:ext cx="8229600" cy="1600200"/>
           </a:xfrm>
         </p:spPr>
@@ -4383,37 +4744,103 @@
           </a:bodyPr>
           <a:lstStyle/>
           <a:p>
+            <a:r>
+              <a:rPr lang="en-US" sz="2800" b="1" dirty="0" err="1">
+                <a:solidFill>
+                  <a:srgbClr val="192D50"/>
+                </a:solidFill>
+                <a:latin typeface="Calibri" panose="020F0502020204030204" pitchFamily="34" charset="0"/>
+                <a:ea typeface="Calibri" panose="020F0502020204030204" pitchFamily="34" charset="0"/>
+                <a:cs typeface="Times New Roman" panose="02020603050405020304" pitchFamily="18" charset="0"/>
+              </a:rPr>
+              <a:t>Análisis</a:t>
+            </a:r>
             <a:r>
               <a:rPr lang="en-US" sz="2800" b="1" dirty="0">
                 <a:solidFill>
                   <a:srgbClr val="192D50"/>
                 </a:solidFill>
-                <a:effectLst/>
                 <a:latin typeface="Calibri" panose="020F0502020204030204" pitchFamily="34" charset="0"/>
                 <a:ea typeface="Calibri" panose="020F0502020204030204" pitchFamily="34" charset="0"/>
                 <a:cs typeface="Times New Roman" panose="02020603050405020304" pitchFamily="18" charset="0"/>
               </a:rPr>
-              <a:t>XXXXX</a:t>
+              <a:t> del </a:t>
+            </a:r>
+            <a:r>
+              <a:rPr lang="en-US" sz="2800" b="1" dirty="0" err="1">
+                <a:solidFill>
+                  <a:srgbClr val="192D50"/>
+                </a:solidFill>
+                <a:latin typeface="Calibri" panose="020F0502020204030204" pitchFamily="34" charset="0"/>
+                <a:ea typeface="Calibri" panose="020F0502020204030204" pitchFamily="34" charset="0"/>
+                <a:cs typeface="Times New Roman" panose="02020603050405020304" pitchFamily="18" charset="0"/>
+              </a:rPr>
+              <a:t>absentismo</a:t>
+            </a:r>
+            <a:r>
+              <a:rPr lang="en-US" sz="2800" b="1" dirty="0">
+                <a:solidFill>
+                  <a:srgbClr val="192D50"/>
+                </a:solidFill>
+                <a:latin typeface="Calibri" panose="020F0502020204030204" pitchFamily="34" charset="0"/>
+                <a:ea typeface="Calibri" panose="020F0502020204030204" pitchFamily="34" charset="0"/>
+                <a:cs typeface="Times New Roman" panose="02020603050405020304" pitchFamily="18" charset="0"/>
+              </a:rPr>
+              <a:t> y </a:t>
+            </a:r>
+            <a:r>
+              <a:rPr lang="en-US" sz="2800" b="1" dirty="0" err="1">
+                <a:solidFill>
+                  <a:srgbClr val="192D50"/>
+                </a:solidFill>
+                <a:latin typeface="Calibri" panose="020F0502020204030204" pitchFamily="34" charset="0"/>
+                <a:ea typeface="Calibri" panose="020F0502020204030204" pitchFamily="34" charset="0"/>
+                <a:cs typeface="Times New Roman" panose="02020603050405020304" pitchFamily="18" charset="0"/>
+              </a:rPr>
+              <a:t>desempeño</a:t>
+            </a:r>
+            <a:r>
+              <a:rPr lang="en-US" sz="2800" b="1" dirty="0">
+                <a:solidFill>
+                  <a:srgbClr val="192D50"/>
+                </a:solidFill>
+                <a:latin typeface="Calibri" panose="020F0502020204030204" pitchFamily="34" charset="0"/>
+                <a:ea typeface="Calibri" panose="020F0502020204030204" pitchFamily="34" charset="0"/>
+                <a:cs typeface="Times New Roman" panose="02020603050405020304" pitchFamily="18" charset="0"/>
+              </a:rPr>
+              <a:t> </a:t>
             </a:r>
             <a:br>
               <a:rPr lang="en-US" sz="2800" b="1" dirty="0">
                 <a:solidFill>
                   <a:srgbClr val="192D50"/>
                 </a:solidFill>
-                <a:effectLst/>
                 <a:latin typeface="Calibri" panose="020F0502020204030204" pitchFamily="34" charset="0"/>
                 <a:ea typeface="Calibri" panose="020F0502020204030204" pitchFamily="34" charset="0"/>
                 <a:cs typeface="Times New Roman" panose="02020603050405020304" pitchFamily="18" charset="0"/>
               </a:rPr>
             </a:br>
             <a:r>
-              <a:rPr lang="en-US" sz="1800" i="1" dirty="0">
-                <a:effectLst/>
+              <a:rPr lang="en-US" sz="2800" b="1" dirty="0" err="1">
+                <a:solidFill>
+                  <a:srgbClr val="192D50"/>
+                </a:solidFill>
                 <a:latin typeface="Calibri" panose="020F0502020204030204" pitchFamily="34" charset="0"/>
                 <a:ea typeface="Calibri" panose="020F0502020204030204" pitchFamily="34" charset="0"/>
                 <a:cs typeface="Times New Roman" panose="02020603050405020304" pitchFamily="18" charset="0"/>
               </a:rPr>
-              <a:t>XXXX</a:t>
+              <a:t>laboral</a:t>
+            </a:r>
+            <a:r>
+              <a:rPr lang="en-US" sz="2800" b="1" dirty="0">
+                <a:solidFill>
+                  <a:srgbClr val="192D50"/>
+                </a:solidFill>
+                <a:latin typeface="Calibri" panose="020F0502020204030204" pitchFamily="34" charset="0"/>
+                <a:ea typeface="Calibri" panose="020F0502020204030204" pitchFamily="34" charset="0"/>
+                <a:cs typeface="Times New Roman" panose="02020603050405020304" pitchFamily="18" charset="0"/>
+              </a:rPr>
+              <a:t> 2025</a:t>
             </a:r>
             <a:endParaRPr lang="es-ES" sz="2800" dirty="0"/>
           </a:p>
@@ -4421,52 +4848,1399 @@
       </p:sp>
       <p:pic>
         <p:nvPicPr>
-          <p:cNvPr id="1026" name="Picture 2">
+          <p:cNvPr id="8" name="Imagen 7">
             <a:extLst>
               <a:ext uri="{FF2B5EF4-FFF2-40B4-BE49-F238E27FC236}">
-                <a16:creationId xmlns:a16="http://schemas.microsoft.com/office/drawing/2014/main" id="{F4C6518F-6F44-B638-B3ED-A356BA86BBA0}"/>
+                <a16:creationId xmlns:a16="http://schemas.microsoft.com/office/drawing/2014/main" id="{AEE063F8-84B4-DC23-FE55-2ED7395F0E55}"/>
               </a:ext>
             </a:extLst>
           </p:cNvPr>
           <p:cNvPicPr>
-            <a:picLocks noChangeAspect="1" noChangeArrowheads="1"/>
+            <a:picLocks noChangeAspect="1"/>
           </p:cNvPicPr>
           <p:nvPr/>
         </p:nvPicPr>
         <p:blipFill>
-          <a:blip r:embed="rId4">
-            <a:extLst>
-              <a:ext uri="{28A0092B-C50C-407E-A947-70E740481C1C}">
-                <a14:useLocalDpi xmlns:a14="http://schemas.microsoft.com/office/drawing/2010/main" val="0"/>
-              </a:ext>
-            </a:extLst>
-          </a:blip>
-          <a:srcRect/>
-          <a:stretch>
-            <a:fillRect/>
-          </a:stretch>
+          <a:blip r:embed="rId3"/>
+          <a:srcRect t="28975" b="21065"/>
+          <a:stretch/>
         </p:blipFill>
-        <p:spPr bwMode="auto">
-          <a:xfrm>
-            <a:off x="6016171" y="597331"/>
-            <a:ext cx="2338161" cy="494424"/>
+        <p:spPr>
+          <a:xfrm>
+            <a:off x="633846" y="716377"/>
+            <a:ext cx="3751114" cy="1023030"/>
+          </a:xfrm>
+          <a:prstGeom prst="rect">
+            <a:avLst/>
+          </a:prstGeom>
+        </p:spPr>
+      </p:pic>
+    </p:spTree>
+  </p:cSld>
+  <p:clrMapOvr>
+    <a:masterClrMapping/>
+  </p:clrMapOvr>
+  <mc:AlternateContent xmlns:mc="http://schemas.openxmlformats.org/markup-compatibility/2006" xmlns:p159="http://schemas.microsoft.com/office/powerpoint/2015/09/main">
+    <mc:Choice Requires="p159">
+      <p:transition spd="slow">
+        <p159:morph option="byObject"/>
+      </p:transition>
+    </mc:Choice>
+    <mc:Fallback xmlns="">
+      <p:transition spd="slow">
+        <p:fade/>
+      </p:transition>
+    </mc:Fallback>
+  </mc:AlternateContent>
+</p:sld>
+</file>
+
+<file path=ppt/slides/slide10.xml><?xml version="1.0" encoding="utf-8"?>
+<p:sld xmlns:a="http://schemas.openxmlformats.org/drawingml/2006/main" xmlns:r="http://schemas.openxmlformats.org/officeDocument/2006/relationships" xmlns:p="http://schemas.openxmlformats.org/presentationml/2006/main">
+  <p:cSld>
+    <p:spTree>
+      <p:nvGrpSpPr>
+        <p:cNvPr id="1" name=""/>
+        <p:cNvGrpSpPr/>
+        <p:nvPr/>
+      </p:nvGrpSpPr>
+      <p:grpSpPr>
+        <a:xfrm>
+          <a:off x="0" y="0"/>
+          <a:ext cx="0" cy="0"/>
+          <a:chOff x="0" y="0"/>
+          <a:chExt cx="0" cy="0"/>
+        </a:xfrm>
+      </p:grpSpPr>
+      <p:sp>
+        <p:nvSpPr>
+          <p:cNvPr id="2" name="Rectangle 1"/>
+          <p:cNvSpPr/>
+          <p:nvPr/>
+        </p:nvSpPr>
+        <p:spPr>
+          <a:xfrm>
+            <a:off x="240097" y="629527"/>
+            <a:ext cx="34299" cy="377288"/>
+          </a:xfrm>
+          <a:prstGeom prst="rect">
+            <a:avLst/>
+          </a:prstGeom>
+          <a:solidFill>
+            <a:srgbClr val="E61973"/>
+          </a:solidFill>
+          <a:ln>
+            <a:solidFill>
+              <a:srgbClr val="E61973"/>
+            </a:solidFill>
+          </a:ln>
+        </p:spPr>
+        <p:style>
+          <a:lnRef idx="1">
+            <a:schemeClr val="accent1"/>
+          </a:lnRef>
+          <a:fillRef idx="3">
+            <a:schemeClr val="accent1"/>
+          </a:fillRef>
+          <a:effectRef idx="2">
+            <a:schemeClr val="accent1"/>
+          </a:effectRef>
+          <a:fontRef idx="minor">
+            <a:schemeClr val="lt1"/>
+          </a:fontRef>
+        </p:style>
+        <p:txBody>
+          <a:bodyPr rtlCol="0" anchor="ctr"/>
+          <a:lstStyle/>
+          <a:p>
+            <a:pPr algn="ctr"/>
+            <a:endParaRPr sz="1351"/>
+          </a:p>
+        </p:txBody>
+      </p:sp>
+      <p:sp>
+        <p:nvSpPr>
+          <p:cNvPr id="3" name="TextBox 2"/>
+          <p:cNvSpPr txBox="1"/>
+          <p:nvPr/>
+        </p:nvSpPr>
+        <p:spPr>
+          <a:xfrm>
+            <a:off x="377288" y="626022"/>
+            <a:ext cx="3260060" cy="415627"/>
           </a:xfrm>
           <a:prstGeom prst="rect">
             <a:avLst/>
           </a:prstGeom>
           <a:noFill/>
-          <a:extLst>
-            <a:ext uri="{909E8E84-426E-40DD-AFC4-6F175D3DCCD1}">
-              <a14:hiddenFill xmlns:a14="http://schemas.microsoft.com/office/drawing/2010/main">
+        </p:spPr>
+        <p:txBody>
+          <a:bodyPr wrap="none">
+            <a:spAutoFit/>
+          </a:bodyPr>
+          <a:lstStyle/>
+          <a:p>
+            <a:r>
+              <a:rPr sz="2101" b="1" dirty="0">
+                <a:solidFill>
+                  <a:srgbClr val="003366"/>
+                </a:solidFill>
+                <a:latin typeface="Aptos Display"/>
+              </a:rPr>
+              <a:t>CONCLUSION</a:t>
+            </a:r>
+            <a:r>
+              <a:rPr lang="es-ES" sz="2101" b="1" dirty="0">
+                <a:solidFill>
+                  <a:srgbClr val="003366"/>
+                </a:solidFill>
+                <a:latin typeface="Aptos Display"/>
+              </a:rPr>
+              <a:t>S / SUMMARY</a:t>
+            </a:r>
+            <a:endParaRPr sz="2101" b="1" dirty="0">
+              <a:solidFill>
+                <a:srgbClr val="003366"/>
+              </a:solidFill>
+              <a:latin typeface="Aptos Display"/>
+            </a:endParaRPr>
+          </a:p>
+        </p:txBody>
+      </p:sp>
+      <p:sp>
+        <p:nvSpPr>
+          <p:cNvPr id="7" name="CuadroTexto 6">
+            <a:extLst>
+              <a:ext uri="{FF2B5EF4-FFF2-40B4-BE49-F238E27FC236}">
+                <a16:creationId xmlns:a16="http://schemas.microsoft.com/office/drawing/2014/main" id="{803EC5A9-B028-88E2-9476-106F9FA2C541}"/>
+              </a:ext>
+            </a:extLst>
+          </p:cNvPr>
+          <p:cNvSpPr txBox="1"/>
+          <p:nvPr/>
+        </p:nvSpPr>
+        <p:spPr>
+          <a:xfrm>
+            <a:off x="480187" y="1246797"/>
+            <a:ext cx="6796292" cy="353943"/>
+          </a:xfrm>
+          <a:prstGeom prst="rect">
+            <a:avLst/>
+          </a:prstGeom>
+          <a:noFill/>
+        </p:spPr>
+        <p:txBody>
+          <a:bodyPr wrap="square">
+            <a:spAutoFit/>
+          </a:bodyPr>
+          <a:lstStyle/>
+          <a:p>
+            <a:pPr>
+              <a:defRPr sz="1700">
                 <a:solidFill>
                   <a:srgbClr val="FFFFFF"/>
                 </a:solidFill>
-              </a14:hiddenFill>
+              </a:defRPr>
+            </a:pPr>
+            <a:r>
+              <a:rPr lang="en-US" sz="1700" b="1" dirty="0" err="1">
+                <a:solidFill>
+                  <a:srgbClr val="003366"/>
+                </a:solidFill>
+                <a:latin typeface="Aptos Display"/>
+              </a:rPr>
+              <a:t>XXXXXXXXXXXXX</a:t>
+            </a:r>
+            <a:r>
+              <a:rPr lang="en-US" sz="1700" dirty="0" err="1"/>
+              <a:t>decisions</a:t>
+            </a:r>
+            <a:r>
+              <a:rPr lang="en-US" sz="1700" dirty="0"/>
+              <a:t>?</a:t>
+            </a:r>
+          </a:p>
+        </p:txBody>
+      </p:sp>
+      <p:sp>
+        <p:nvSpPr>
+          <p:cNvPr id="9" name="AnswerBox">
+            <a:extLst>
+              <a:ext uri="{FF2B5EF4-FFF2-40B4-BE49-F238E27FC236}">
+                <a16:creationId xmlns:a16="http://schemas.microsoft.com/office/drawing/2014/main" id="{632FF05A-EEDE-D97F-F54D-277088AE4F85}"/>
+              </a:ext>
+            </a:extLst>
+          </p:cNvPr>
+          <p:cNvSpPr>
+            <a:spLocks noGrp="1"/>
+          </p:cNvSpPr>
+          <p:nvPr/>
+        </p:nvSpPr>
+        <p:spPr>
+          <a:xfrm>
+            <a:off x="4063182" y="1554573"/>
+            <a:ext cx="4126607" cy="307777"/>
+          </a:xfrm>
+          <a:prstGeom prst="roundRect">
+            <a:avLst>
+              <a:gd name="adj" fmla="val 6000"/>
+            </a:avLst>
+          </a:prstGeom>
+          <a:solidFill>
+            <a:srgbClr val="E8F0F7"/>
+          </a:solidFill>
+          <a:ln w="12700">
+            <a:solidFill>
+              <a:srgbClr val="1B4F72"/>
+            </a:solidFill>
+          </a:ln>
+        </p:spPr>
+        <p:txBody>
+          <a:bodyPr wrap="square" lIns="120000" tIns="80000" rIns="120000" bIns="80000" anchor="ctr"/>
+          <a:lstStyle/>
+          <a:p>
+            <a:r>
+              <a:rPr lang="en-US" sz="1300" b="1" dirty="0">
+                <a:solidFill>
+                  <a:srgbClr val="1B4F72"/>
+                </a:solidFill>
+              </a:rPr>
+              <a:t>→ XXXX XXXXXXXX</a:t>
+            </a:r>
+            <a:endParaRPr lang="en-US" sz="1200" dirty="0">
+              <a:solidFill>
+                <a:srgbClr val="333333"/>
+              </a:solidFill>
+            </a:endParaRPr>
+          </a:p>
+        </p:txBody>
+      </p:sp>
+      <p:sp>
+        <p:nvSpPr>
+          <p:cNvPr id="4" name="Rounded Rectangle 4">
+            <a:extLst>
+              <a:ext uri="{FF2B5EF4-FFF2-40B4-BE49-F238E27FC236}">
+                <a16:creationId xmlns:a16="http://schemas.microsoft.com/office/drawing/2014/main" id="{8587C5BE-126C-89F5-5B1C-99C6ECB80A34}"/>
+              </a:ext>
+            </a:extLst>
+          </p:cNvPr>
+          <p:cNvSpPr/>
+          <p:nvPr/>
+        </p:nvSpPr>
+        <p:spPr>
+          <a:xfrm>
+            <a:off x="1639684" y="2525561"/>
+            <a:ext cx="2651760" cy="1334575"/>
+          </a:xfrm>
+          <a:prstGeom prst="roundRect">
+            <a:avLst/>
+          </a:prstGeom>
+          <a:solidFill>
+            <a:srgbClr val="F8F0F4"/>
+          </a:solidFill>
+          <a:ln>
+            <a:solidFill>
+              <a:srgbClr val="E91E63"/>
+            </a:solidFill>
+          </a:ln>
+        </p:spPr>
+        <p:style>
+          <a:lnRef idx="1">
+            <a:schemeClr val="accent1"/>
+          </a:lnRef>
+          <a:fillRef idx="3">
+            <a:schemeClr val="accent1"/>
+          </a:fillRef>
+          <a:effectRef idx="2">
+            <a:schemeClr val="accent1"/>
+          </a:effectRef>
+          <a:fontRef idx="minor">
+            <a:schemeClr val="lt1"/>
+          </a:fontRef>
+        </p:style>
+        <p:txBody>
+          <a:bodyPr rtlCol="0" anchor="ctr"/>
+          <a:lstStyle/>
+          <a:p>
+            <a:pPr>
+              <a:defRPr sz="1300"/>
+            </a:pPr>
+            <a:r>
+              <a:rPr sz="1300" dirty="0"/>
+              <a:t> </a:t>
+            </a:r>
+            <a:r>
+              <a:rPr lang="es-ES" sz="2000" dirty="0"/>
+              <a:t>📉 </a:t>
+            </a:r>
+            <a:r>
+              <a:rPr lang="en-US" sz="1400" b="1" dirty="0">
+                <a:solidFill>
+                  <a:schemeClr val="tx1"/>
+                </a:solidFill>
+              </a:rPr>
+              <a:t>• XXXXXX</a:t>
+            </a:r>
+            <a:endParaRPr lang="en-US" sz="1400" dirty="0">
+              <a:solidFill>
+                <a:schemeClr val="tx1"/>
+              </a:solidFill>
+            </a:endParaRPr>
+          </a:p>
+        </p:txBody>
+      </p:sp>
+      <p:sp>
+        <p:nvSpPr>
+          <p:cNvPr id="5" name="Rounded Rectangle 4">
+            <a:extLst>
+              <a:ext uri="{FF2B5EF4-FFF2-40B4-BE49-F238E27FC236}">
+                <a16:creationId xmlns:a16="http://schemas.microsoft.com/office/drawing/2014/main" id="{01B03544-4284-1B74-11A2-D53A5340171D}"/>
+              </a:ext>
+            </a:extLst>
+          </p:cNvPr>
+          <p:cNvSpPr/>
+          <p:nvPr/>
+        </p:nvSpPr>
+        <p:spPr>
+          <a:xfrm>
+            <a:off x="1639684" y="4080674"/>
+            <a:ext cx="2651760" cy="1334575"/>
+          </a:xfrm>
+          <a:prstGeom prst="roundRect">
+            <a:avLst/>
+          </a:prstGeom>
+          <a:solidFill>
+            <a:srgbClr val="F8F0F4"/>
+          </a:solidFill>
+          <a:ln>
+            <a:solidFill>
+              <a:srgbClr val="E91E63"/>
+            </a:solidFill>
+          </a:ln>
+        </p:spPr>
+        <p:style>
+          <a:lnRef idx="1">
+            <a:schemeClr val="accent1"/>
+          </a:lnRef>
+          <a:fillRef idx="3">
+            <a:schemeClr val="accent1"/>
+          </a:fillRef>
+          <a:effectRef idx="2">
+            <a:schemeClr val="accent1"/>
+          </a:effectRef>
+          <a:fontRef idx="minor">
+            <a:schemeClr val="lt1"/>
+          </a:fontRef>
+        </p:style>
+        <p:txBody>
+          <a:bodyPr rtlCol="0" anchor="ctr"/>
+          <a:lstStyle/>
+          <a:p>
+            <a:pPr>
+              <a:defRPr sz="1300"/>
+            </a:pPr>
+            <a:r>
+              <a:rPr sz="1300" dirty="0"/>
+              <a:t> </a:t>
+            </a:r>
+            <a:r>
+              <a:rPr lang="es-ES" sz="2000" dirty="0"/>
+              <a:t>📊 </a:t>
+            </a:r>
+            <a:r>
+              <a:rPr lang="en-US" sz="1400" b="1" dirty="0">
+                <a:solidFill>
+                  <a:schemeClr val="tx1"/>
+                </a:solidFill>
+              </a:rPr>
+              <a:t>• XXXXXXX</a:t>
+            </a:r>
+            <a:endParaRPr lang="en-US" sz="1400" dirty="0">
+              <a:solidFill>
+                <a:schemeClr val="tx1"/>
+              </a:solidFill>
+            </a:endParaRPr>
+          </a:p>
+        </p:txBody>
+      </p:sp>
+      <p:sp>
+        <p:nvSpPr>
+          <p:cNvPr id="6" name="Rounded Rectangle 4">
+            <a:extLst>
+              <a:ext uri="{FF2B5EF4-FFF2-40B4-BE49-F238E27FC236}">
+                <a16:creationId xmlns:a16="http://schemas.microsoft.com/office/drawing/2014/main" id="{827094CD-090C-FA77-44B2-C0A97B2139B5}"/>
+              </a:ext>
+            </a:extLst>
+          </p:cNvPr>
+          <p:cNvSpPr/>
+          <p:nvPr/>
+        </p:nvSpPr>
+        <p:spPr>
+          <a:xfrm>
+            <a:off x="4748647" y="2525555"/>
+            <a:ext cx="2651760" cy="1334576"/>
+          </a:xfrm>
+          <a:prstGeom prst="roundRect">
+            <a:avLst/>
+          </a:prstGeom>
+          <a:solidFill>
+            <a:srgbClr val="F8F0F4"/>
+          </a:solidFill>
+          <a:ln>
+            <a:solidFill>
+              <a:srgbClr val="E91E63"/>
+            </a:solidFill>
+          </a:ln>
+        </p:spPr>
+        <p:style>
+          <a:lnRef idx="1">
+            <a:schemeClr val="accent1"/>
+          </a:lnRef>
+          <a:fillRef idx="3">
+            <a:schemeClr val="accent1"/>
+          </a:fillRef>
+          <a:effectRef idx="2">
+            <a:schemeClr val="accent1"/>
+          </a:effectRef>
+          <a:fontRef idx="minor">
+            <a:schemeClr val="lt1"/>
+          </a:fontRef>
+        </p:style>
+        <p:txBody>
+          <a:bodyPr rtlCol="0" anchor="ctr"/>
+          <a:lstStyle/>
+          <a:p>
+            <a:pPr>
+              <a:defRPr sz="1300"/>
+            </a:pPr>
+            <a:r>
+              <a:rPr lang="es-ES" sz="1400" dirty="0"/>
+              <a:t>📊 </a:t>
+            </a:r>
+            <a:r>
+              <a:rPr lang="en-US" sz="1400" b="1" dirty="0">
+                <a:solidFill>
+                  <a:schemeClr val="tx1"/>
+                </a:solidFill>
+              </a:rPr>
+              <a:t>• XXXXXXXXX.</a:t>
+            </a:r>
+            <a:endParaRPr lang="en-US" sz="1400" dirty="0">
+              <a:solidFill>
+                <a:schemeClr val="tx1"/>
+              </a:solidFill>
+            </a:endParaRPr>
+          </a:p>
+        </p:txBody>
+      </p:sp>
+      <p:sp>
+        <p:nvSpPr>
+          <p:cNvPr id="10" name="Rounded Rectangle 4">
+            <a:extLst>
+              <a:ext uri="{FF2B5EF4-FFF2-40B4-BE49-F238E27FC236}">
+                <a16:creationId xmlns:a16="http://schemas.microsoft.com/office/drawing/2014/main" id="{83C1A843-393F-B9C1-DBF9-43EA56AF7449}"/>
+              </a:ext>
+            </a:extLst>
+          </p:cNvPr>
+          <p:cNvSpPr/>
+          <p:nvPr/>
+        </p:nvSpPr>
+        <p:spPr>
+          <a:xfrm>
+            <a:off x="4748647" y="4080674"/>
+            <a:ext cx="2651760" cy="1334575"/>
+          </a:xfrm>
+          <a:prstGeom prst="roundRect">
+            <a:avLst/>
+          </a:prstGeom>
+          <a:solidFill>
+            <a:srgbClr val="F8F0F4"/>
+          </a:solidFill>
+          <a:ln>
+            <a:solidFill>
+              <a:srgbClr val="E91E63"/>
+            </a:solidFill>
+          </a:ln>
+        </p:spPr>
+        <p:style>
+          <a:lnRef idx="1">
+            <a:schemeClr val="accent1"/>
+          </a:lnRef>
+          <a:fillRef idx="3">
+            <a:schemeClr val="accent1"/>
+          </a:fillRef>
+          <a:effectRef idx="2">
+            <a:schemeClr val="accent1"/>
+          </a:effectRef>
+          <a:fontRef idx="minor">
+            <a:schemeClr val="lt1"/>
+          </a:fontRef>
+        </p:style>
+        <p:txBody>
+          <a:bodyPr rtlCol="0" anchor="ctr"/>
+          <a:lstStyle/>
+          <a:p>
+            <a:pPr>
+              <a:defRPr sz="1300"/>
+            </a:pPr>
+            <a:r>
+              <a:rPr sz="1300" dirty="0"/>
+              <a:t> </a:t>
+            </a:r>
+            <a:r>
+              <a:rPr lang="es-ES" sz="2000" dirty="0"/>
+              <a:t>🌍 </a:t>
+            </a:r>
+            <a:r>
+              <a:rPr lang="en-US" sz="1400" b="1" dirty="0">
+                <a:solidFill>
+                  <a:schemeClr val="tx1"/>
+                </a:solidFill>
+              </a:rPr>
+              <a:t>• XXXXX</a:t>
+            </a:r>
+            <a:endParaRPr lang="en-US" sz="1400" dirty="0">
+              <a:solidFill>
+                <a:schemeClr val="tx1"/>
+              </a:solidFill>
+            </a:endParaRPr>
+          </a:p>
+          <a:p>
+            <a:pPr>
+              <a:defRPr sz="1300"/>
+            </a:pPr>
+            <a:endParaRPr lang="en-US" sz="1400" dirty="0">
+              <a:solidFill>
+                <a:schemeClr val="tx1"/>
+              </a:solidFill>
+            </a:endParaRPr>
+          </a:p>
+        </p:txBody>
+      </p:sp>
+      <p:pic>
+        <p:nvPicPr>
+          <p:cNvPr id="8" name="Imagen 7">
+            <a:extLst>
+              <a:ext uri="{FF2B5EF4-FFF2-40B4-BE49-F238E27FC236}">
+                <a16:creationId xmlns:a16="http://schemas.microsoft.com/office/drawing/2014/main" id="{87010713-5F9B-98FB-BB86-2C4B8E8DAB63}"/>
+              </a:ext>
+            </a:extLst>
+          </p:cNvPr>
+          <p:cNvPicPr>
+            <a:picLocks noChangeAspect="1"/>
+          </p:cNvPicPr>
+          <p:nvPr/>
+        </p:nvPicPr>
+        <p:blipFill>
+          <a:blip r:embed="rId3"/>
+          <a:srcRect t="22851" r="64431" b="22773"/>
+          <a:stretch/>
+        </p:blipFill>
+        <p:spPr>
+          <a:xfrm>
+            <a:off x="7429297" y="276722"/>
+            <a:ext cx="1013479" cy="845788"/>
+          </a:xfrm>
+          <a:prstGeom prst="rect">
+            <a:avLst/>
+          </a:prstGeom>
+        </p:spPr>
+      </p:pic>
+    </p:spTree>
+    <p:extLst>
+      <p:ext uri="{BB962C8B-B14F-4D97-AF65-F5344CB8AC3E}">
+        <p14:creationId xmlns:p14="http://schemas.microsoft.com/office/powerpoint/2010/main" val="2241340831"/>
+      </p:ext>
+    </p:extLst>
+  </p:cSld>
+  <p:clrMapOvr>
+    <a:masterClrMapping/>
+  </p:clrMapOvr>
+  <mc:AlternateContent xmlns:mc="http://schemas.openxmlformats.org/markup-compatibility/2006" xmlns:p159="http://schemas.microsoft.com/office/powerpoint/2015/09/main">
+    <mc:Choice Requires="p159">
+      <p:transition spd="slow">
+        <p159:morph option="byObject"/>
+      </p:transition>
+    </mc:Choice>
+    <mc:Fallback xmlns="">
+      <p:transition spd="slow">
+        <p:fade/>
+      </p:transition>
+    </mc:Fallback>
+  </mc:AlternateContent>
+</p:sld>
+</file>
+
+<file path=ppt/slides/slide11.xml><?xml version="1.0" encoding="utf-8"?>
+<p:sld xmlns:a="http://schemas.openxmlformats.org/drawingml/2006/main" xmlns:r="http://schemas.openxmlformats.org/officeDocument/2006/relationships" xmlns:p="http://schemas.openxmlformats.org/presentationml/2006/main">
+  <p:cSld>
+    <p:spTree>
+      <p:nvGrpSpPr>
+        <p:cNvPr id="1" name=""/>
+        <p:cNvGrpSpPr/>
+        <p:nvPr/>
+      </p:nvGrpSpPr>
+      <p:grpSpPr>
+        <a:xfrm>
+          <a:off x="0" y="0"/>
+          <a:ext cx="0" cy="0"/>
+          <a:chOff x="0" y="0"/>
+          <a:chExt cx="0" cy="0"/>
+        </a:xfrm>
+      </p:grpSpPr>
+      <p:sp>
+        <p:nvSpPr>
+          <p:cNvPr id="2" name="Rectangle 1"/>
+          <p:cNvSpPr/>
+          <p:nvPr/>
+        </p:nvSpPr>
+        <p:spPr>
+          <a:xfrm>
+            <a:off x="421651" y="715345"/>
+            <a:ext cx="34299" cy="377288"/>
+          </a:xfrm>
+          <a:prstGeom prst="rect">
+            <a:avLst/>
+          </a:prstGeom>
+          <a:solidFill>
+            <a:srgbClr val="E61973"/>
+          </a:solidFill>
+          <a:ln>
+            <a:solidFill>
+              <a:srgbClr val="E61973"/>
+            </a:solidFill>
+          </a:ln>
+        </p:spPr>
+        <p:style>
+          <a:lnRef idx="1">
+            <a:schemeClr val="accent1"/>
+          </a:lnRef>
+          <a:fillRef idx="3">
+            <a:schemeClr val="accent1"/>
+          </a:fillRef>
+          <a:effectRef idx="2">
+            <a:schemeClr val="accent1"/>
+          </a:effectRef>
+          <a:fontRef idx="minor">
+            <a:schemeClr val="lt1"/>
+          </a:fontRef>
+        </p:style>
+        <p:txBody>
+          <a:bodyPr rtlCol="0" anchor="ctr"/>
+          <a:lstStyle/>
+          <a:p>
+            <a:pPr algn="ctr"/>
+            <a:endParaRPr sz="1351"/>
+          </a:p>
+        </p:txBody>
+      </p:sp>
+      <p:sp>
+        <p:nvSpPr>
+          <p:cNvPr id="3" name="TextBox 2"/>
+          <p:cNvSpPr txBox="1"/>
+          <p:nvPr/>
+        </p:nvSpPr>
+        <p:spPr>
+          <a:xfrm>
+            <a:off x="558846" y="633028"/>
+            <a:ext cx="3762568" cy="692626"/>
+          </a:xfrm>
+          <a:prstGeom prst="rect">
+            <a:avLst/>
+          </a:prstGeom>
+          <a:noFill/>
+        </p:spPr>
+        <p:txBody>
+          <a:bodyPr wrap="none">
+            <a:spAutoFit/>
+          </a:bodyPr>
+          <a:lstStyle/>
+          <a:p>
+            <a:r>
+              <a:rPr lang="es-ES" sz="2101" b="1" dirty="0">
+                <a:solidFill>
+                  <a:srgbClr val="003366"/>
+                </a:solidFill>
+                <a:latin typeface="Aptos Display"/>
+              </a:rPr>
+              <a:t>XXXXXXXXXXXXXXXXXXXXXXXX</a:t>
+            </a:r>
+          </a:p>
+          <a:p>
+            <a:r>
+              <a:rPr lang="en-US" dirty="0"/>
+              <a:t>XXXXX</a:t>
+            </a:r>
+            <a:endParaRPr b="1" dirty="0">
+              <a:solidFill>
+                <a:srgbClr val="003366"/>
+              </a:solidFill>
+              <a:latin typeface="Aptos Display"/>
+            </a:endParaRPr>
+          </a:p>
+        </p:txBody>
+      </p:sp>
+      <p:sp>
+        <p:nvSpPr>
+          <p:cNvPr id="10" name="Rounded Rectangle 4">
+            <a:extLst>
+              <a:ext uri="{FF2B5EF4-FFF2-40B4-BE49-F238E27FC236}">
+                <a16:creationId xmlns:a16="http://schemas.microsoft.com/office/drawing/2014/main" id="{A1F2B760-44E3-423A-84C3-731A38FC9DD0}"/>
+              </a:ext>
+            </a:extLst>
+          </p:cNvPr>
+          <p:cNvSpPr/>
+          <p:nvPr/>
+        </p:nvSpPr>
+        <p:spPr>
+          <a:xfrm>
+            <a:off x="1991323" y="4963719"/>
+            <a:ext cx="4900800" cy="1288123"/>
+          </a:xfrm>
+          <a:prstGeom prst="roundRect">
+            <a:avLst/>
+          </a:prstGeom>
+          <a:solidFill>
+            <a:srgbClr val="FFFFFF"/>
+          </a:solidFill>
+          <a:ln>
+            <a:solidFill>
+              <a:srgbClr val="E61973"/>
+            </a:solidFill>
+          </a:ln>
+        </p:spPr>
+        <p:style>
+          <a:lnRef idx="1">
+            <a:schemeClr val="accent1"/>
+          </a:lnRef>
+          <a:fillRef idx="3">
+            <a:schemeClr val="accent1"/>
+          </a:fillRef>
+          <a:effectRef idx="2">
+            <a:schemeClr val="accent1"/>
+          </a:effectRef>
+          <a:fontRef idx="minor">
+            <a:schemeClr val="lt1"/>
+          </a:fontRef>
+        </p:style>
+        <p:txBody>
+          <a:bodyPr rtlCol="0" anchor="ctr"/>
+          <a:lstStyle/>
+          <a:p>
+            <a:r>
+              <a:rPr lang="es-ES" sz="1600" dirty="0"/>
+              <a:t>variables </a:t>
+            </a:r>
+          </a:p>
+        </p:txBody>
+      </p:sp>
+      <p:sp>
+        <p:nvSpPr>
+          <p:cNvPr id="5" name="Rounded Rectangle 4"/>
+          <p:cNvSpPr/>
+          <p:nvPr/>
+        </p:nvSpPr>
+        <p:spPr>
+          <a:xfrm>
+            <a:off x="1991323" y="1662781"/>
+            <a:ext cx="4900800" cy="1288123"/>
+          </a:xfrm>
+          <a:prstGeom prst="roundRect">
+            <a:avLst/>
+          </a:prstGeom>
+          <a:solidFill>
+            <a:srgbClr val="FFFFFF"/>
+          </a:solidFill>
+          <a:ln>
+            <a:solidFill>
+              <a:srgbClr val="E61973"/>
+            </a:solidFill>
+          </a:ln>
+        </p:spPr>
+        <p:style>
+          <a:lnRef idx="1">
+            <a:schemeClr val="accent1"/>
+          </a:lnRef>
+          <a:fillRef idx="3">
+            <a:schemeClr val="accent1"/>
+          </a:fillRef>
+          <a:effectRef idx="2">
+            <a:schemeClr val="accent1"/>
+          </a:effectRef>
+          <a:fontRef idx="minor">
+            <a:schemeClr val="lt1"/>
+          </a:fontRef>
+        </p:style>
+        <p:txBody>
+          <a:bodyPr rtlCol="0" anchor="ctr"/>
+          <a:lstStyle/>
+          <a:p>
+            <a:r>
+              <a:rPr lang="es-ES" sz="1600" dirty="0"/>
+              <a:t>variables </a:t>
+            </a:r>
+          </a:p>
+        </p:txBody>
+      </p:sp>
+      <p:sp>
+        <p:nvSpPr>
+          <p:cNvPr id="6" name="Rounded Rectangle 5"/>
+          <p:cNvSpPr/>
+          <p:nvPr/>
+        </p:nvSpPr>
+        <p:spPr>
+          <a:xfrm>
+            <a:off x="1995926" y="3285757"/>
+            <a:ext cx="4896201" cy="1381783"/>
+          </a:xfrm>
+          <a:prstGeom prst="roundRect">
+            <a:avLst/>
+          </a:prstGeom>
+          <a:solidFill>
+            <a:srgbClr val="FFFFFF"/>
+          </a:solidFill>
+          <a:ln>
+            <a:solidFill>
+              <a:srgbClr val="00A1DE"/>
+            </a:solidFill>
+          </a:ln>
+        </p:spPr>
+        <p:style>
+          <a:lnRef idx="1">
+            <a:schemeClr val="accent1"/>
+          </a:lnRef>
+          <a:fillRef idx="3">
+            <a:schemeClr val="accent1"/>
+          </a:fillRef>
+          <a:effectRef idx="2">
+            <a:schemeClr val="accent1"/>
+          </a:effectRef>
+          <a:fontRef idx="minor">
+            <a:schemeClr val="lt1"/>
+          </a:fontRef>
+        </p:style>
+        <p:txBody>
+          <a:bodyPr rtlCol="0" anchor="ctr"/>
+          <a:lstStyle/>
+          <a:p>
+            <a:pPr algn="ctr"/>
+            <a:endParaRPr sz="1125" dirty="0"/>
+          </a:p>
+        </p:txBody>
+      </p:sp>
+      <p:sp>
+        <p:nvSpPr>
+          <p:cNvPr id="8" name="CuadroTexto 7">
+            <a:extLst>
+              <a:ext uri="{FF2B5EF4-FFF2-40B4-BE49-F238E27FC236}">
+                <a16:creationId xmlns:a16="http://schemas.microsoft.com/office/drawing/2014/main" id="{6CF3B01D-34E6-8DAA-D4C9-6D9F445DFD3C}"/>
+              </a:ext>
+            </a:extLst>
+          </p:cNvPr>
+          <p:cNvSpPr txBox="1"/>
+          <p:nvPr/>
+        </p:nvSpPr>
+        <p:spPr>
+          <a:xfrm>
+            <a:off x="2174051" y="1698467"/>
+            <a:ext cx="4507307" cy="3970318"/>
+          </a:xfrm>
+          <a:prstGeom prst="rect">
+            <a:avLst/>
+          </a:prstGeom>
+          <a:noFill/>
+        </p:spPr>
+        <p:txBody>
+          <a:bodyPr wrap="square">
+            <a:spAutoFit/>
+          </a:bodyPr>
+          <a:lstStyle/>
+          <a:p>
+            <a:r>
+              <a:rPr lang="es-ES" dirty="0"/>
+              <a:t>📊 </a:t>
+            </a:r>
+            <a:r>
+              <a:rPr lang="es-ES" b="1" dirty="0"/>
+              <a:t>XXXX</a:t>
+            </a:r>
+            <a:endParaRPr lang="es-ES" dirty="0"/>
+          </a:p>
+          <a:p>
+            <a:pPr>
+              <a:buFont typeface="Arial" panose="020B0604020202020204" pitchFamily="34" charset="0"/>
+              <a:buChar char="•"/>
+            </a:pPr>
+            <a:r>
+              <a:rPr lang="es-ES" dirty="0"/>
+              <a:t> XXXX</a:t>
+            </a:r>
+          </a:p>
+          <a:p>
+            <a:pPr>
+              <a:buFont typeface="Arial" panose="020B0604020202020204" pitchFamily="34" charset="0"/>
+              <a:buChar char="•"/>
+            </a:pPr>
+            <a:endParaRPr lang="es-ES" dirty="0"/>
+          </a:p>
+          <a:p>
+            <a:r>
+              <a:rPr lang="es-ES" dirty="0"/>
+              <a:t> </a:t>
+            </a:r>
+          </a:p>
+          <a:p>
+            <a:endParaRPr lang="es-ES" b="1" dirty="0"/>
+          </a:p>
+          <a:p>
+            <a:endParaRPr lang="es-ES" b="1" dirty="0"/>
+          </a:p>
+          <a:p>
+            <a:r>
+              <a:rPr lang="es-ES" dirty="0"/>
+              <a:t>📈 </a:t>
+            </a:r>
+            <a:r>
+              <a:rPr lang="es-ES" b="1" dirty="0"/>
+              <a:t>XXXX</a:t>
+            </a:r>
+            <a:endParaRPr lang="es-ES" dirty="0"/>
+          </a:p>
+          <a:p>
+            <a:pPr>
+              <a:buFont typeface="Arial" panose="020B0604020202020204" pitchFamily="34" charset="0"/>
+              <a:buChar char="•"/>
+            </a:pPr>
+            <a:r>
+              <a:rPr lang="es-ES" dirty="0"/>
+              <a:t> XXXX</a:t>
+            </a:r>
+          </a:p>
+          <a:p>
+            <a:pPr>
+              <a:buFont typeface="Arial" panose="020B0604020202020204" pitchFamily="34" charset="0"/>
+              <a:buChar char="•"/>
+            </a:pPr>
+            <a:endParaRPr lang="es-ES" dirty="0"/>
+          </a:p>
+          <a:p>
+            <a:pPr>
+              <a:buFont typeface="Arial" panose="020B0604020202020204" pitchFamily="34" charset="0"/>
+              <a:buChar char="•"/>
+            </a:pPr>
+            <a:endParaRPr lang="es-ES" dirty="0"/>
+          </a:p>
+          <a:p>
+            <a:pPr>
+              <a:buFont typeface="Arial" panose="020B0604020202020204" pitchFamily="34" charset="0"/>
+              <a:buChar char="•"/>
+            </a:pPr>
+            <a:endParaRPr lang="es-ES" dirty="0"/>
+          </a:p>
+          <a:p>
+            <a:endParaRPr lang="es-ES" b="1" dirty="0"/>
+          </a:p>
+          <a:p>
+            <a:r>
+              <a:rPr lang="es-ES" dirty="0"/>
+              <a:t>🏢 </a:t>
+            </a:r>
+            <a:r>
+              <a:rPr lang="es-ES" b="1" dirty="0"/>
+              <a:t>XXXX</a:t>
+            </a:r>
+            <a:endParaRPr lang="es-ES" dirty="0"/>
+          </a:p>
+          <a:p>
+            <a:pPr>
+              <a:buFont typeface="Arial" panose="020B0604020202020204" pitchFamily="34" charset="0"/>
+              <a:buChar char="•"/>
+            </a:pPr>
+            <a:r>
+              <a:rPr lang="es-ES" dirty="0"/>
+              <a:t> XXXX</a:t>
+            </a:r>
+          </a:p>
+        </p:txBody>
+      </p:sp>
+      <p:pic>
+        <p:nvPicPr>
+          <p:cNvPr id="4" name="Imagen 3">
+            <a:extLst>
+              <a:ext uri="{FF2B5EF4-FFF2-40B4-BE49-F238E27FC236}">
+                <a16:creationId xmlns:a16="http://schemas.microsoft.com/office/drawing/2014/main" id="{597D1914-7CA6-342E-AA69-4536F6D15976}"/>
+              </a:ext>
+            </a:extLst>
+          </p:cNvPr>
+          <p:cNvPicPr>
+            <a:picLocks noChangeAspect="1"/>
+          </p:cNvPicPr>
+          <p:nvPr/>
+        </p:nvPicPr>
+        <p:blipFill>
+          <a:blip r:embed="rId3"/>
+          <a:srcRect t="22851" r="64431" b="22773"/>
+          <a:stretch/>
+        </p:blipFill>
+        <p:spPr>
+          <a:xfrm>
+            <a:off x="7429297" y="276722"/>
+            <a:ext cx="1013479" cy="845788"/>
+          </a:xfrm>
+          <a:prstGeom prst="rect">
+            <a:avLst/>
+          </a:prstGeom>
+        </p:spPr>
+      </p:pic>
+    </p:spTree>
+  </p:cSld>
+  <p:clrMapOvr>
+    <a:masterClrMapping/>
+  </p:clrMapOvr>
+  <mc:AlternateContent xmlns:mc="http://schemas.openxmlformats.org/markup-compatibility/2006" xmlns:p159="http://schemas.microsoft.com/office/powerpoint/2015/09/main">
+    <mc:Choice Requires="p159">
+      <p:transition spd="slow">
+        <p159:morph option="byObject"/>
+      </p:transition>
+    </mc:Choice>
+    <mc:Fallback xmlns="">
+      <p:transition spd="slow">
+        <p:fade/>
+      </p:transition>
+    </mc:Fallback>
+  </mc:AlternateContent>
+</p:sld>
+</file>
+
+<file path=ppt/slides/slide12.xml><?xml version="1.0" encoding="utf-8"?>
+<p:sld xmlns:a="http://schemas.openxmlformats.org/drawingml/2006/main" xmlns:r="http://schemas.openxmlformats.org/officeDocument/2006/relationships" xmlns:p="http://schemas.openxmlformats.org/presentationml/2006/main">
+  <p:cSld>
+    <p:spTree>
+      <p:nvGrpSpPr>
+        <p:cNvPr id="1" name=""/>
+        <p:cNvGrpSpPr/>
+        <p:nvPr/>
+      </p:nvGrpSpPr>
+      <p:grpSpPr>
+        <a:xfrm>
+          <a:off x="0" y="0"/>
+          <a:ext cx="0" cy="0"/>
+          <a:chOff x="0" y="0"/>
+          <a:chExt cx="0" cy="0"/>
+        </a:xfrm>
+      </p:grpSpPr>
+      <p:sp>
+        <p:nvSpPr>
+          <p:cNvPr id="8" name="TextBox 3">
+            <a:extLst>
+              <a:ext uri="{FF2B5EF4-FFF2-40B4-BE49-F238E27FC236}">
+                <a16:creationId xmlns:a16="http://schemas.microsoft.com/office/drawing/2014/main" id="{D3853D3E-53F7-2582-2806-231B46728340}"/>
+              </a:ext>
+            </a:extLst>
+          </p:cNvPr>
+          <p:cNvSpPr txBox="1"/>
+          <p:nvPr/>
+        </p:nvSpPr>
+        <p:spPr>
+          <a:xfrm>
+            <a:off x="571505" y="2019413"/>
+            <a:ext cx="7619999" cy="1538883"/>
+          </a:xfrm>
+          <a:prstGeom prst="rect">
+            <a:avLst/>
+          </a:prstGeom>
+          <a:noFill/>
+        </p:spPr>
+        <p:txBody>
+          <a:bodyPr wrap="square">
+            <a:spAutoFit/>
+          </a:bodyPr>
+          <a:lstStyle/>
+          <a:p>
+            <a:r>
+              <a:rPr lang="es-ES" sz="2000" b="1" dirty="0" err="1">
+                <a:solidFill>
+                  <a:srgbClr val="00A1DE"/>
+                </a:solidFill>
+              </a:rPr>
+              <a:t>xxxxxx</a:t>
+            </a:r>
+            <a:r>
+              <a:rPr lang="es-ES" sz="2000" b="1" dirty="0"/>
+              <a:t>:</a:t>
+            </a:r>
+          </a:p>
+          <a:p>
+            <a:endParaRPr lang="es-ES" sz="2000" b="1" dirty="0">
+              <a:solidFill>
+                <a:srgbClr val="00A1DE"/>
+              </a:solidFill>
+            </a:endParaRPr>
+          </a:p>
+          <a:p>
+            <a:r>
+              <a:rPr lang="es-ES" dirty="0"/>
+              <a:t>• </a:t>
+            </a:r>
+            <a:r>
+              <a:rPr lang="es-ES" dirty="0" err="1"/>
+              <a:t>xx</a:t>
+            </a:r>
+            <a:endParaRPr lang="es-ES" dirty="0"/>
+          </a:p>
+          <a:p>
+            <a:r>
+              <a:rPr lang="es-ES" dirty="0"/>
+              <a:t>• </a:t>
+            </a:r>
+            <a:r>
+              <a:rPr lang="en-US" dirty="0"/>
+              <a:t>xx</a:t>
+            </a:r>
+          </a:p>
+          <a:p>
+            <a:r>
+              <a:rPr lang="es-ES" dirty="0"/>
+              <a:t>• </a:t>
+            </a:r>
+            <a:r>
+              <a:rPr lang="en-US" dirty="0"/>
+              <a:t>xx</a:t>
+            </a:r>
+          </a:p>
+        </p:txBody>
+      </p:sp>
+      <p:sp>
+        <p:nvSpPr>
+          <p:cNvPr id="9" name="Rounded Rectangle 4">
+            <a:extLst>
+              <a:ext uri="{FF2B5EF4-FFF2-40B4-BE49-F238E27FC236}">
+                <a16:creationId xmlns:a16="http://schemas.microsoft.com/office/drawing/2014/main" id="{F2A4D491-F6E5-F2FC-EA22-CB31C0DEB2AE}"/>
+              </a:ext>
+            </a:extLst>
+          </p:cNvPr>
+          <p:cNvSpPr/>
+          <p:nvPr/>
+        </p:nvSpPr>
+        <p:spPr>
+          <a:xfrm>
+            <a:off x="571503" y="4269841"/>
+            <a:ext cx="7619999" cy="1401921"/>
+          </a:xfrm>
+          <a:prstGeom prst="roundRect">
+            <a:avLst/>
+          </a:prstGeom>
+          <a:ln/>
+        </p:spPr>
+        <p:style>
+          <a:lnRef idx="2">
+            <a:schemeClr val="accent1"/>
+          </a:lnRef>
+          <a:fillRef idx="1">
+            <a:schemeClr val="lt1"/>
+          </a:fillRef>
+          <a:effectRef idx="0">
+            <a:schemeClr val="accent1"/>
+          </a:effectRef>
+          <a:fontRef idx="minor">
+            <a:schemeClr val="dk1"/>
+          </a:fontRef>
+        </p:style>
+        <p:txBody>
+          <a:bodyPr rtlCol="0" anchor="ctr"/>
+          <a:lstStyle/>
+          <a:p>
+            <a:pPr algn="ctr">
+              <a:defRPr sz="1700">
+                <a:solidFill>
+                  <a:srgbClr val="FFFFFF"/>
+                </a:solidFill>
+              </a:defRPr>
+            </a:pPr>
+            <a:r>
+              <a:rPr lang="es-ES" sz="2000" b="1" dirty="0" err="1">
+                <a:solidFill>
+                  <a:schemeClr val="tx1">
+                    <a:lumMod val="85000"/>
+                    <a:lumOff val="15000"/>
+                  </a:schemeClr>
+                </a:solidFill>
+              </a:rPr>
+              <a:t>xxxx</a:t>
+            </a:r>
+            <a:endParaRPr lang="en-US" sz="2000" b="1" dirty="0">
+              <a:solidFill>
+                <a:schemeClr val="tx1">
+                  <a:lumMod val="85000"/>
+                  <a:lumOff val="15000"/>
+                </a:schemeClr>
+              </a:solidFill>
+            </a:endParaRPr>
+          </a:p>
+        </p:txBody>
+      </p:sp>
+      <p:sp>
+        <p:nvSpPr>
+          <p:cNvPr id="4" name="CuadroTexto 3">
+            <a:extLst>
+              <a:ext uri="{FF2B5EF4-FFF2-40B4-BE49-F238E27FC236}">
+                <a16:creationId xmlns:a16="http://schemas.microsoft.com/office/drawing/2014/main" id="{B6A7D27A-70A7-B7E4-A946-40B8075170E8}"/>
+              </a:ext>
+            </a:extLst>
+          </p:cNvPr>
+          <p:cNvSpPr txBox="1"/>
+          <p:nvPr/>
+        </p:nvSpPr>
+        <p:spPr>
+          <a:xfrm>
+            <a:off x="571504" y="584284"/>
+            <a:ext cx="7871273" cy="923330"/>
+          </a:xfrm>
+          <a:prstGeom prst="rect">
+            <a:avLst/>
+          </a:prstGeom>
+          <a:noFill/>
+        </p:spPr>
+        <p:txBody>
+          <a:bodyPr vert="horz" wrap="square" rtlCol="0">
+            <a:spAutoFit/>
+          </a:bodyPr>
+          <a:lstStyle/>
+          <a:p>
+            <a:r>
+              <a:rPr lang="en-US" sz="2700" b="1" dirty="0">
+                <a:solidFill>
+                  <a:srgbClr val="003366"/>
+                </a:solidFill>
+              </a:rPr>
+              <a:t>XXXXXXXXXXXXXX</a:t>
+            </a:r>
+          </a:p>
+          <a:p>
+            <a:r>
+              <a:rPr lang="en-US" sz="2700" dirty="0">
+                <a:solidFill>
+                  <a:srgbClr val="003366"/>
+                </a:solidFill>
+              </a:rPr>
+              <a:t>XX</a:t>
+            </a:r>
+            <a:endParaRPr lang="es-ES" sz="2200" dirty="0">
+              <a:solidFill>
+                <a:srgbClr val="003366"/>
+              </a:solidFill>
+            </a:endParaRPr>
+          </a:p>
+        </p:txBody>
+      </p:sp>
+      <p:sp>
+        <p:nvSpPr>
+          <p:cNvPr id="5" name="Rectángulo 4">
+            <a:extLst>
+              <a:ext uri="{FF2B5EF4-FFF2-40B4-BE49-F238E27FC236}">
+                <a16:creationId xmlns:a16="http://schemas.microsoft.com/office/drawing/2014/main" id="{C06B1E80-3813-3875-CDA4-5AFB674FBA9F}"/>
+              </a:ext>
+            </a:extLst>
+          </p:cNvPr>
+          <p:cNvSpPr/>
+          <p:nvPr/>
+        </p:nvSpPr>
+        <p:spPr>
+          <a:xfrm>
+            <a:off x="381003" y="631909"/>
+            <a:ext cx="57151" cy="476251"/>
+          </a:xfrm>
+          <a:prstGeom prst="rect">
+            <a:avLst/>
+          </a:prstGeom>
+          <a:solidFill>
+            <a:srgbClr val="E61973"/>
+          </a:solidFill>
+          <a:ln w="19050" cap="flat" cmpd="sng" algn="ctr">
+            <a:noFill/>
+            <a:prstDash val="solid"/>
+            <a:miter lim="800000"/>
+          </a:ln>
+          <a:effectLst/>
+          <a:extLst>
+            <a:ext uri="{91240B29-F687-4F45-9708-019B960494DF}">
+              <a14:hiddenLine xmlns:a14="http://schemas.microsoft.com/office/drawing/2010/main" w="19050" cap="flat" cmpd="sng" algn="ctr">
+                <a:solidFill>
+                  <a:schemeClr val="accent1">
+                    <a:shade val="15000"/>
+                  </a:schemeClr>
+                </a:solidFill>
+                <a:prstDash val="solid"/>
+                <a:miter lim="800000"/>
+              </a14:hiddenLine>
             </a:ext>
           </a:extLst>
         </p:spPr>
+        <p:style>
+          <a:lnRef idx="2">
+            <a:schemeClr val="accent1">
+              <a:shade val="15000"/>
+            </a:schemeClr>
+          </a:lnRef>
+          <a:fillRef idx="1">
+            <a:schemeClr val="accent1"/>
+          </a:fillRef>
+          <a:effectRef idx="0">
+            <a:schemeClr val="accent1"/>
+          </a:effectRef>
+          <a:fontRef idx="minor">
+            <a:schemeClr val="lt1"/>
+          </a:fontRef>
+        </p:style>
+        <p:txBody>
+          <a:bodyPr rot="0" spcFirstLastPara="0" vertOverflow="overflow" horzOverflow="overflow" vert="horz" wrap="square" lIns="68580" tIns="34291" rIns="68580" bIns="34291" numCol="1" spcCol="0" rtlCol="0" fromWordArt="0" anchor="ctr" anchorCtr="0" forceAA="0" compatLnSpc="1">
+            <a:prstTxWarp prst="textNoShape">
+              <a:avLst/>
+            </a:prstTxWarp>
+            <a:noAutofit/>
+          </a:bodyPr>
+          <a:lstStyle/>
+          <a:p>
+            <a:pPr algn="ctr"/>
+            <a:endParaRPr lang="es-ES" sz="1351"/>
+          </a:p>
+        </p:txBody>
+      </p:sp>
+      <p:pic>
+        <p:nvPicPr>
+          <p:cNvPr id="2" name="Imagen 1">
+            <a:extLst>
+              <a:ext uri="{FF2B5EF4-FFF2-40B4-BE49-F238E27FC236}">
+                <a16:creationId xmlns:a16="http://schemas.microsoft.com/office/drawing/2014/main" id="{6636E7D2-708F-B7D5-E822-73E679E3C496}"/>
+              </a:ext>
+            </a:extLst>
+          </p:cNvPr>
+          <p:cNvPicPr>
+            <a:picLocks noChangeAspect="1"/>
+          </p:cNvPicPr>
+          <p:nvPr/>
+        </p:nvPicPr>
+        <p:blipFill>
+          <a:blip r:embed="rId2"/>
+          <a:srcRect t="22851" r="64431" b="22773"/>
+          <a:stretch/>
+        </p:blipFill>
+        <p:spPr>
+          <a:xfrm>
+            <a:off x="7429297" y="276722"/>
+            <a:ext cx="1013479" cy="845788"/>
+          </a:xfrm>
+          <a:prstGeom prst="rect">
+            <a:avLst/>
+          </a:prstGeom>
+        </p:spPr>
       </p:pic>
     </p:spTree>
+    <p:extLst>
+      <p:ext uri="{BB962C8B-B14F-4D97-AF65-F5344CB8AC3E}">
+        <p14:creationId xmlns:p14="http://schemas.microsoft.com/office/powerpoint/2010/main" val="4116332951"/>
+      </p:ext>
+    </p:extLst>
   </p:cSld>
   <p:clrMapOvr>
     <a:masterClrMapping/>
@@ -4505,224 +6279,14 @@
       </p:grpSpPr>
       <p:sp>
         <p:nvSpPr>
-          <p:cNvPr id="8" name="TextBox 3">
-            <a:extLst>
-              <a:ext uri="{FF2B5EF4-FFF2-40B4-BE49-F238E27FC236}">
-                <a16:creationId xmlns:a16="http://schemas.microsoft.com/office/drawing/2014/main" id="{D3853D3E-53F7-2582-2806-231B46728340}"/>
-              </a:ext>
-            </a:extLst>
-          </p:cNvPr>
-          <p:cNvSpPr txBox="1"/>
-          <p:nvPr/>
-        </p:nvSpPr>
-        <p:spPr>
-          <a:xfrm>
-            <a:off x="571500" y="2019409"/>
-            <a:ext cx="7619999" cy="1538883"/>
-          </a:xfrm>
-          <a:prstGeom prst="rect">
-            <a:avLst/>
-          </a:prstGeom>
-          <a:noFill/>
-        </p:spPr>
-        <p:txBody>
-          <a:bodyPr wrap="square">
-            <a:spAutoFit/>
-          </a:bodyPr>
-          <a:lstStyle/>
-          <a:p>
-            <a:r>
-              <a:rPr lang="es-ES" sz="2000" b="1" dirty="0" err="1">
-                <a:solidFill>
-                  <a:srgbClr val="00A1DE"/>
-                </a:solidFill>
-              </a:rPr>
-              <a:t>xxxxxx</a:t>
-            </a:r>
-            <a:r>
-              <a:rPr lang="es-ES" sz="2000" b="1" dirty="0"/>
-              <a:t>:</a:t>
-            </a:r>
-          </a:p>
-          <a:p>
-            <a:endParaRPr lang="es-ES" sz="2000" b="1" dirty="0">
-              <a:solidFill>
-                <a:srgbClr val="00A1DE"/>
-              </a:solidFill>
-            </a:endParaRPr>
-          </a:p>
-          <a:p>
-            <a:r>
-              <a:rPr lang="es-ES" dirty="0"/>
-              <a:t>• </a:t>
-            </a:r>
-            <a:r>
-              <a:rPr lang="es-ES" dirty="0" err="1"/>
-              <a:t>xx</a:t>
-            </a:r>
-            <a:endParaRPr lang="es-ES" dirty="0"/>
-          </a:p>
-          <a:p>
-            <a:r>
-              <a:rPr lang="es-ES" dirty="0"/>
-              <a:t>• </a:t>
-            </a:r>
-            <a:r>
-              <a:rPr lang="en-US" dirty="0"/>
-              <a:t>xx</a:t>
-            </a:r>
-          </a:p>
-          <a:p>
-            <a:r>
-              <a:rPr lang="es-ES" dirty="0"/>
-              <a:t>• </a:t>
-            </a:r>
-            <a:r>
-              <a:rPr lang="en-US" dirty="0"/>
-              <a:t>xx</a:t>
-            </a:r>
-          </a:p>
-        </p:txBody>
-      </p:sp>
-      <p:sp>
-        <p:nvSpPr>
-          <p:cNvPr id="9" name="Rounded Rectangle 4">
-            <a:extLst>
-              <a:ext uri="{FF2B5EF4-FFF2-40B4-BE49-F238E27FC236}">
-                <a16:creationId xmlns:a16="http://schemas.microsoft.com/office/drawing/2014/main" id="{F2A4D491-F6E5-F2FC-EA22-CB31C0DEB2AE}"/>
-              </a:ext>
-            </a:extLst>
-          </p:cNvPr>
+          <p:cNvPr id="2" name="Rectangle 1"/>
           <p:cNvSpPr/>
           <p:nvPr/>
         </p:nvSpPr>
         <p:spPr>
           <a:xfrm>
-            <a:off x="571500" y="4269836"/>
-            <a:ext cx="7619998" cy="1401921"/>
-          </a:xfrm>
-          <a:prstGeom prst="roundRect">
-            <a:avLst/>
-          </a:prstGeom>
-          <a:ln/>
-        </p:spPr>
-        <p:style>
-          <a:lnRef idx="2">
-            <a:schemeClr val="accent1"/>
-          </a:lnRef>
-          <a:fillRef idx="1">
-            <a:schemeClr val="lt1"/>
-          </a:fillRef>
-          <a:effectRef idx="0">
-            <a:schemeClr val="accent1"/>
-          </a:effectRef>
-          <a:fontRef idx="minor">
-            <a:schemeClr val="dk1"/>
-          </a:fontRef>
-        </p:style>
-        <p:txBody>
-          <a:bodyPr rtlCol="0" anchor="ctr"/>
-          <a:lstStyle/>
-          <a:p>
-            <a:pPr algn="ctr">
-              <a:defRPr sz="1700">
-                <a:solidFill>
-                  <a:srgbClr val="FFFFFF"/>
-                </a:solidFill>
-              </a:defRPr>
-            </a:pPr>
-            <a:r>
-              <a:rPr lang="es-ES" sz="2000" b="1" dirty="0" err="1">
-                <a:solidFill>
-                  <a:schemeClr val="tx1">
-                    <a:lumMod val="85000"/>
-                    <a:lumOff val="15000"/>
-                  </a:schemeClr>
-                </a:solidFill>
-              </a:rPr>
-              <a:t>xxxx</a:t>
-            </a:r>
-            <a:endParaRPr lang="en-US" sz="2000" b="1" dirty="0">
-              <a:solidFill>
-                <a:schemeClr val="tx1">
-                  <a:lumMod val="85000"/>
-                  <a:lumOff val="15000"/>
-                </a:schemeClr>
-              </a:solidFill>
-            </a:endParaRPr>
-          </a:p>
-        </p:txBody>
-      </p:sp>
-      <p:sp>
-        <p:nvSpPr>
-          <p:cNvPr id="4" name="CuadroTexto 3">
-            <a:extLst>
-              <a:ext uri="{FF2B5EF4-FFF2-40B4-BE49-F238E27FC236}">
-                <a16:creationId xmlns:a16="http://schemas.microsoft.com/office/drawing/2014/main" id="{B6A7D27A-70A7-B7E4-A946-40B8075170E8}"/>
-              </a:ext>
-            </a:extLst>
-          </p:cNvPr>
-          <p:cNvSpPr txBox="1"/>
-          <p:nvPr/>
-        </p:nvSpPr>
-        <p:spPr>
-          <a:xfrm>
-            <a:off x="571499" y="584284"/>
-            <a:ext cx="7871273" cy="923330"/>
-          </a:xfrm>
-          <a:prstGeom prst="rect">
-            <a:avLst/>
-          </a:prstGeom>
-          <a:noFill/>
-        </p:spPr>
-        <p:txBody>
-          <a:bodyPr vert="horz" wrap="square" rtlCol="0">
-            <a:spAutoFit/>
-          </a:bodyPr>
-          <a:lstStyle/>
-          <a:p>
-            <a:r>
-              <a:rPr lang="en-US" sz="2700" b="1" dirty="0">
-                <a:solidFill>
-                  <a:srgbClr val="003366"/>
-                </a:solidFill>
-              </a:rPr>
-              <a:t>XXXXXXXXXXXXXX</a:t>
-            </a:r>
-          </a:p>
-          <a:p>
-            <a:r>
-              <a:rPr lang="en-US" sz="2700" dirty="0">
-                <a:solidFill>
-                  <a:srgbClr val="003366"/>
-                </a:solidFill>
-              </a:rPr>
-              <a:t>XX</a:t>
-            </a:r>
-            <a:endParaRPr lang="es-ES" sz="2200" dirty="0">
-              <a:solidFill>
-                <a:srgbClr val="003366"/>
-              </a:solidFill>
-            </a:endParaRPr>
-          </a:p>
-        </p:txBody>
-      </p:sp>
-      <p:sp>
-        <p:nvSpPr>
-          <p:cNvPr id="5" name="Rectángulo 4">
-            <a:extLst>
-              <a:ext uri="{FF2B5EF4-FFF2-40B4-BE49-F238E27FC236}">
-                <a16:creationId xmlns:a16="http://schemas.microsoft.com/office/drawing/2014/main" id="{C06B1E80-3813-3875-CDA4-5AFB674FBA9F}"/>
-              </a:ext>
-            </a:extLst>
-          </p:cNvPr>
-          <p:cNvSpPr/>
-          <p:nvPr/>
-        </p:nvSpPr>
-        <p:spPr>
-          <a:xfrm>
-            <a:off x="381000" y="631908"/>
-            <a:ext cx="57150" cy="476250"/>
+            <a:off x="421651" y="715345"/>
+            <a:ext cx="34299" cy="377288"/>
           </a:xfrm>
           <a:prstGeom prst="rect">
             <a:avLst/>
@@ -4730,36 +6294,20 @@
           <a:solidFill>
             <a:srgbClr val="E61973"/>
           </a:solidFill>
-          <a:ln w="19050" cap="flat" cmpd="sng" algn="ctr">
-            <a:noFill/>
-            <a:prstDash val="solid"/>
-            <a:miter lim="800000"/>
+          <a:ln>
+            <a:solidFill>
+              <a:srgbClr val="E61973"/>
+            </a:solidFill>
           </a:ln>
-          <a:effectLst/>
-          <a:extLst>
-            <a:ext uri="{91240B29-F687-4F45-9708-019B960494DF}">
-              <a14:hiddenLine xmlns:a14="http://schemas.microsoft.com/office/drawing/2010/main" w="19050" cap="flat" cmpd="sng" algn="ctr">
-                <a:solidFill>
-                  <a:schemeClr val="accent1">
-                    <a:shade val="15000"/>
-                  </a:schemeClr>
-                </a:solidFill>
-                <a:prstDash val="solid"/>
-                <a:miter lim="800000"/>
-              </a14:hiddenLine>
-            </a:ext>
-          </a:extLst>
         </p:spPr>
         <p:style>
-          <a:lnRef idx="2">
-            <a:schemeClr val="accent1">
-              <a:shade val="15000"/>
-            </a:schemeClr>
+          <a:lnRef idx="1">
+            <a:schemeClr val="accent1"/>
           </a:lnRef>
-          <a:fillRef idx="1">
+          <a:fillRef idx="3">
             <a:schemeClr val="accent1"/>
           </a:fillRef>
-          <a:effectRef idx="0">
+          <a:effectRef idx="2">
             <a:schemeClr val="accent1"/>
           </a:effectRef>
           <a:fontRef idx="minor">
@@ -4767,23 +6315,425 @@
           </a:fontRef>
         </p:style>
         <p:txBody>
-          <a:bodyPr rot="0" spcFirstLastPara="0" vertOverflow="overflow" horzOverflow="overflow" vert="horz" wrap="square" lIns="68580" tIns="34290" rIns="68580" bIns="34290" numCol="1" spcCol="0" rtlCol="0" fromWordArt="0" anchor="ctr" anchorCtr="0" forceAA="0" compatLnSpc="1">
-            <a:prstTxWarp prst="textNoShape">
-              <a:avLst/>
-            </a:prstTxWarp>
-            <a:noAutofit/>
+          <a:bodyPr rtlCol="0" anchor="ctr"/>
+          <a:lstStyle/>
+          <a:p>
+            <a:pPr algn="ctr"/>
+            <a:endParaRPr sz="1351"/>
+          </a:p>
+        </p:txBody>
+      </p:sp>
+      <p:sp>
+        <p:nvSpPr>
+          <p:cNvPr id="3" name="TextBox 2"/>
+          <p:cNvSpPr txBox="1"/>
+          <p:nvPr/>
+        </p:nvSpPr>
+        <p:spPr>
+          <a:xfrm>
+            <a:off x="558846" y="633028"/>
+            <a:ext cx="2846870" cy="415627"/>
+          </a:xfrm>
+          <a:prstGeom prst="rect">
+            <a:avLst/>
+          </a:prstGeom>
+          <a:noFill/>
+        </p:spPr>
+        <p:txBody>
+          <a:bodyPr wrap="none">
+            <a:spAutoFit/>
           </a:bodyPr>
           <a:lstStyle/>
           <a:p>
+            <a:r>
+              <a:rPr lang="es-ES" sz="2101" b="1" dirty="0">
+                <a:solidFill>
+                  <a:srgbClr val="003366"/>
+                </a:solidFill>
+                <a:latin typeface="Aptos Display"/>
+              </a:rPr>
+              <a:t>CUESTIONES DE </a:t>
+            </a:r>
+            <a:r>
+              <a:rPr lang="es-ES" sz="2101" b="1" dirty="0" err="1">
+                <a:solidFill>
+                  <a:srgbClr val="003366"/>
+                </a:solidFill>
+                <a:latin typeface="Aptos Display"/>
+              </a:rPr>
+              <a:t>DE</a:t>
+            </a:r>
+            <a:r>
+              <a:rPr lang="es-ES" sz="2101" b="1" dirty="0">
+                <a:solidFill>
+                  <a:srgbClr val="003366"/>
+                </a:solidFill>
+                <a:latin typeface="Aptos Display"/>
+              </a:rPr>
+              <a:t> HOY</a:t>
+            </a:r>
+          </a:p>
+        </p:txBody>
+      </p:sp>
+      <p:sp>
+        <p:nvSpPr>
+          <p:cNvPr id="5" name="Rounded Rectangle 4"/>
+          <p:cNvSpPr/>
+          <p:nvPr/>
+        </p:nvSpPr>
+        <p:spPr>
+          <a:xfrm>
+            <a:off x="2583603" y="1662781"/>
+            <a:ext cx="5084887" cy="1790012"/>
+          </a:xfrm>
+          <a:prstGeom prst="roundRect">
+            <a:avLst/>
+          </a:prstGeom>
+          <a:solidFill>
+            <a:srgbClr val="FFFFFF"/>
+          </a:solidFill>
+          <a:ln>
+            <a:solidFill>
+              <a:srgbClr val="E61973"/>
+            </a:solidFill>
+          </a:ln>
+        </p:spPr>
+        <p:style>
+          <a:lnRef idx="1">
+            <a:schemeClr val="accent1"/>
+          </a:lnRef>
+          <a:fillRef idx="3">
+            <a:schemeClr val="accent1"/>
+          </a:fillRef>
+          <a:effectRef idx="2">
+            <a:schemeClr val="accent1"/>
+          </a:effectRef>
+          <a:fontRef idx="minor">
+            <a:schemeClr val="lt1"/>
+          </a:fontRef>
+        </p:style>
+        <p:txBody>
+          <a:bodyPr rtlCol="0" anchor="ctr"/>
+          <a:lstStyle/>
+          <a:p>
+            <a:r>
+              <a:rPr lang="es-ES" sz="1600" dirty="0"/>
+              <a:t>variables </a:t>
+            </a:r>
+          </a:p>
+        </p:txBody>
+      </p:sp>
+      <p:sp>
+        <p:nvSpPr>
+          <p:cNvPr id="6" name="Rounded Rectangle 5"/>
+          <p:cNvSpPr/>
+          <p:nvPr/>
+        </p:nvSpPr>
+        <p:spPr>
+          <a:xfrm>
+            <a:off x="2619382" y="3813464"/>
+            <a:ext cx="5049108" cy="1381755"/>
+          </a:xfrm>
+          <a:prstGeom prst="roundRect">
+            <a:avLst/>
+          </a:prstGeom>
+          <a:solidFill>
+            <a:srgbClr val="FFFFFF"/>
+          </a:solidFill>
+          <a:ln>
+            <a:solidFill>
+              <a:srgbClr val="00A1DE"/>
+            </a:solidFill>
+          </a:ln>
+        </p:spPr>
+        <p:style>
+          <a:lnRef idx="1">
+            <a:schemeClr val="accent1"/>
+          </a:lnRef>
+          <a:fillRef idx="3">
+            <a:schemeClr val="accent1"/>
+          </a:fillRef>
+          <a:effectRef idx="2">
+            <a:schemeClr val="accent1"/>
+          </a:effectRef>
+          <a:fontRef idx="minor">
+            <a:schemeClr val="lt1"/>
+          </a:fontRef>
+        </p:style>
+        <p:txBody>
+          <a:bodyPr rtlCol="0" anchor="ctr"/>
+          <a:lstStyle/>
+          <a:p>
             <a:pPr algn="ctr"/>
-            <a:endParaRPr lang="es-ES" sz="1350"/>
+            <a:endParaRPr sz="1125" dirty="0"/>
+          </a:p>
+        </p:txBody>
+      </p:sp>
+      <p:sp>
+        <p:nvSpPr>
+          <p:cNvPr id="8" name="CuadroTexto 7">
+            <a:extLst>
+              <a:ext uri="{FF2B5EF4-FFF2-40B4-BE49-F238E27FC236}">
+                <a16:creationId xmlns:a16="http://schemas.microsoft.com/office/drawing/2014/main" id="{6CF3B01D-34E6-8DAA-D4C9-6D9F445DFD3C}"/>
+              </a:ext>
+            </a:extLst>
+          </p:cNvPr>
+          <p:cNvSpPr txBox="1"/>
+          <p:nvPr/>
+        </p:nvSpPr>
+        <p:spPr>
+          <a:xfrm>
+            <a:off x="2766332" y="1698467"/>
+            <a:ext cx="4808641" cy="1754326"/>
+          </a:xfrm>
+          <a:prstGeom prst="rect">
+            <a:avLst/>
+          </a:prstGeom>
+          <a:noFill/>
+        </p:spPr>
+        <p:txBody>
+          <a:bodyPr wrap="square">
+            <a:spAutoFit/>
+          </a:bodyPr>
+          <a:lstStyle/>
+          <a:p>
+            <a:r>
+              <a:rPr lang="es-ES" dirty="0"/>
+              <a:t>📊 1 - MAGNITUD DEL ABSENTISMO</a:t>
+            </a:r>
+          </a:p>
+          <a:p>
+            <a:endParaRPr lang="es-ES" dirty="0"/>
+          </a:p>
+          <a:p>
+            <a:r>
+              <a:rPr lang="es-ES" dirty="0"/>
+              <a:t>📈 2- VARIACIÓN ANUAL</a:t>
+            </a:r>
+          </a:p>
+          <a:p>
+            <a:endParaRPr lang="es-ES" dirty="0"/>
+          </a:p>
+          <a:p>
+            <a:r>
+              <a:rPr lang="es-ES" dirty="0"/>
+              <a:t>🏢 3- PROPUESTAS PARA REFORZAR LA PLANIFICACIÓN</a:t>
+            </a:r>
+          </a:p>
+        </p:txBody>
+      </p:sp>
+      <p:pic>
+        <p:nvPicPr>
+          <p:cNvPr id="4" name="Imagen 3">
+            <a:extLst>
+              <a:ext uri="{FF2B5EF4-FFF2-40B4-BE49-F238E27FC236}">
+                <a16:creationId xmlns:a16="http://schemas.microsoft.com/office/drawing/2014/main" id="{597D1914-7CA6-342E-AA69-4536F6D15976}"/>
+              </a:ext>
+            </a:extLst>
+          </p:cNvPr>
+          <p:cNvPicPr>
+            <a:picLocks noChangeAspect="1"/>
+          </p:cNvPicPr>
+          <p:nvPr/>
+        </p:nvPicPr>
+        <p:blipFill>
+          <a:blip r:embed="rId3"/>
+          <a:srcRect t="22851" r="64431" b="22773"/>
+          <a:stretch/>
+        </p:blipFill>
+        <p:spPr>
+          <a:xfrm>
+            <a:off x="7429297" y="276722"/>
+            <a:ext cx="1013479" cy="845788"/>
+          </a:xfrm>
+          <a:prstGeom prst="rect">
+            <a:avLst/>
+          </a:prstGeom>
+        </p:spPr>
+      </p:pic>
+      <p:sp>
+        <p:nvSpPr>
+          <p:cNvPr id="7" name="CuadroTexto 6">
+            <a:extLst>
+              <a:ext uri="{FF2B5EF4-FFF2-40B4-BE49-F238E27FC236}">
+                <a16:creationId xmlns:a16="http://schemas.microsoft.com/office/drawing/2014/main" id="{DB73DAE3-6ECA-05E5-B198-CDE859970FE1}"/>
+              </a:ext>
+            </a:extLst>
+          </p:cNvPr>
+          <p:cNvSpPr txBox="1"/>
+          <p:nvPr/>
+        </p:nvSpPr>
+        <p:spPr>
+          <a:xfrm>
+            <a:off x="2766332" y="3908475"/>
+            <a:ext cx="4777467" cy="1200329"/>
+          </a:xfrm>
+          <a:prstGeom prst="rect">
+            <a:avLst/>
+          </a:prstGeom>
+          <a:noFill/>
+        </p:spPr>
+        <p:txBody>
+          <a:bodyPr wrap="square">
+            <a:spAutoFit/>
+          </a:bodyPr>
+          <a:lstStyle/>
+          <a:p>
+            <a:r>
+              <a:rPr lang="es-ES" dirty="0"/>
+              <a:t>📊 4- PERFIL SOCIODEMOGRÁFICO EMPLEADOS</a:t>
+            </a:r>
+          </a:p>
+          <a:p>
+            <a:r>
+              <a:rPr lang="es-ES" dirty="0"/>
+              <a:t> </a:t>
+            </a:r>
+          </a:p>
+          <a:p>
+            <a:r>
+              <a:rPr lang="es-ES" dirty="0"/>
+              <a:t>📈 5- POLÍTICAS DE TALENTO ADAPTADAS PARA MEJORAR EL COMPROMISO Y DESARROLLO</a:t>
+            </a:r>
+          </a:p>
+        </p:txBody>
+      </p:sp>
+      <p:sp>
+        <p:nvSpPr>
+          <p:cNvPr id="9" name="Rounded Rectangle 4">
+            <a:extLst>
+              <a:ext uri="{FF2B5EF4-FFF2-40B4-BE49-F238E27FC236}">
+                <a16:creationId xmlns:a16="http://schemas.microsoft.com/office/drawing/2014/main" id="{1405741C-3290-F7E7-0C50-8BA66484BE85}"/>
+              </a:ext>
+            </a:extLst>
+          </p:cNvPr>
+          <p:cNvSpPr/>
+          <p:nvPr/>
+        </p:nvSpPr>
+        <p:spPr>
+          <a:xfrm>
+            <a:off x="637406" y="1662781"/>
+            <a:ext cx="1536644" cy="1766219"/>
+          </a:xfrm>
+          <a:prstGeom prst="roundRect">
+            <a:avLst/>
+          </a:prstGeom>
+          <a:solidFill>
+            <a:srgbClr val="F8F0F4"/>
+          </a:solidFill>
+          <a:ln>
+            <a:solidFill>
+              <a:srgbClr val="E91E63"/>
+            </a:solidFill>
+          </a:ln>
+        </p:spPr>
+        <p:style>
+          <a:lnRef idx="1">
+            <a:schemeClr val="accent1"/>
+          </a:lnRef>
+          <a:fillRef idx="3">
+            <a:schemeClr val="accent1"/>
+          </a:fillRef>
+          <a:effectRef idx="2">
+            <a:schemeClr val="accent1"/>
+          </a:effectRef>
+          <a:fontRef idx="minor">
+            <a:schemeClr val="lt1"/>
+          </a:fontRef>
+        </p:style>
+        <p:txBody>
+          <a:bodyPr rtlCol="0" anchor="ctr"/>
+          <a:lstStyle/>
+          <a:p>
+            <a:pPr algn="ctr">
+              <a:defRPr sz="1300"/>
+            </a:pPr>
+            <a:r>
+              <a:rPr lang="en-US" sz="1600" b="1" dirty="0">
+                <a:solidFill>
+                  <a:schemeClr val="tx1"/>
+                </a:solidFill>
+              </a:rPr>
+              <a:t>ANÁLISIS ABSENTISMO</a:t>
+            </a:r>
+            <a:endParaRPr lang="en-US" sz="1600" dirty="0">
+              <a:solidFill>
+                <a:schemeClr val="tx1"/>
+              </a:solidFill>
+            </a:endParaRPr>
+          </a:p>
+        </p:txBody>
+      </p:sp>
+      <p:sp>
+        <p:nvSpPr>
+          <p:cNvPr id="11" name="Rounded Rectangle 4">
+            <a:extLst>
+              <a:ext uri="{FF2B5EF4-FFF2-40B4-BE49-F238E27FC236}">
+                <a16:creationId xmlns:a16="http://schemas.microsoft.com/office/drawing/2014/main" id="{F8E5626F-C336-E88A-5586-55D4CD8AA2CB}"/>
+              </a:ext>
+            </a:extLst>
+          </p:cNvPr>
+          <p:cNvSpPr/>
+          <p:nvPr/>
+        </p:nvSpPr>
+        <p:spPr>
+          <a:xfrm>
+            <a:off x="637406" y="3822911"/>
+            <a:ext cx="1536644" cy="1372308"/>
+          </a:xfrm>
+          <a:prstGeom prst="roundRect">
+            <a:avLst/>
+          </a:prstGeom>
+          <a:solidFill>
+            <a:srgbClr val="F8F0F4"/>
+          </a:solidFill>
+          <a:ln>
+            <a:solidFill>
+              <a:srgbClr val="E91E63"/>
+            </a:solidFill>
+          </a:ln>
+        </p:spPr>
+        <p:style>
+          <a:lnRef idx="1">
+            <a:schemeClr val="accent1"/>
+          </a:lnRef>
+          <a:fillRef idx="3">
+            <a:schemeClr val="accent1"/>
+          </a:fillRef>
+          <a:effectRef idx="2">
+            <a:schemeClr val="accent1"/>
+          </a:effectRef>
+          <a:fontRef idx="minor">
+            <a:schemeClr val="lt1"/>
+          </a:fontRef>
+        </p:style>
+        <p:txBody>
+          <a:bodyPr rtlCol="0" anchor="ctr"/>
+          <a:lstStyle/>
+          <a:p>
+            <a:pPr algn="ctr">
+              <a:defRPr sz="1300"/>
+            </a:pPr>
+            <a:r>
+              <a:rPr lang="en-US" sz="1600" b="1" dirty="0">
+                <a:solidFill>
+                  <a:schemeClr val="tx1"/>
+                </a:solidFill>
+              </a:rPr>
+              <a:t>ANÁLISIS PERFIL Y DESEMPEÑO</a:t>
+            </a:r>
+            <a:endParaRPr lang="en-US" sz="1600" dirty="0">
+              <a:solidFill>
+                <a:schemeClr val="tx1"/>
+              </a:solidFill>
+            </a:endParaRPr>
           </a:p>
         </p:txBody>
       </p:sp>
     </p:spTree>
     <p:extLst>
       <p:ext uri="{BB962C8B-B14F-4D97-AF65-F5344CB8AC3E}">
-        <p14:creationId xmlns:p14="http://schemas.microsoft.com/office/powerpoint/2010/main" val="4116332951"/>
+        <p14:creationId xmlns:p14="http://schemas.microsoft.com/office/powerpoint/2010/main" val="3675603056"/>
       </p:ext>
     </p:extLst>
   </p:cSld>
@@ -4836,7 +6786,7 @@
         </p:nvSpPr>
         <p:spPr>
           <a:xfrm>
-            <a:off x="571499" y="584284"/>
+            <a:off x="571504" y="584284"/>
             <a:ext cx="7871273" cy="923330"/>
           </a:xfrm>
           <a:prstGeom prst="rect">
@@ -4890,8 +6840,8 @@
         </p:nvSpPr>
         <p:spPr>
           <a:xfrm>
-            <a:off x="381000" y="631908"/>
-            <a:ext cx="57150" cy="476250"/>
+            <a:off x="381003" y="631909"/>
+            <a:ext cx="57151" cy="476251"/>
           </a:xfrm>
           <a:prstGeom prst="rect">
             <a:avLst/>
@@ -4936,7 +6886,7 @@
           </a:fontRef>
         </p:style>
         <p:txBody>
-          <a:bodyPr rot="0" spcFirstLastPara="0" vertOverflow="overflow" horzOverflow="overflow" vert="horz" wrap="square" lIns="68580" tIns="34290" rIns="68580" bIns="34290" numCol="1" spcCol="0" rtlCol="0" fromWordArt="0" anchor="ctr" anchorCtr="0" forceAA="0" compatLnSpc="1">
+          <a:bodyPr rot="0" spcFirstLastPara="0" vertOverflow="overflow" horzOverflow="overflow" vert="horz" wrap="square" lIns="68580" tIns="34291" rIns="68580" bIns="34291" numCol="1" spcCol="0" rtlCol="0" fromWordArt="0" anchor="ctr" anchorCtr="0" forceAA="0" compatLnSpc="1">
             <a:prstTxWarp prst="textNoShape">
               <a:avLst/>
             </a:prstTxWarp>
@@ -4945,10 +6895,39 @@
           <a:lstStyle/>
           <a:p>
             <a:pPr algn="ctr"/>
-            <a:endParaRPr lang="es-ES" sz="1350"/>
-          </a:p>
-        </p:txBody>
-      </p:sp>
+            <a:endParaRPr lang="es-ES" sz="1351"/>
+          </a:p>
+        </p:txBody>
+      </p:sp>
+      <p:pic>
+        <p:nvPicPr>
+          <p:cNvPr id="10" name="Imagen 9">
+            <a:extLst>
+              <a:ext uri="{FF2B5EF4-FFF2-40B4-BE49-F238E27FC236}">
+                <a16:creationId xmlns:a16="http://schemas.microsoft.com/office/drawing/2014/main" id="{FE53F045-DE8A-3A74-7FF1-B296408F8EE8}"/>
+              </a:ext>
+            </a:extLst>
+          </p:cNvPr>
+          <p:cNvPicPr>
+            <a:picLocks noChangeAspect="1"/>
+          </p:cNvPicPr>
+          <p:nvPr/>
+        </p:nvPicPr>
+        <p:blipFill>
+          <a:blip r:embed="rId3"/>
+          <a:srcRect t="22851" r="64431" b="22773"/>
+          <a:stretch/>
+        </p:blipFill>
+        <p:spPr>
+          <a:xfrm>
+            <a:off x="7429297" y="276722"/>
+            <a:ext cx="1013479" cy="845788"/>
+          </a:xfrm>
+          <a:prstGeom prst="rect">
+            <a:avLst/>
+          </a:prstGeom>
+        </p:spPr>
+      </p:pic>
     </p:spTree>
     <p:extLst>
       <p:ext uri="{BB962C8B-B14F-4D97-AF65-F5344CB8AC3E}">
@@ -4993,142 +6972,10 @@
       </p:grpSpPr>
       <p:sp>
         <p:nvSpPr>
-          <p:cNvPr id="2" name="Rounded Rectangle 5">
-            <a:extLst>
-              <a:ext uri="{FF2B5EF4-FFF2-40B4-BE49-F238E27FC236}">
-                <a16:creationId xmlns:a16="http://schemas.microsoft.com/office/drawing/2014/main" id="{0F7B5B30-CA14-DA61-ABFC-744025F2DBEB}"/>
-              </a:ext>
-            </a:extLst>
-          </p:cNvPr>
-          <p:cNvSpPr/>
-          <p:nvPr/>
-        </p:nvSpPr>
-        <p:spPr>
-          <a:xfrm>
-            <a:off x="3543032" y="2048582"/>
-            <a:ext cx="2057936" cy="2590590"/>
-          </a:xfrm>
-          <a:prstGeom prst="roundRect">
-            <a:avLst/>
-          </a:prstGeom>
-          <a:solidFill>
-            <a:srgbClr val="FFFFFF"/>
-          </a:solidFill>
-          <a:ln>
-            <a:solidFill>
-              <a:srgbClr val="00A1DE"/>
-            </a:solidFill>
-          </a:ln>
-        </p:spPr>
-        <p:style>
-          <a:lnRef idx="1">
-            <a:schemeClr val="accent1"/>
-          </a:lnRef>
-          <a:fillRef idx="3">
-            <a:schemeClr val="accent1"/>
-          </a:fillRef>
-          <a:effectRef idx="2">
-            <a:schemeClr val="accent1"/>
-          </a:effectRef>
-          <a:fontRef idx="minor">
-            <a:schemeClr val="lt1"/>
-          </a:fontRef>
-        </p:style>
-        <p:txBody>
-          <a:bodyPr rtlCol="0" anchor="ctr"/>
-          <a:lstStyle/>
-          <a:p>
-            <a:pPr algn="ctr"/>
-            <a:r>
-              <a:rPr lang="en-US" sz="1600" dirty="0">
-                <a:solidFill>
-                  <a:schemeClr val="tx1">
-                    <a:lumMod val="85000"/>
-                    <a:lumOff val="15000"/>
-                  </a:schemeClr>
-                </a:solidFill>
-              </a:rPr>
-              <a:t>XXXXXXXXX</a:t>
-            </a:r>
-          </a:p>
-          <a:p>
-            <a:pPr algn="ctr"/>
-            <a:r>
-              <a:rPr lang="en-US" sz="1600" dirty="0">
-                <a:solidFill>
-                  <a:schemeClr val="tx1">
-                    <a:lumMod val="85000"/>
-                    <a:lumOff val="15000"/>
-                  </a:schemeClr>
-                </a:solidFill>
-              </a:rPr>
-              <a:t>XXXXXX</a:t>
-            </a:r>
-          </a:p>
-          <a:p>
-            <a:pPr algn="ctr"/>
-            <a:r>
-              <a:rPr lang="en-US" sz="1600" dirty="0">
-                <a:solidFill>
-                  <a:schemeClr val="tx1">
-                    <a:lumMod val="85000"/>
-                    <a:lumOff val="15000"/>
-                  </a:schemeClr>
-                </a:solidFill>
-              </a:rPr>
-              <a:t>XXXXXXXXX</a:t>
-            </a:r>
-          </a:p>
-          <a:p>
-            <a:pPr algn="ctr"/>
-            <a:r>
-              <a:rPr lang="en-US" sz="1600" dirty="0">
-                <a:solidFill>
-                  <a:schemeClr val="tx1">
-                    <a:lumMod val="85000"/>
-                    <a:lumOff val="15000"/>
-                  </a:schemeClr>
-                </a:solidFill>
-              </a:rPr>
-              <a:t>XXXXXX</a:t>
-            </a:r>
-          </a:p>
-          <a:p>
-            <a:pPr algn="ctr"/>
-            <a:r>
-              <a:rPr lang="en-US" sz="1600" dirty="0">
-                <a:solidFill>
-                  <a:schemeClr val="tx1">
-                    <a:lumMod val="85000"/>
-                    <a:lumOff val="15000"/>
-                  </a:schemeClr>
-                </a:solidFill>
-              </a:rPr>
-              <a:t>XXXXXXXXX</a:t>
-            </a:r>
-          </a:p>
-          <a:p>
-            <a:pPr algn="ctr"/>
-            <a:r>
-              <a:rPr lang="en-US" sz="1600" dirty="0">
-                <a:solidFill>
-                  <a:schemeClr val="tx1">
-                    <a:lumMod val="85000"/>
-                    <a:lumOff val="15000"/>
-                  </a:schemeClr>
-                </a:solidFill>
-              </a:rPr>
-              <a:t>XXXXXX</a:t>
-            </a:r>
-          </a:p>
-        </p:txBody>
-      </p:sp>
-      <p:sp>
-        <p:nvSpPr>
           <p:cNvPr id="8" name="CuadroTexto 7">
             <a:extLst>
               <a:ext uri="{FF2B5EF4-FFF2-40B4-BE49-F238E27FC236}">
-                <a16:creationId xmlns:a16="http://schemas.microsoft.com/office/drawing/2014/main" id="{3A06B430-4E0E-CF86-5BCD-BE5384F1A7EF}"/>
+                <a16:creationId xmlns:a16="http://schemas.microsoft.com/office/drawing/2014/main" id="{0D3D782F-16B1-97F9-FE3D-F88CB4DC5ACF}"/>
               </a:ext>
             </a:extLst>
           </p:cNvPr>
@@ -5137,43 +6984,8 @@
         </p:nvSpPr>
         <p:spPr>
           <a:xfrm>
-            <a:off x="571499" y="6056668"/>
-            <a:ext cx="7803956" cy="276999"/>
-          </a:xfrm>
-          <a:prstGeom prst="rect">
-            <a:avLst/>
-          </a:prstGeom>
-          <a:noFill/>
-        </p:spPr>
-        <p:txBody>
-          <a:bodyPr wrap="square">
-            <a:spAutoFit/>
-          </a:bodyPr>
-          <a:lstStyle/>
-          <a:p>
-            <a:r>
-              <a:rPr lang="en-US" sz="1200" dirty="0"/>
-              <a:t>XXXXXXXX</a:t>
-            </a:r>
-          </a:p>
-        </p:txBody>
-      </p:sp>
-      <p:sp>
-        <p:nvSpPr>
-          <p:cNvPr id="6" name="CuadroTexto 5">
-            <a:extLst>
-              <a:ext uri="{FF2B5EF4-FFF2-40B4-BE49-F238E27FC236}">
-                <a16:creationId xmlns:a16="http://schemas.microsoft.com/office/drawing/2014/main" id="{1D5D8E82-5E16-E544-1306-D99695F8C4AE}"/>
-              </a:ext>
-            </a:extLst>
-          </p:cNvPr>
-          <p:cNvSpPr txBox="1"/>
-          <p:nvPr/>
-        </p:nvSpPr>
-        <p:spPr>
-          <a:xfrm>
-            <a:off x="571499" y="584284"/>
-            <a:ext cx="7871273" cy="507831"/>
+            <a:off x="571504" y="584284"/>
+            <a:ext cx="7871273" cy="923330"/>
           </a:xfrm>
           <a:prstGeom prst="rect">
             <a:avLst/>
@@ -5195,14 +7007,29 @@
               <a:t>XXXXXXXXXXXXXX</a:t>
             </a:r>
           </a:p>
-        </p:txBody>
-      </p:sp>
-      <p:sp>
-        <p:nvSpPr>
-          <p:cNvPr id="7" name="Rectángulo 6">
+          <a:p>
+            <a:r>
+              <a:rPr lang="en-US" sz="2700" dirty="0">
+                <a:solidFill>
+                  <a:srgbClr val="003366"/>
+                </a:solidFill>
+              </a:rPr>
+              <a:t>XX</a:t>
+            </a:r>
+            <a:endParaRPr lang="es-ES" sz="2200" dirty="0">
+              <a:solidFill>
+                <a:srgbClr val="003366"/>
+              </a:solidFill>
+            </a:endParaRPr>
+          </a:p>
+        </p:txBody>
+      </p:sp>
+      <p:sp>
+        <p:nvSpPr>
+          <p:cNvPr id="9" name="Rectángulo 8">
             <a:extLst>
               <a:ext uri="{FF2B5EF4-FFF2-40B4-BE49-F238E27FC236}">
-                <a16:creationId xmlns:a16="http://schemas.microsoft.com/office/drawing/2014/main" id="{174ABC20-C700-2758-34B1-31220D6EF98A}"/>
+                <a16:creationId xmlns:a16="http://schemas.microsoft.com/office/drawing/2014/main" id="{D3E869D1-DD3E-0465-CF42-5ECF240CDF24}"/>
               </a:ext>
             </a:extLst>
           </p:cNvPr>
@@ -5211,8 +7038,8 @@
         </p:nvSpPr>
         <p:spPr>
           <a:xfrm>
-            <a:off x="381000" y="631908"/>
-            <a:ext cx="57150" cy="476250"/>
+            <a:off x="381003" y="631909"/>
+            <a:ext cx="57151" cy="476251"/>
           </a:xfrm>
           <a:prstGeom prst="rect">
             <a:avLst/>
@@ -5257,7 +7084,7 @@
           </a:fontRef>
         </p:style>
         <p:txBody>
-          <a:bodyPr rot="0" spcFirstLastPara="0" vertOverflow="overflow" horzOverflow="overflow" vert="horz" wrap="square" lIns="68580" tIns="34290" rIns="68580" bIns="34290" numCol="1" spcCol="0" rtlCol="0" fromWordArt="0" anchor="ctr" anchorCtr="0" forceAA="0" compatLnSpc="1">
+          <a:bodyPr rot="0" spcFirstLastPara="0" vertOverflow="overflow" horzOverflow="overflow" vert="horz" wrap="square" lIns="68580" tIns="34291" rIns="68580" bIns="34291" numCol="1" spcCol="0" rtlCol="0" fromWordArt="0" anchor="ctr" anchorCtr="0" forceAA="0" compatLnSpc="1">
             <a:prstTxWarp prst="textNoShape">
               <a:avLst/>
             </a:prstTxWarp>
@@ -5266,14 +7093,43 @@
           <a:lstStyle/>
           <a:p>
             <a:pPr algn="ctr"/>
-            <a:endParaRPr lang="es-ES" sz="1350"/>
-          </a:p>
-        </p:txBody>
-      </p:sp>
+            <a:endParaRPr lang="es-ES" sz="1351"/>
+          </a:p>
+        </p:txBody>
+      </p:sp>
+      <p:pic>
+        <p:nvPicPr>
+          <p:cNvPr id="2" name="Imagen 1">
+            <a:extLst>
+              <a:ext uri="{FF2B5EF4-FFF2-40B4-BE49-F238E27FC236}">
+                <a16:creationId xmlns:a16="http://schemas.microsoft.com/office/drawing/2014/main" id="{4A937136-7073-9BDA-D4D4-F6ACC8E82603}"/>
+              </a:ext>
+            </a:extLst>
+          </p:cNvPr>
+          <p:cNvPicPr>
+            <a:picLocks noChangeAspect="1"/>
+          </p:cNvPicPr>
+          <p:nvPr/>
+        </p:nvPicPr>
+        <p:blipFill>
+          <a:blip r:embed="rId3"/>
+          <a:srcRect t="22851" r="64431" b="22773"/>
+          <a:stretch/>
+        </p:blipFill>
+        <p:spPr>
+          <a:xfrm>
+            <a:off x="7429297" y="276722"/>
+            <a:ext cx="1013479" cy="845788"/>
+          </a:xfrm>
+          <a:prstGeom prst="rect">
+            <a:avLst/>
+          </a:prstGeom>
+        </p:spPr>
+      </p:pic>
     </p:spTree>
     <p:extLst>
       <p:ext uri="{BB962C8B-B14F-4D97-AF65-F5344CB8AC3E}">
-        <p14:creationId xmlns:p14="http://schemas.microsoft.com/office/powerpoint/2010/main" val="3144265252"/>
+        <p14:creationId xmlns:p14="http://schemas.microsoft.com/office/powerpoint/2010/main" val="2777695105"/>
       </p:ext>
     </p:extLst>
   </p:cSld>
@@ -5314,119 +7170,10 @@
       </p:grpSpPr>
       <p:sp>
         <p:nvSpPr>
-          <p:cNvPr id="3" name="Content Placeholder 2"/>
-          <p:cNvSpPr>
-            <a:spLocks noGrp="1"/>
-          </p:cNvSpPr>
-          <p:nvPr>
-            <p:ph idx="1"/>
-          </p:nvPr>
-        </p:nvSpPr>
-        <p:spPr>
-          <a:xfrm>
-            <a:off x="418860" y="1680962"/>
-            <a:ext cx="8229600" cy="4404561"/>
-          </a:xfrm>
-        </p:spPr>
-        <p:txBody>
-          <a:bodyPr>
-            <a:normAutofit/>
-          </a:bodyPr>
-          <a:lstStyle/>
-          <a:p>
-            <a:pPr marL="0" indent="0">
-              <a:buNone/>
-            </a:pPr>
-            <a:r>
-              <a:rPr lang="es-ES" sz="2000" dirty="0"/>
-              <a:t>	📱 XXXXXXX</a:t>
-            </a:r>
-          </a:p>
-          <a:p>
-            <a:pPr marL="0" indent="0">
-              <a:buNone/>
-            </a:pPr>
-            <a:endParaRPr lang="es-ES" sz="2000" dirty="0"/>
-          </a:p>
-          <a:p>
-            <a:pPr marL="0" indent="0">
-              <a:buNone/>
-            </a:pPr>
-            <a:r>
-              <a:rPr lang="es-ES" sz="2000" dirty="0"/>
-              <a:t>	🌍 XXXXXXXX</a:t>
-            </a:r>
-          </a:p>
-          <a:p>
-            <a:pPr marL="0" indent="0">
-              <a:buNone/>
-            </a:pPr>
-            <a:endParaRPr lang="es-ES" sz="2000" dirty="0"/>
-          </a:p>
-          <a:p>
-            <a:pPr marL="0" indent="0">
-              <a:buNone/>
-            </a:pPr>
-            <a:r>
-              <a:rPr lang="es-ES" sz="2000" dirty="0"/>
-              <a:t>	🔎 XX</a:t>
-            </a:r>
-            <a:endParaRPr lang="en-US" sz="2000" dirty="0"/>
-          </a:p>
-          <a:p>
-            <a:pPr marL="0" indent="0">
-              <a:buNone/>
-            </a:pPr>
-            <a:endParaRPr lang="es-ES" sz="2000" dirty="0"/>
-          </a:p>
-          <a:p>
-            <a:pPr marL="457200" lvl="1" indent="0">
-              <a:buNone/>
-              <a:defRPr sz="1300"/>
-            </a:pPr>
-            <a:r>
-              <a:rPr lang="es-ES" sz="2000" dirty="0"/>
-              <a:t>🗣 </a:t>
-            </a:r>
-            <a:r>
-              <a:rPr lang="en-US" sz="2000" dirty="0"/>
-              <a:t>XXXX</a:t>
-            </a:r>
-          </a:p>
-          <a:p>
-            <a:pPr marL="457200" lvl="1" indent="0">
-              <a:buNone/>
-              <a:defRPr sz="1300"/>
-            </a:pPr>
-            <a:endParaRPr lang="en-US" sz="2000" dirty="0"/>
-          </a:p>
-          <a:p>
-            <a:pPr marL="0" indent="0">
-              <a:buNone/>
-            </a:pPr>
-            <a:r>
-              <a:rPr lang="es-ES" sz="2000" dirty="0"/>
-              <a:t>	👴 XXXXXX</a:t>
-            </a:r>
-            <a:endParaRPr lang="en-US" sz="1050" dirty="0"/>
-          </a:p>
-          <a:p>
-            <a:endParaRPr lang="es-ES" sz="2000" dirty="0"/>
-          </a:p>
-          <a:p>
-            <a:pPr lvl="1">
-              <a:defRPr sz="1300"/>
-            </a:pPr>
-            <a:endParaRPr dirty="0"/>
-          </a:p>
-        </p:txBody>
-      </p:sp>
-      <p:sp>
-        <p:nvSpPr>
-          <p:cNvPr id="2" name="CuadroTexto 1">
+          <p:cNvPr id="8" name="CuadroTexto 7">
             <a:extLst>
               <a:ext uri="{FF2B5EF4-FFF2-40B4-BE49-F238E27FC236}">
-                <a16:creationId xmlns:a16="http://schemas.microsoft.com/office/drawing/2014/main" id="{69236AF6-97AC-A429-56CA-C29E8FEA9481}"/>
+                <a16:creationId xmlns:a16="http://schemas.microsoft.com/office/drawing/2014/main" id="{0D3D782F-16B1-97F9-FE3D-F88CB4DC5ACF}"/>
               </a:ext>
             </a:extLst>
           </p:cNvPr>
@@ -5435,7 +7182,7 @@
         </p:nvSpPr>
         <p:spPr>
           <a:xfrm>
-            <a:off x="571499" y="584284"/>
+            <a:off x="571504" y="584289"/>
             <a:ext cx="7871273" cy="507831"/>
           </a:xfrm>
           <a:prstGeom prst="rect">
@@ -5455,17 +7202,17 @@
                   <a:srgbClr val="003366"/>
                 </a:solidFill>
               </a:rPr>
-              <a:t>XXXXXXXXXXXXX</a:t>
-            </a:r>
-          </a:p>
-        </p:txBody>
-      </p:sp>
-      <p:sp>
-        <p:nvSpPr>
-          <p:cNvPr id="4" name="Rectángulo 3">
+              <a:t>EVOLUCIÓN ANUAL ABSENTISMO</a:t>
+            </a:r>
+          </a:p>
+        </p:txBody>
+      </p:sp>
+      <p:sp>
+        <p:nvSpPr>
+          <p:cNvPr id="9" name="Rectángulo 8">
             <a:extLst>
               <a:ext uri="{FF2B5EF4-FFF2-40B4-BE49-F238E27FC236}">
-                <a16:creationId xmlns:a16="http://schemas.microsoft.com/office/drawing/2014/main" id="{D69269DE-14D5-5C28-AC3A-2DBD6CB58153}"/>
+                <a16:creationId xmlns:a16="http://schemas.microsoft.com/office/drawing/2014/main" id="{D3E869D1-DD3E-0465-CF42-5ECF240CDF24}"/>
               </a:ext>
             </a:extLst>
           </p:cNvPr>
@@ -5474,8 +7221,8 @@
         </p:nvSpPr>
         <p:spPr>
           <a:xfrm>
-            <a:off x="381000" y="631908"/>
-            <a:ext cx="57150" cy="476250"/>
+            <a:off x="381003" y="631909"/>
+            <a:ext cx="57151" cy="476251"/>
           </a:xfrm>
           <a:prstGeom prst="rect">
             <a:avLst/>
@@ -5520,7 +7267,7 @@
           </a:fontRef>
         </p:style>
         <p:txBody>
-          <a:bodyPr rot="0" spcFirstLastPara="0" vertOverflow="overflow" horzOverflow="overflow" vert="horz" wrap="square" lIns="68580" tIns="34290" rIns="68580" bIns="34290" numCol="1" spcCol="0" rtlCol="0" fromWordArt="0" anchor="ctr" anchorCtr="0" forceAA="0" compatLnSpc="1">
+          <a:bodyPr rot="0" spcFirstLastPara="0" vertOverflow="overflow" horzOverflow="overflow" vert="horz" wrap="square" lIns="68580" tIns="34291" rIns="68580" bIns="34291" numCol="1" spcCol="0" rtlCol="0" fromWordArt="0" anchor="ctr" anchorCtr="0" forceAA="0" compatLnSpc="1">
             <a:prstTxWarp prst="textNoShape">
               <a:avLst/>
             </a:prstTxWarp>
@@ -5529,11 +7276,75 @@
           <a:lstStyle/>
           <a:p>
             <a:pPr algn="ctr"/>
-            <a:endParaRPr lang="es-ES" sz="1350"/>
-          </a:p>
-        </p:txBody>
-      </p:sp>
+            <a:endParaRPr lang="es-ES" sz="1351"/>
+          </a:p>
+        </p:txBody>
+      </p:sp>
+      <p:pic>
+        <p:nvPicPr>
+          <p:cNvPr id="3" name="Imagen 2">
+            <a:extLst>
+              <a:ext uri="{FF2B5EF4-FFF2-40B4-BE49-F238E27FC236}">
+                <a16:creationId xmlns:a16="http://schemas.microsoft.com/office/drawing/2014/main" id="{7D7DE2DE-5587-EAC2-19AE-B3412D36CDB0}"/>
+              </a:ext>
+            </a:extLst>
+          </p:cNvPr>
+          <p:cNvPicPr>
+            <a:picLocks noChangeAspect="1"/>
+          </p:cNvPicPr>
+          <p:nvPr/>
+        </p:nvPicPr>
+        <p:blipFill>
+          <a:blip r:embed="rId3"/>
+          <a:stretch>
+            <a:fillRect/>
+          </a:stretch>
+        </p:blipFill>
+        <p:spPr>
+          <a:xfrm>
+            <a:off x="445189" y="1953491"/>
+            <a:ext cx="8253631" cy="3703868"/>
+          </a:xfrm>
+          <a:prstGeom prst="rect">
+            <a:avLst/>
+          </a:prstGeom>
+        </p:spPr>
+      </p:pic>
+      <p:pic>
+        <p:nvPicPr>
+          <p:cNvPr id="4" name="Imagen 3">
+            <a:extLst>
+              <a:ext uri="{FF2B5EF4-FFF2-40B4-BE49-F238E27FC236}">
+                <a16:creationId xmlns:a16="http://schemas.microsoft.com/office/drawing/2014/main" id="{C3F4FE1D-BC36-1772-BCA2-1112CAE8B298}"/>
+              </a:ext>
+            </a:extLst>
+          </p:cNvPr>
+          <p:cNvPicPr>
+            <a:picLocks noChangeAspect="1"/>
+          </p:cNvPicPr>
+          <p:nvPr/>
+        </p:nvPicPr>
+        <p:blipFill>
+          <a:blip r:embed="rId4"/>
+          <a:srcRect t="22851" r="64431" b="22773"/>
+          <a:stretch/>
+        </p:blipFill>
+        <p:spPr>
+          <a:xfrm>
+            <a:off x="7429297" y="276722"/>
+            <a:ext cx="1013479" cy="845788"/>
+          </a:xfrm>
+          <a:prstGeom prst="rect">
+            <a:avLst/>
+          </a:prstGeom>
+        </p:spPr>
+      </p:pic>
     </p:spTree>
+    <p:extLst>
+      <p:ext uri="{BB962C8B-B14F-4D97-AF65-F5344CB8AC3E}">
+        <p14:creationId xmlns:p14="http://schemas.microsoft.com/office/powerpoint/2010/main" val="2075188753"/>
+      </p:ext>
+    </p:extLst>
   </p:cSld>
   <p:clrMapOvr>
     <a:masterClrMapping/>
@@ -5572,10 +7383,49 @@
       </p:grpSpPr>
       <p:sp>
         <p:nvSpPr>
-          <p:cNvPr id="8" name="Rounded Rectangle 4">
+          <p:cNvPr id="8" name="CuadroTexto 7">
             <a:extLst>
               <a:ext uri="{FF2B5EF4-FFF2-40B4-BE49-F238E27FC236}">
-                <a16:creationId xmlns:a16="http://schemas.microsoft.com/office/drawing/2014/main" id="{4053950B-54CA-0DFB-C692-3C76C6962CFA}"/>
+                <a16:creationId xmlns:a16="http://schemas.microsoft.com/office/drawing/2014/main" id="{0D3D782F-16B1-97F9-FE3D-F88CB4DC5ACF}"/>
+              </a:ext>
+            </a:extLst>
+          </p:cNvPr>
+          <p:cNvSpPr txBox="1"/>
+          <p:nvPr/>
+        </p:nvSpPr>
+        <p:spPr>
+          <a:xfrm>
+            <a:off x="571505" y="584284"/>
+            <a:ext cx="7148580" cy="923330"/>
+          </a:xfrm>
+          <a:prstGeom prst="rect">
+            <a:avLst/>
+          </a:prstGeom>
+          <a:noFill/>
+        </p:spPr>
+        <p:txBody>
+          <a:bodyPr vert="horz" wrap="square" rtlCol="0">
+            <a:spAutoFit/>
+          </a:bodyPr>
+          <a:lstStyle/>
+          <a:p>
+            <a:r>
+              <a:rPr lang="en-US" sz="2700" b="1" dirty="0">
+                <a:solidFill>
+                  <a:srgbClr val="003366"/>
+                </a:solidFill>
+              </a:rPr>
+              <a:t>RELACIÓN ENTRE AUMENTO DE HORAS Y TOTAL DE AUSENCIAS</a:t>
+            </a:r>
+          </a:p>
+        </p:txBody>
+      </p:sp>
+      <p:sp>
+        <p:nvSpPr>
+          <p:cNvPr id="9" name="Rectángulo 8">
+            <a:extLst>
+              <a:ext uri="{FF2B5EF4-FFF2-40B4-BE49-F238E27FC236}">
+                <a16:creationId xmlns:a16="http://schemas.microsoft.com/office/drawing/2014/main" id="{D3E869D1-DD3E-0465-CF42-5ECF240CDF24}"/>
               </a:ext>
             </a:extLst>
           </p:cNvPr>
@@ -5584,29 +7434,45 @@
         </p:nvSpPr>
         <p:spPr>
           <a:xfrm>
-            <a:off x="571499" y="495954"/>
-            <a:ext cx="7988109" cy="722341"/>
-          </a:xfrm>
-          <a:prstGeom prst="roundRect">
+            <a:off x="381003" y="631909"/>
+            <a:ext cx="57151" cy="476251"/>
+          </a:xfrm>
+          <a:prstGeom prst="rect">
             <a:avLst/>
           </a:prstGeom>
           <a:solidFill>
-            <a:srgbClr val="FFFFFF"/>
+            <a:srgbClr val="E61973"/>
           </a:solidFill>
-          <a:ln>
-            <a:solidFill>
-              <a:srgbClr val="E61973"/>
-            </a:solidFill>
+          <a:ln w="19050" cap="flat" cmpd="sng" algn="ctr">
+            <a:noFill/>
+            <a:prstDash val="solid"/>
+            <a:miter lim="800000"/>
           </a:ln>
+          <a:effectLst/>
+          <a:extLst>
+            <a:ext uri="{91240B29-F687-4F45-9708-019B960494DF}">
+              <a14:hiddenLine xmlns:a14="http://schemas.microsoft.com/office/drawing/2010/main" w="19050" cap="flat" cmpd="sng" algn="ctr">
+                <a:solidFill>
+                  <a:schemeClr val="accent1">
+                    <a:shade val="15000"/>
+                  </a:schemeClr>
+                </a:solidFill>
+                <a:prstDash val="solid"/>
+                <a:miter lim="800000"/>
+              </a14:hiddenLine>
+            </a:ext>
+          </a:extLst>
         </p:spPr>
         <p:style>
-          <a:lnRef idx="1">
-            <a:schemeClr val="accent1"/>
+          <a:lnRef idx="2">
+            <a:schemeClr val="accent1">
+              <a:shade val="15000"/>
+            </a:schemeClr>
           </a:lnRef>
-          <a:fillRef idx="3">
+          <a:fillRef idx="1">
             <a:schemeClr val="accent1"/>
           </a:fillRef>
-          <a:effectRef idx="2">
+          <a:effectRef idx="0">
             <a:schemeClr val="accent1"/>
           </a:effectRef>
           <a:fontRef idx="minor">
@@ -5614,93 +7480,167 @@
           </a:fontRef>
         </p:style>
         <p:txBody>
-          <a:bodyPr rtlCol="0" anchor="ctr"/>
-          <a:lstStyle/>
-          <a:p>
-            <a:r>
-              <a:rPr lang="es-ES" sz="1600" dirty="0"/>
-              <a:t>variables </a:t>
-            </a:r>
-          </a:p>
-        </p:txBody>
-      </p:sp>
-      <p:sp>
-        <p:nvSpPr>
-          <p:cNvPr id="7" name="CuadroTexto 6">
+          <a:bodyPr rot="0" spcFirstLastPara="0" vertOverflow="overflow" horzOverflow="overflow" vert="horz" wrap="square" lIns="68580" tIns="34291" rIns="68580" bIns="34291" numCol="1" spcCol="0" rtlCol="0" fromWordArt="0" anchor="ctr" anchorCtr="0" forceAA="0" compatLnSpc="1">
+            <a:prstTxWarp prst="textNoShape">
+              <a:avLst/>
+            </a:prstTxWarp>
+            <a:noAutofit/>
+          </a:bodyPr>
+          <a:lstStyle/>
+          <a:p>
+            <a:pPr algn="ctr"/>
+            <a:endParaRPr lang="es-ES" sz="1351"/>
+          </a:p>
+        </p:txBody>
+      </p:sp>
+      <p:pic>
+        <p:nvPicPr>
+          <p:cNvPr id="2" name="Imagen 1">
             <a:extLst>
               <a:ext uri="{FF2B5EF4-FFF2-40B4-BE49-F238E27FC236}">
-                <a16:creationId xmlns:a16="http://schemas.microsoft.com/office/drawing/2014/main" id="{FCCE6C7C-BB7D-56C9-E559-B7B32FF01169}"/>
+                <a16:creationId xmlns:a16="http://schemas.microsoft.com/office/drawing/2014/main" id="{4A937136-7073-9BDA-D4D4-F6ACC8E82603}"/>
               </a:ext>
             </a:extLst>
           </p:cNvPr>
-          <p:cNvSpPr txBox="1"/>
+          <p:cNvPicPr>
+            <a:picLocks noChangeAspect="1"/>
+          </p:cNvPicPr>
           <p:nvPr/>
-        </p:nvSpPr>
-        <p:spPr>
-          <a:xfrm>
-            <a:off x="633846" y="543522"/>
-            <a:ext cx="7988108" cy="369332"/>
+        </p:nvPicPr>
+        <p:blipFill>
+          <a:blip r:embed="rId3"/>
+          <a:srcRect t="22851" r="64431" b="22773"/>
+          <a:stretch/>
+        </p:blipFill>
+        <p:spPr>
+          <a:xfrm>
+            <a:off x="7637115" y="276722"/>
+            <a:ext cx="1013479" cy="845788"/>
           </a:xfrm>
           <a:prstGeom prst="rect">
             <a:avLst/>
           </a:prstGeom>
-          <a:noFill/>
-        </p:spPr>
-        <p:txBody>
-          <a:bodyPr wrap="square">
-            <a:spAutoFit/>
-          </a:bodyPr>
-          <a:lstStyle/>
-          <a:p>
-            <a:r>
-              <a:rPr lang="en-US" dirty="0"/>
-              <a:t>XXXXXXXXXXXXXX</a:t>
-            </a:r>
-          </a:p>
-        </p:txBody>
-      </p:sp>
-      <p:sp>
-        <p:nvSpPr>
-          <p:cNvPr id="2" name="CuadroTexto 1">
+        </p:spPr>
+      </p:pic>
+      <p:sp>
+        <p:nvSpPr>
+          <p:cNvPr id="7" name="Rounded Rectangle 5">
             <a:extLst>
               <a:ext uri="{FF2B5EF4-FFF2-40B4-BE49-F238E27FC236}">
-                <a16:creationId xmlns:a16="http://schemas.microsoft.com/office/drawing/2014/main" id="{7E1BB9B2-4E00-1519-C65B-0A6F5B18B9D8}"/>
+                <a16:creationId xmlns:a16="http://schemas.microsoft.com/office/drawing/2014/main" id="{06A6AFF8-3897-8467-0EF1-A3839D0CB47B}"/>
               </a:ext>
             </a:extLst>
           </p:cNvPr>
-          <p:cNvSpPr txBox="1"/>
+          <p:cNvSpPr/>
           <p:nvPr/>
         </p:nvSpPr>
         <p:spPr>
           <a:xfrm>
-            <a:off x="438150" y="6258234"/>
-            <a:ext cx="8121459" cy="246221"/>
+            <a:off x="1610591" y="5842186"/>
+            <a:ext cx="6637543" cy="434025"/>
+          </a:xfrm>
+          <a:prstGeom prst="roundRect">
+            <a:avLst/>
+          </a:prstGeom>
+          <a:solidFill>
+            <a:schemeClr val="accent6">
+              <a:lumMod val="20000"/>
+              <a:lumOff val="80000"/>
+            </a:schemeClr>
+          </a:solidFill>
+          <a:ln/>
+        </p:spPr>
+        <p:style>
+          <a:lnRef idx="2">
+            <a:schemeClr val="accent2"/>
+          </a:lnRef>
+          <a:fillRef idx="1">
+            <a:schemeClr val="lt1"/>
+          </a:fillRef>
+          <a:effectRef idx="0">
+            <a:schemeClr val="accent2"/>
+          </a:effectRef>
+          <a:fontRef idx="minor">
+            <a:schemeClr val="dk1"/>
+          </a:fontRef>
+        </p:style>
+        <p:txBody>
+          <a:bodyPr rtlCol="0" anchor="ctr"/>
+          <a:lstStyle/>
+          <a:p>
+            <a:pPr algn="ctr"/>
+            <a:r>
+              <a:rPr lang="es-ES" sz="1500" dirty="0">
+                <a:solidFill>
+                  <a:schemeClr val="tx1">
+                    <a:lumMod val="85000"/>
+                    <a:lumOff val="15000"/>
+                  </a:schemeClr>
+                </a:solidFill>
+              </a:rPr>
+              <a:t>Marzo y julio destacan en horas y </a:t>
+            </a:r>
+            <a:r>
+              <a:rPr lang="es-ES" sz="1500" dirty="0" err="1">
+                <a:solidFill>
+                  <a:schemeClr val="tx1">
+                    <a:lumMod val="85000"/>
+                    <a:lumOff val="15000"/>
+                  </a:schemeClr>
+                </a:solidFill>
+              </a:rPr>
+              <a:t>nº</a:t>
+            </a:r>
+            <a:r>
+              <a:rPr lang="es-ES" sz="1500" dirty="0">
+                <a:solidFill>
+                  <a:schemeClr val="tx1">
+                    <a:lumMod val="85000"/>
+                    <a:lumOff val="15000"/>
+                  </a:schemeClr>
+                </a:solidFill>
+              </a:rPr>
+              <a:t> absencias; el resto del año no sigue patrón fijo</a:t>
+            </a:r>
+          </a:p>
+        </p:txBody>
+      </p:sp>
+      <p:pic>
+        <p:nvPicPr>
+          <p:cNvPr id="13" name="Imagen 12">
+            <a:extLst>
+              <a:ext uri="{FF2B5EF4-FFF2-40B4-BE49-F238E27FC236}">
+                <a16:creationId xmlns:a16="http://schemas.microsoft.com/office/drawing/2014/main" id="{B8E3CA35-8285-8E67-C34D-ADDDFF3AC01C}"/>
+              </a:ext>
+            </a:extLst>
+          </p:cNvPr>
+          <p:cNvPicPr>
+            <a:picLocks noChangeAspect="1"/>
+          </p:cNvPicPr>
+          <p:nvPr/>
+        </p:nvPicPr>
+        <p:blipFill>
+          <a:blip r:embed="rId4"/>
+          <a:stretch>
+            <a:fillRect/>
+          </a:stretch>
+        </p:blipFill>
+        <p:spPr>
+          <a:xfrm>
+            <a:off x="969135" y="1679906"/>
+            <a:ext cx="7205730" cy="3986012"/>
           </a:xfrm>
           <a:prstGeom prst="rect">
             <a:avLst/>
           </a:prstGeom>
-          <a:noFill/>
-        </p:spPr>
-        <p:txBody>
-          <a:bodyPr wrap="square">
-            <a:spAutoFit/>
-          </a:bodyPr>
-          <a:lstStyle/>
-          <a:p>
-            <a:r>
-              <a:rPr lang="en-US" sz="1000" dirty="0">
-                <a:latin typeface="+mj-lt"/>
-              </a:rPr>
-              <a:t>XXXXXXXXXXXXXXX</a:t>
-            </a:r>
-            <a:endParaRPr lang="en-US" sz="1000" b="0" dirty="0">
-              <a:effectLst/>
-              <a:latin typeface="+mj-lt"/>
-            </a:endParaRPr>
-          </a:p>
-        </p:txBody>
-      </p:sp>
+        </p:spPr>
+      </p:pic>
     </p:spTree>
+    <p:extLst>
+      <p:ext uri="{BB962C8B-B14F-4D97-AF65-F5344CB8AC3E}">
+        <p14:creationId xmlns:p14="http://schemas.microsoft.com/office/powerpoint/2010/main" val="1937313707"/>
+      </p:ext>
+    </p:extLst>
   </p:cSld>
   <p:clrMapOvr>
     <a:masterClrMapping/>
@@ -5739,24 +7679,30 @@
       </p:grpSpPr>
       <p:sp>
         <p:nvSpPr>
-          <p:cNvPr id="2" name="Rectangle 1"/>
+          <p:cNvPr id="2" name="Rounded Rectangle 5">
+            <a:extLst>
+              <a:ext uri="{FF2B5EF4-FFF2-40B4-BE49-F238E27FC236}">
+                <a16:creationId xmlns:a16="http://schemas.microsoft.com/office/drawing/2014/main" id="{0F7B5B30-CA14-DA61-ABFC-744025F2DBEB}"/>
+              </a:ext>
+            </a:extLst>
+          </p:cNvPr>
           <p:cNvSpPr/>
           <p:nvPr/>
         </p:nvSpPr>
         <p:spPr>
           <a:xfrm>
-            <a:off x="240093" y="629526"/>
-            <a:ext cx="34299" cy="377288"/>
-          </a:xfrm>
-          <a:prstGeom prst="rect">
+            <a:off x="3543032" y="2048585"/>
+            <a:ext cx="2057936" cy="2590591"/>
+          </a:xfrm>
+          <a:prstGeom prst="roundRect">
             <a:avLst/>
           </a:prstGeom>
           <a:solidFill>
-            <a:srgbClr val="E61973"/>
+            <a:srgbClr val="FFFFFF"/>
           </a:solidFill>
           <a:ln>
             <a:solidFill>
-              <a:srgbClr val="E61973"/>
+              <a:srgbClr val="00A1DE"/>
             </a:solidFill>
           </a:ln>
         </p:spPr>
@@ -5779,65 +7725,96 @@
           <a:lstStyle/>
           <a:p>
             <a:pPr algn="ctr"/>
-            <a:endParaRPr sz="1350"/>
-          </a:p>
-        </p:txBody>
-      </p:sp>
-      <p:sp>
-        <p:nvSpPr>
-          <p:cNvPr id="3" name="TextBox 2"/>
-          <p:cNvSpPr txBox="1"/>
-          <p:nvPr/>
-        </p:nvSpPr>
-        <p:spPr>
-          <a:xfrm>
-            <a:off x="377288" y="626017"/>
-            <a:ext cx="3260060" cy="415627"/>
-          </a:xfrm>
-          <a:prstGeom prst="rect">
-            <a:avLst/>
-          </a:prstGeom>
-          <a:noFill/>
-        </p:spPr>
-        <p:txBody>
-          <a:bodyPr wrap="none">
-            <a:spAutoFit/>
-          </a:bodyPr>
-          <a:lstStyle/>
-          <a:p>
-            <a:r>
-              <a:rPr sz="2101" b="1" dirty="0">
+            <a:r>
+              <a:rPr lang="en-US" sz="1600" dirty="0">
                 <a:solidFill>
-                  <a:srgbClr val="003366"/>
+                  <a:schemeClr val="tx1">
+                    <a:lumMod val="85000"/>
+                    <a:lumOff val="15000"/>
+                  </a:schemeClr>
                 </a:solidFill>
-                <a:latin typeface="Aptos Display"/>
               </a:rPr>
-              <a:t>CONCLUSION</a:t>
-            </a:r>
-            <a:r>
-              <a:rPr lang="es-ES" sz="2101" b="1" dirty="0">
+              <a:t>XXXXXXXXX</a:t>
+            </a:r>
+          </a:p>
+          <a:p>
+            <a:pPr algn="ctr"/>
+            <a:r>
+              <a:rPr lang="en-US" sz="1600" dirty="0">
                 <a:solidFill>
-                  <a:srgbClr val="003366"/>
+                  <a:schemeClr val="tx1">
+                    <a:lumMod val="85000"/>
+                    <a:lumOff val="15000"/>
+                  </a:schemeClr>
                 </a:solidFill>
-                <a:latin typeface="Aptos Display"/>
               </a:rPr>
-              <a:t>S / SUMMARY</a:t>
-            </a:r>
-            <a:endParaRPr sz="2101" b="1" dirty="0">
-              <a:solidFill>
-                <a:srgbClr val="003366"/>
-              </a:solidFill>
-              <a:latin typeface="Aptos Display"/>
-            </a:endParaRPr>
-          </a:p>
-        </p:txBody>
-      </p:sp>
-      <p:sp>
-        <p:nvSpPr>
-          <p:cNvPr id="7" name="CuadroTexto 6">
+              <a:t>XXXXXX</a:t>
+            </a:r>
+          </a:p>
+          <a:p>
+            <a:pPr algn="ctr"/>
+            <a:r>
+              <a:rPr lang="en-US" sz="1600" dirty="0">
+                <a:solidFill>
+                  <a:schemeClr val="tx1">
+                    <a:lumMod val="85000"/>
+                    <a:lumOff val="15000"/>
+                  </a:schemeClr>
+                </a:solidFill>
+              </a:rPr>
+              <a:t>XXXXXXXXX</a:t>
+            </a:r>
+          </a:p>
+          <a:p>
+            <a:pPr algn="ctr"/>
+            <a:r>
+              <a:rPr lang="en-US" sz="1600" dirty="0">
+                <a:solidFill>
+                  <a:schemeClr val="tx1">
+                    <a:lumMod val="85000"/>
+                    <a:lumOff val="15000"/>
+                  </a:schemeClr>
+                </a:solidFill>
+              </a:rPr>
+              <a:t>XXXXXX</a:t>
+            </a:r>
+          </a:p>
+          <a:p>
+            <a:pPr algn="ctr"/>
+            <a:r>
+              <a:rPr lang="en-US" sz="1600" dirty="0">
+                <a:solidFill>
+                  <a:schemeClr val="tx1">
+                    <a:lumMod val="85000"/>
+                    <a:lumOff val="15000"/>
+                  </a:schemeClr>
+                </a:solidFill>
+              </a:rPr>
+              <a:t>XXXXXXXXX</a:t>
+            </a:r>
+          </a:p>
+          <a:p>
+            <a:pPr algn="ctr"/>
+            <a:r>
+              <a:rPr lang="en-US" sz="1600" dirty="0">
+                <a:solidFill>
+                  <a:schemeClr val="tx1">
+                    <a:lumMod val="85000"/>
+                    <a:lumOff val="15000"/>
+                  </a:schemeClr>
+                </a:solidFill>
+              </a:rPr>
+              <a:t>XXXXXX</a:t>
+            </a:r>
+          </a:p>
+        </p:txBody>
+      </p:sp>
+      <p:sp>
+        <p:nvSpPr>
+          <p:cNvPr id="8" name="CuadroTexto 7">
             <a:extLst>
               <a:ext uri="{FF2B5EF4-FFF2-40B4-BE49-F238E27FC236}">
-                <a16:creationId xmlns:a16="http://schemas.microsoft.com/office/drawing/2014/main" id="{803EC5A9-B028-88E2-9476-106F9FA2C541}"/>
+                <a16:creationId xmlns:a16="http://schemas.microsoft.com/office/drawing/2014/main" id="{3A06B430-4E0E-CF86-5BCD-BE5384F1A7EF}"/>
               </a:ext>
             </a:extLst>
           </p:cNvPr>
@@ -5846,8 +7823,8 @@
         </p:nvSpPr>
         <p:spPr>
           <a:xfrm>
-            <a:off x="480186" y="1246792"/>
-            <a:ext cx="6796292" cy="353943"/>
+            <a:off x="571499" y="6056671"/>
+            <a:ext cx="7803956" cy="276999"/>
           </a:xfrm>
           <a:prstGeom prst="rect">
             <a:avLst/>
@@ -5860,92 +7837,58 @@
           </a:bodyPr>
           <a:lstStyle/>
           <a:p>
-            <a:pPr>
-              <a:defRPr sz="1700">
-                <a:solidFill>
-                  <a:srgbClr val="FFFFFF"/>
-                </a:solidFill>
-              </a:defRPr>
-            </a:pPr>
-            <a:r>
-              <a:rPr lang="en-US" b="1" dirty="0" err="1">
+            <a:r>
+              <a:rPr lang="en-US" sz="1200" dirty="0"/>
+              <a:t>XXXXXXXX</a:t>
+            </a:r>
+          </a:p>
+        </p:txBody>
+      </p:sp>
+      <p:sp>
+        <p:nvSpPr>
+          <p:cNvPr id="6" name="CuadroTexto 5">
+            <a:extLst>
+              <a:ext uri="{FF2B5EF4-FFF2-40B4-BE49-F238E27FC236}">
+                <a16:creationId xmlns:a16="http://schemas.microsoft.com/office/drawing/2014/main" id="{1D5D8E82-5E16-E544-1306-D99695F8C4AE}"/>
+              </a:ext>
+            </a:extLst>
+          </p:cNvPr>
+          <p:cNvSpPr txBox="1"/>
+          <p:nvPr/>
+        </p:nvSpPr>
+        <p:spPr>
+          <a:xfrm>
+            <a:off x="571504" y="584289"/>
+            <a:ext cx="7871273" cy="507831"/>
+          </a:xfrm>
+          <a:prstGeom prst="rect">
+            <a:avLst/>
+          </a:prstGeom>
+          <a:noFill/>
+        </p:spPr>
+        <p:txBody>
+          <a:bodyPr vert="horz" wrap="square" rtlCol="0">
+            <a:spAutoFit/>
+          </a:bodyPr>
+          <a:lstStyle/>
+          <a:p>
+            <a:r>
+              <a:rPr lang="en-US" sz="2700" b="1" dirty="0">
                 <a:solidFill>
                   <a:srgbClr val="003366"/>
                 </a:solidFill>
-                <a:latin typeface="Aptos Display"/>
               </a:rPr>
-              <a:t>XXXXXXXXXXXXX</a:t>
-            </a:r>
-            <a:r>
-              <a:rPr lang="en-US" dirty="0" err="1"/>
-              <a:t>decisions</a:t>
-            </a:r>
-            <a:r>
-              <a:rPr lang="en-US" dirty="0"/>
-              <a:t>?</a:t>
-            </a:r>
-          </a:p>
-        </p:txBody>
-      </p:sp>
-      <p:sp>
-        <p:nvSpPr>
-          <p:cNvPr id="9" name="AnswerBox">
+              <a:t>XXXXXXXXXXXXXX</a:t>
+            </a:r>
+          </a:p>
+        </p:txBody>
+      </p:sp>
+      <p:sp>
+        <p:nvSpPr>
+          <p:cNvPr id="7" name="Rectángulo 6">
             <a:extLst>
               <a:ext uri="{FF2B5EF4-FFF2-40B4-BE49-F238E27FC236}">
-                <a16:creationId xmlns:a16="http://schemas.microsoft.com/office/drawing/2014/main" id="{632FF05A-EEDE-D97F-F54D-277088AE4F85}"/>
-              </a:ext>
-            </a:extLst>
-          </p:cNvPr>
-          <p:cNvSpPr>
-            <a:spLocks noGrp="1"/>
-          </p:cNvSpPr>
-          <p:nvPr/>
-        </p:nvSpPr>
-        <p:spPr>
-          <a:xfrm>
-            <a:off x="4063179" y="1554568"/>
-            <a:ext cx="4126606" cy="307777"/>
-          </a:xfrm>
-          <a:prstGeom prst="roundRect">
-            <a:avLst>
-              <a:gd name="adj" fmla="val 6000"/>
-            </a:avLst>
-          </a:prstGeom>
-          <a:solidFill>
-            <a:srgbClr val="E8F0F7"/>
-          </a:solidFill>
-          <a:ln w="12700">
-            <a:solidFill>
-              <a:srgbClr val="1B4F72"/>
-            </a:solidFill>
-          </a:ln>
-        </p:spPr>
-        <p:txBody>
-          <a:bodyPr wrap="square" lIns="120000" tIns="80000" rIns="120000" bIns="80000" anchor="ctr"/>
-          <a:lstStyle/>
-          <a:p>
-            <a:r>
-              <a:rPr lang="en-US" sz="1300" b="1" dirty="0">
-                <a:solidFill>
-                  <a:srgbClr val="1B4F72"/>
-                </a:solidFill>
-              </a:rPr>
-              <a:t>→ XXXX XXXXXXXX</a:t>
-            </a:r>
-            <a:endParaRPr lang="en-US" sz="1200" dirty="0">
-              <a:solidFill>
-                <a:srgbClr val="333333"/>
-              </a:solidFill>
-            </a:endParaRPr>
-          </a:p>
-        </p:txBody>
-      </p:sp>
-      <p:sp>
-        <p:nvSpPr>
-          <p:cNvPr id="4" name="Rounded Rectangle 4">
-            <a:extLst>
-              <a:ext uri="{FF2B5EF4-FFF2-40B4-BE49-F238E27FC236}">
-                <a16:creationId xmlns:a16="http://schemas.microsoft.com/office/drawing/2014/main" id="{8587C5BE-126C-89F5-5B1C-99C6ECB80A34}"/>
+                <a16:creationId xmlns:a16="http://schemas.microsoft.com/office/drawing/2014/main" id="{174ABC20-C700-2758-34B1-31220D6EF98A}"/>
               </a:ext>
             </a:extLst>
           </p:cNvPr>
@@ -5954,29 +7897,45 @@
         </p:nvSpPr>
         <p:spPr>
           <a:xfrm>
-            <a:off x="1639684" y="2525555"/>
-            <a:ext cx="2651760" cy="1334575"/>
-          </a:xfrm>
-          <a:prstGeom prst="roundRect">
+            <a:off x="381003" y="631909"/>
+            <a:ext cx="57151" cy="476251"/>
+          </a:xfrm>
+          <a:prstGeom prst="rect">
             <a:avLst/>
           </a:prstGeom>
           <a:solidFill>
-            <a:srgbClr val="F8F0F4"/>
+            <a:srgbClr val="E61973"/>
           </a:solidFill>
-          <a:ln>
-            <a:solidFill>
-              <a:srgbClr val="E91E63"/>
-            </a:solidFill>
+          <a:ln w="19050" cap="flat" cmpd="sng" algn="ctr">
+            <a:noFill/>
+            <a:prstDash val="solid"/>
+            <a:miter lim="800000"/>
           </a:ln>
+          <a:effectLst/>
+          <a:extLst>
+            <a:ext uri="{91240B29-F687-4F45-9708-019B960494DF}">
+              <a14:hiddenLine xmlns:a14="http://schemas.microsoft.com/office/drawing/2010/main" w="19050" cap="flat" cmpd="sng" algn="ctr">
+                <a:solidFill>
+                  <a:schemeClr val="accent1">
+                    <a:shade val="15000"/>
+                  </a:schemeClr>
+                </a:solidFill>
+                <a:prstDash val="solid"/>
+                <a:miter lim="800000"/>
+              </a14:hiddenLine>
+            </a:ext>
+          </a:extLst>
         </p:spPr>
         <p:style>
-          <a:lnRef idx="1">
-            <a:schemeClr val="accent1"/>
+          <a:lnRef idx="2">
+            <a:schemeClr val="accent1">
+              <a:shade val="15000"/>
+            </a:schemeClr>
           </a:lnRef>
-          <a:fillRef idx="3">
+          <a:fillRef idx="1">
             <a:schemeClr val="accent1"/>
           </a:fillRef>
-          <a:effectRef idx="2">
+          <a:effectRef idx="0">
             <a:schemeClr val="accent1"/>
           </a:effectRef>
           <a:fontRef idx="minor">
@@ -5984,268 +7943,52 @@
           </a:fontRef>
         </p:style>
         <p:txBody>
-          <a:bodyPr rtlCol="0" anchor="ctr"/>
-          <a:lstStyle/>
-          <a:p>
-            <a:pPr>
-              <a:defRPr sz="1300"/>
-            </a:pPr>
-            <a:r>
-              <a:rPr dirty="0"/>
-              <a:t> </a:t>
-            </a:r>
-            <a:r>
-              <a:rPr lang="es-ES" sz="2000" dirty="0"/>
-              <a:t>📉 </a:t>
-            </a:r>
-            <a:r>
-              <a:rPr lang="en-US" sz="1400" b="1" dirty="0">
-                <a:solidFill>
-                  <a:schemeClr val="tx1"/>
-                </a:solidFill>
-              </a:rPr>
-              <a:t>• XXXXXX</a:t>
-            </a:r>
-            <a:endParaRPr lang="en-US" sz="1400" dirty="0">
-              <a:solidFill>
-                <a:schemeClr val="tx1"/>
-              </a:solidFill>
-            </a:endParaRPr>
-          </a:p>
-        </p:txBody>
-      </p:sp>
-      <p:sp>
-        <p:nvSpPr>
-          <p:cNvPr id="5" name="Rounded Rectangle 4">
+          <a:bodyPr rot="0" spcFirstLastPara="0" vertOverflow="overflow" horzOverflow="overflow" vert="horz" wrap="square" lIns="68580" tIns="34291" rIns="68580" bIns="34291" numCol="1" spcCol="0" rtlCol="0" fromWordArt="0" anchor="ctr" anchorCtr="0" forceAA="0" compatLnSpc="1">
+            <a:prstTxWarp prst="textNoShape">
+              <a:avLst/>
+            </a:prstTxWarp>
+            <a:noAutofit/>
+          </a:bodyPr>
+          <a:lstStyle/>
+          <a:p>
+            <a:pPr algn="ctr"/>
+            <a:endParaRPr lang="es-ES" sz="1351"/>
+          </a:p>
+        </p:txBody>
+      </p:sp>
+      <p:pic>
+        <p:nvPicPr>
+          <p:cNvPr id="3" name="Imagen 2">
             <a:extLst>
               <a:ext uri="{FF2B5EF4-FFF2-40B4-BE49-F238E27FC236}">
-                <a16:creationId xmlns:a16="http://schemas.microsoft.com/office/drawing/2014/main" id="{01B03544-4284-1B74-11A2-D53A5340171D}"/>
+                <a16:creationId xmlns:a16="http://schemas.microsoft.com/office/drawing/2014/main" id="{202A03C5-3124-D3B8-D95A-FCF2A04D8852}"/>
               </a:ext>
             </a:extLst>
           </p:cNvPr>
-          <p:cNvSpPr/>
+          <p:cNvPicPr>
+            <a:picLocks noChangeAspect="1"/>
+          </p:cNvPicPr>
           <p:nvPr/>
-        </p:nvSpPr>
-        <p:spPr>
-          <a:xfrm>
-            <a:off x="1639684" y="4080669"/>
-            <a:ext cx="2651760" cy="1334575"/>
-          </a:xfrm>
-          <a:prstGeom prst="roundRect">
+        </p:nvPicPr>
+        <p:blipFill>
+          <a:blip r:embed="rId3"/>
+          <a:srcRect t="22851" r="64431" b="22773"/>
+          <a:stretch/>
+        </p:blipFill>
+        <p:spPr>
+          <a:xfrm>
+            <a:off x="7429297" y="276722"/>
+            <a:ext cx="1013479" cy="845788"/>
+          </a:xfrm>
+          <a:prstGeom prst="rect">
             <a:avLst/>
           </a:prstGeom>
-          <a:solidFill>
-            <a:srgbClr val="F8F0F4"/>
-          </a:solidFill>
-          <a:ln>
-            <a:solidFill>
-              <a:srgbClr val="E91E63"/>
-            </a:solidFill>
-          </a:ln>
-        </p:spPr>
-        <p:style>
-          <a:lnRef idx="1">
-            <a:schemeClr val="accent1"/>
-          </a:lnRef>
-          <a:fillRef idx="3">
-            <a:schemeClr val="accent1"/>
-          </a:fillRef>
-          <a:effectRef idx="2">
-            <a:schemeClr val="accent1"/>
-          </a:effectRef>
-          <a:fontRef idx="minor">
-            <a:schemeClr val="lt1"/>
-          </a:fontRef>
-        </p:style>
-        <p:txBody>
-          <a:bodyPr rtlCol="0" anchor="ctr"/>
-          <a:lstStyle/>
-          <a:p>
-            <a:pPr>
-              <a:defRPr sz="1300"/>
-            </a:pPr>
-            <a:r>
-              <a:rPr dirty="0"/>
-              <a:t> </a:t>
-            </a:r>
-            <a:r>
-              <a:rPr lang="es-ES" sz="2000" dirty="0"/>
-              <a:t>📊 </a:t>
-            </a:r>
-            <a:r>
-              <a:rPr lang="en-US" sz="1400" b="1" dirty="0">
-                <a:solidFill>
-                  <a:schemeClr val="tx1"/>
-                </a:solidFill>
-              </a:rPr>
-              <a:t>• XXXXXXX</a:t>
-            </a:r>
-            <a:endParaRPr lang="en-US" sz="1400" dirty="0">
-              <a:solidFill>
-                <a:schemeClr val="tx1"/>
-              </a:solidFill>
-            </a:endParaRPr>
-          </a:p>
-        </p:txBody>
-      </p:sp>
-      <p:sp>
-        <p:nvSpPr>
-          <p:cNvPr id="6" name="Rounded Rectangle 4">
-            <a:extLst>
-              <a:ext uri="{FF2B5EF4-FFF2-40B4-BE49-F238E27FC236}">
-                <a16:creationId xmlns:a16="http://schemas.microsoft.com/office/drawing/2014/main" id="{827094CD-090C-FA77-44B2-C0A97B2139B5}"/>
-              </a:ext>
-            </a:extLst>
-          </p:cNvPr>
-          <p:cNvSpPr/>
-          <p:nvPr/>
-        </p:nvSpPr>
-        <p:spPr>
-          <a:xfrm>
-            <a:off x="4748647" y="2525554"/>
-            <a:ext cx="2651760" cy="1334576"/>
-          </a:xfrm>
-          <a:prstGeom prst="roundRect">
-            <a:avLst/>
-          </a:prstGeom>
-          <a:solidFill>
-            <a:srgbClr val="F8F0F4"/>
-          </a:solidFill>
-          <a:ln>
-            <a:solidFill>
-              <a:srgbClr val="E91E63"/>
-            </a:solidFill>
-          </a:ln>
-        </p:spPr>
-        <p:style>
-          <a:lnRef idx="1">
-            <a:schemeClr val="accent1"/>
-          </a:lnRef>
-          <a:fillRef idx="3">
-            <a:schemeClr val="accent1"/>
-          </a:fillRef>
-          <a:effectRef idx="2">
-            <a:schemeClr val="accent1"/>
-          </a:effectRef>
-          <a:fontRef idx="minor">
-            <a:schemeClr val="lt1"/>
-          </a:fontRef>
-        </p:style>
-        <p:txBody>
-          <a:bodyPr rtlCol="0" anchor="ctr"/>
-          <a:lstStyle/>
-          <a:p>
-            <a:pPr>
-              <a:defRPr sz="1300"/>
-            </a:pPr>
-            <a:r>
-              <a:rPr lang="es-ES" sz="1400" dirty="0"/>
-              <a:t>📊 </a:t>
-            </a:r>
-            <a:r>
-              <a:rPr lang="en-US" sz="1400" b="1" dirty="0">
-                <a:solidFill>
-                  <a:schemeClr val="tx1"/>
-                </a:solidFill>
-              </a:rPr>
-              <a:t>• XXXXXXXXX.</a:t>
-            </a:r>
-            <a:endParaRPr lang="en-US" sz="1400" dirty="0">
-              <a:solidFill>
-                <a:schemeClr val="tx1"/>
-              </a:solidFill>
-            </a:endParaRPr>
-          </a:p>
-        </p:txBody>
-      </p:sp>
-      <p:sp>
-        <p:nvSpPr>
-          <p:cNvPr id="10" name="Rounded Rectangle 4">
-            <a:extLst>
-              <a:ext uri="{FF2B5EF4-FFF2-40B4-BE49-F238E27FC236}">
-                <a16:creationId xmlns:a16="http://schemas.microsoft.com/office/drawing/2014/main" id="{83C1A843-393F-B9C1-DBF9-43EA56AF7449}"/>
-              </a:ext>
-            </a:extLst>
-          </p:cNvPr>
-          <p:cNvSpPr/>
-          <p:nvPr/>
-        </p:nvSpPr>
-        <p:spPr>
-          <a:xfrm>
-            <a:off x="4748647" y="4080669"/>
-            <a:ext cx="2651760" cy="1334575"/>
-          </a:xfrm>
-          <a:prstGeom prst="roundRect">
-            <a:avLst/>
-          </a:prstGeom>
-          <a:solidFill>
-            <a:srgbClr val="F8F0F4"/>
-          </a:solidFill>
-          <a:ln>
-            <a:solidFill>
-              <a:srgbClr val="E91E63"/>
-            </a:solidFill>
-          </a:ln>
-        </p:spPr>
-        <p:style>
-          <a:lnRef idx="1">
-            <a:schemeClr val="accent1"/>
-          </a:lnRef>
-          <a:fillRef idx="3">
-            <a:schemeClr val="accent1"/>
-          </a:fillRef>
-          <a:effectRef idx="2">
-            <a:schemeClr val="accent1"/>
-          </a:effectRef>
-          <a:fontRef idx="minor">
-            <a:schemeClr val="lt1"/>
-          </a:fontRef>
-        </p:style>
-        <p:txBody>
-          <a:bodyPr rtlCol="0" anchor="ctr"/>
-          <a:lstStyle/>
-          <a:p>
-            <a:pPr>
-              <a:defRPr sz="1300"/>
-            </a:pPr>
-            <a:r>
-              <a:rPr dirty="0"/>
-              <a:t> </a:t>
-            </a:r>
-            <a:r>
-              <a:rPr lang="es-ES" sz="2000" dirty="0"/>
-              <a:t>🌍 </a:t>
-            </a:r>
-            <a:r>
-              <a:rPr lang="en-US" sz="1400" b="1" dirty="0">
-                <a:solidFill>
-                  <a:schemeClr val="tx1"/>
-                </a:solidFill>
-              </a:rPr>
-              <a:t>• XXXXX</a:t>
-            </a:r>
-            <a:endParaRPr lang="en-US" sz="1400" dirty="0">
-              <a:solidFill>
-                <a:schemeClr val="tx1"/>
-              </a:solidFill>
-            </a:endParaRPr>
-          </a:p>
-          <a:p>
-            <a:pPr>
-              <a:defRPr sz="1300"/>
-            </a:pPr>
-            <a:endParaRPr lang="en-US" sz="1400" dirty="0">
-              <a:solidFill>
-                <a:schemeClr val="tx1"/>
-              </a:solidFill>
-            </a:endParaRPr>
-          </a:p>
-        </p:txBody>
-      </p:sp>
+        </p:spPr>
+      </p:pic>
     </p:spTree>
     <p:extLst>
       <p:ext uri="{BB962C8B-B14F-4D97-AF65-F5344CB8AC3E}">
-        <p14:creationId xmlns:p14="http://schemas.microsoft.com/office/powerpoint/2010/main" val="2241340831"/>
+        <p14:creationId xmlns:p14="http://schemas.microsoft.com/office/powerpoint/2010/main" val="3144265252"/>
       </p:ext>
     </p:extLst>
   </p:cSld>
@@ -6286,20 +8029,313 @@
       </p:grpSpPr>
       <p:sp>
         <p:nvSpPr>
-          <p:cNvPr id="2" name="Rectangle 1"/>
+          <p:cNvPr id="3" name="Content Placeholder 2"/>
+          <p:cNvSpPr>
+            <a:spLocks noGrp="1"/>
+          </p:cNvSpPr>
+          <p:nvPr>
+            <p:ph idx="1"/>
+          </p:nvPr>
+        </p:nvSpPr>
+        <p:spPr>
+          <a:xfrm>
+            <a:off x="418860" y="1680968"/>
+            <a:ext cx="8229600" cy="4404561"/>
+          </a:xfrm>
+        </p:spPr>
+        <p:txBody>
+          <a:bodyPr>
+            <a:normAutofit/>
+          </a:bodyPr>
+          <a:lstStyle/>
+          <a:p>
+            <a:pPr marL="0" indent="0">
+              <a:buNone/>
+            </a:pPr>
+            <a:r>
+              <a:rPr lang="es-ES" sz="2000" dirty="0"/>
+              <a:t>	📱 XXXXXXX</a:t>
+            </a:r>
+          </a:p>
+          <a:p>
+            <a:pPr marL="0" indent="0">
+              <a:buNone/>
+            </a:pPr>
+            <a:endParaRPr lang="es-ES" sz="2000" dirty="0"/>
+          </a:p>
+          <a:p>
+            <a:pPr marL="0" indent="0">
+              <a:buNone/>
+            </a:pPr>
+            <a:r>
+              <a:rPr lang="es-ES" sz="2000" dirty="0"/>
+              <a:t>	🌍 XXXXXXXX</a:t>
+            </a:r>
+          </a:p>
+          <a:p>
+            <a:pPr marL="0" indent="0">
+              <a:buNone/>
+            </a:pPr>
+            <a:endParaRPr lang="es-ES" sz="2000" dirty="0"/>
+          </a:p>
+          <a:p>
+            <a:pPr marL="0" indent="0">
+              <a:buNone/>
+            </a:pPr>
+            <a:r>
+              <a:rPr lang="es-ES" sz="2000" dirty="0"/>
+              <a:t>	🔎 XX</a:t>
+            </a:r>
+            <a:endParaRPr lang="en-US" sz="2000" dirty="0"/>
+          </a:p>
+          <a:p>
+            <a:pPr marL="0" indent="0">
+              <a:buNone/>
+            </a:pPr>
+            <a:endParaRPr lang="es-ES" sz="2000" dirty="0"/>
+          </a:p>
+          <a:p>
+            <a:pPr marL="457178" lvl="1" indent="0">
+              <a:buNone/>
+              <a:defRPr sz="1300"/>
+            </a:pPr>
+            <a:r>
+              <a:rPr lang="es-ES" sz="2000" dirty="0"/>
+              <a:t>🗣 </a:t>
+            </a:r>
+            <a:r>
+              <a:rPr lang="en-US" sz="2000" dirty="0"/>
+              <a:t>XXXX</a:t>
+            </a:r>
+          </a:p>
+          <a:p>
+            <a:pPr marL="457178" lvl="1" indent="0">
+              <a:buNone/>
+              <a:defRPr sz="1300"/>
+            </a:pPr>
+            <a:endParaRPr lang="en-US" sz="2000" dirty="0"/>
+          </a:p>
+          <a:p>
+            <a:pPr marL="0" indent="0">
+              <a:buNone/>
+            </a:pPr>
+            <a:r>
+              <a:rPr lang="es-ES" sz="2000" dirty="0"/>
+              <a:t>	👴 XXXXXX</a:t>
+            </a:r>
+            <a:endParaRPr lang="en-US" sz="1051" dirty="0"/>
+          </a:p>
+          <a:p>
+            <a:endParaRPr lang="es-ES" sz="2000" dirty="0"/>
+          </a:p>
+          <a:p>
+            <a:pPr lvl="1">
+              <a:defRPr sz="1300"/>
+            </a:pPr>
+            <a:endParaRPr dirty="0"/>
+          </a:p>
+        </p:txBody>
+      </p:sp>
+      <p:sp>
+        <p:nvSpPr>
+          <p:cNvPr id="2" name="CuadroTexto 1">
+            <a:extLst>
+              <a:ext uri="{FF2B5EF4-FFF2-40B4-BE49-F238E27FC236}">
+                <a16:creationId xmlns:a16="http://schemas.microsoft.com/office/drawing/2014/main" id="{69236AF6-97AC-A429-56CA-C29E8FEA9481}"/>
+              </a:ext>
+            </a:extLst>
+          </p:cNvPr>
+          <p:cNvSpPr txBox="1"/>
+          <p:nvPr/>
+        </p:nvSpPr>
+        <p:spPr>
+          <a:xfrm>
+            <a:off x="571504" y="584289"/>
+            <a:ext cx="7871273" cy="507831"/>
+          </a:xfrm>
+          <a:prstGeom prst="rect">
+            <a:avLst/>
+          </a:prstGeom>
+          <a:noFill/>
+        </p:spPr>
+        <p:txBody>
+          <a:bodyPr vert="horz" wrap="square" rtlCol="0">
+            <a:spAutoFit/>
+          </a:bodyPr>
+          <a:lstStyle/>
+          <a:p>
+            <a:r>
+              <a:rPr lang="en-US" sz="2700" b="1" dirty="0">
+                <a:solidFill>
+                  <a:srgbClr val="003366"/>
+                </a:solidFill>
+              </a:rPr>
+              <a:t>XXXXXXXXXXXXX</a:t>
+            </a:r>
+          </a:p>
+        </p:txBody>
+      </p:sp>
+      <p:sp>
+        <p:nvSpPr>
+          <p:cNvPr id="4" name="Rectángulo 3">
+            <a:extLst>
+              <a:ext uri="{FF2B5EF4-FFF2-40B4-BE49-F238E27FC236}">
+                <a16:creationId xmlns:a16="http://schemas.microsoft.com/office/drawing/2014/main" id="{D69269DE-14D5-5C28-AC3A-2DBD6CB58153}"/>
+              </a:ext>
+            </a:extLst>
+          </p:cNvPr>
           <p:cNvSpPr/>
           <p:nvPr/>
         </p:nvSpPr>
         <p:spPr>
           <a:xfrm>
-            <a:off x="421647" y="715345"/>
-            <a:ext cx="34299" cy="377288"/>
+            <a:off x="381003" y="631909"/>
+            <a:ext cx="57151" cy="476251"/>
           </a:xfrm>
           <a:prstGeom prst="rect">
             <a:avLst/>
           </a:prstGeom>
           <a:solidFill>
             <a:srgbClr val="E61973"/>
+          </a:solidFill>
+          <a:ln w="19050" cap="flat" cmpd="sng" algn="ctr">
+            <a:noFill/>
+            <a:prstDash val="solid"/>
+            <a:miter lim="800000"/>
+          </a:ln>
+          <a:effectLst/>
+          <a:extLst>
+            <a:ext uri="{91240B29-F687-4F45-9708-019B960494DF}">
+              <a14:hiddenLine xmlns:a14="http://schemas.microsoft.com/office/drawing/2010/main" w="19050" cap="flat" cmpd="sng" algn="ctr">
+                <a:solidFill>
+                  <a:schemeClr val="accent1">
+                    <a:shade val="15000"/>
+                  </a:schemeClr>
+                </a:solidFill>
+                <a:prstDash val="solid"/>
+                <a:miter lim="800000"/>
+              </a14:hiddenLine>
+            </a:ext>
+          </a:extLst>
+        </p:spPr>
+        <p:style>
+          <a:lnRef idx="2">
+            <a:schemeClr val="accent1">
+              <a:shade val="15000"/>
+            </a:schemeClr>
+          </a:lnRef>
+          <a:fillRef idx="1">
+            <a:schemeClr val="accent1"/>
+          </a:fillRef>
+          <a:effectRef idx="0">
+            <a:schemeClr val="accent1"/>
+          </a:effectRef>
+          <a:fontRef idx="minor">
+            <a:schemeClr val="lt1"/>
+          </a:fontRef>
+        </p:style>
+        <p:txBody>
+          <a:bodyPr rot="0" spcFirstLastPara="0" vertOverflow="overflow" horzOverflow="overflow" vert="horz" wrap="square" lIns="68580" tIns="34291" rIns="68580" bIns="34291" numCol="1" spcCol="0" rtlCol="0" fromWordArt="0" anchor="ctr" anchorCtr="0" forceAA="0" compatLnSpc="1">
+            <a:prstTxWarp prst="textNoShape">
+              <a:avLst/>
+            </a:prstTxWarp>
+            <a:noAutofit/>
+          </a:bodyPr>
+          <a:lstStyle/>
+          <a:p>
+            <a:pPr algn="ctr"/>
+            <a:endParaRPr lang="es-ES" sz="1351"/>
+          </a:p>
+        </p:txBody>
+      </p:sp>
+      <p:pic>
+        <p:nvPicPr>
+          <p:cNvPr id="5" name="Imagen 4">
+            <a:extLst>
+              <a:ext uri="{FF2B5EF4-FFF2-40B4-BE49-F238E27FC236}">
+                <a16:creationId xmlns:a16="http://schemas.microsoft.com/office/drawing/2014/main" id="{299FFF43-FDD7-E0CE-FE41-139106C20786}"/>
+              </a:ext>
+            </a:extLst>
+          </p:cNvPr>
+          <p:cNvPicPr>
+            <a:picLocks noChangeAspect="1"/>
+          </p:cNvPicPr>
+          <p:nvPr/>
+        </p:nvPicPr>
+        <p:blipFill>
+          <a:blip r:embed="rId3"/>
+          <a:srcRect t="22851" r="64431" b="22773"/>
+          <a:stretch/>
+        </p:blipFill>
+        <p:spPr>
+          <a:xfrm>
+            <a:off x="7429297" y="276722"/>
+            <a:ext cx="1013479" cy="845788"/>
+          </a:xfrm>
+          <a:prstGeom prst="rect">
+            <a:avLst/>
+          </a:prstGeom>
+        </p:spPr>
+      </p:pic>
+    </p:spTree>
+  </p:cSld>
+  <p:clrMapOvr>
+    <a:masterClrMapping/>
+  </p:clrMapOvr>
+  <mc:AlternateContent xmlns:mc="http://schemas.openxmlformats.org/markup-compatibility/2006" xmlns:p159="http://schemas.microsoft.com/office/powerpoint/2015/09/main">
+    <mc:Choice Requires="p159">
+      <p:transition spd="slow">
+        <p159:morph option="byObject"/>
+      </p:transition>
+    </mc:Choice>
+    <mc:Fallback xmlns="">
+      <p:transition spd="slow">
+        <p:fade/>
+      </p:transition>
+    </mc:Fallback>
+  </mc:AlternateContent>
+</p:sld>
+</file>
+
+<file path=ppt/slides/slide9.xml><?xml version="1.0" encoding="utf-8"?>
+<p:sld xmlns:a="http://schemas.openxmlformats.org/drawingml/2006/main" xmlns:r="http://schemas.openxmlformats.org/officeDocument/2006/relationships" xmlns:p="http://schemas.openxmlformats.org/presentationml/2006/main">
+  <p:cSld>
+    <p:spTree>
+      <p:nvGrpSpPr>
+        <p:cNvPr id="1" name=""/>
+        <p:cNvGrpSpPr/>
+        <p:nvPr/>
+      </p:nvGrpSpPr>
+      <p:grpSpPr>
+        <a:xfrm>
+          <a:off x="0" y="0"/>
+          <a:ext cx="0" cy="0"/>
+          <a:chOff x="0" y="0"/>
+          <a:chExt cx="0" cy="0"/>
+        </a:xfrm>
+      </p:grpSpPr>
+      <p:sp>
+        <p:nvSpPr>
+          <p:cNvPr id="8" name="Rounded Rectangle 4">
+            <a:extLst>
+              <a:ext uri="{FF2B5EF4-FFF2-40B4-BE49-F238E27FC236}">
+                <a16:creationId xmlns:a16="http://schemas.microsoft.com/office/drawing/2014/main" id="{4053950B-54CA-0DFB-C692-3C76C6962CFA}"/>
+              </a:ext>
+            </a:extLst>
+          </p:cNvPr>
+          <p:cNvSpPr/>
+          <p:nvPr/>
+        </p:nvSpPr>
+        <p:spPr>
+          <a:xfrm>
+            <a:off x="571502" y="495958"/>
+            <a:ext cx="7988109" cy="722341"/>
+          </a:xfrm>
+          <a:prstGeom prst="roundRect">
+            <a:avLst/>
+          </a:prstGeom>
+          <a:solidFill>
+            <a:srgbClr val="FFFFFF"/>
           </a:solidFill>
           <a:ln>
             <a:solidFill>
@@ -6325,211 +8361,19 @@
           <a:bodyPr rtlCol="0" anchor="ctr"/>
           <a:lstStyle/>
           <a:p>
-            <a:pPr algn="ctr"/>
-            <a:endParaRPr sz="1350"/>
-          </a:p>
-        </p:txBody>
-      </p:sp>
-      <p:sp>
-        <p:nvSpPr>
-          <p:cNvPr id="3" name="TextBox 2"/>
-          <p:cNvSpPr txBox="1"/>
-          <p:nvPr/>
-        </p:nvSpPr>
-        <p:spPr>
-          <a:xfrm>
-            <a:off x="558843" y="633028"/>
-            <a:ext cx="3762568" cy="692626"/>
-          </a:xfrm>
-          <a:prstGeom prst="rect">
-            <a:avLst/>
-          </a:prstGeom>
-          <a:noFill/>
-        </p:spPr>
-        <p:txBody>
-          <a:bodyPr wrap="none">
-            <a:spAutoFit/>
-          </a:bodyPr>
-          <a:lstStyle/>
-          <a:p>
-            <a:r>
-              <a:rPr lang="es-ES" sz="2101" b="1" dirty="0">
-                <a:solidFill>
-                  <a:srgbClr val="003366"/>
-                </a:solidFill>
-                <a:latin typeface="Aptos Display"/>
-              </a:rPr>
-              <a:t>XXXXXXXXXXXXXXXXXXXXXXXX</a:t>
-            </a:r>
-          </a:p>
-          <a:p>
-            <a:r>
-              <a:rPr lang="en-US" dirty="0"/>
-              <a:t>XXXXX</a:t>
-            </a:r>
-            <a:endParaRPr b="1" dirty="0">
-              <a:solidFill>
-                <a:srgbClr val="003366"/>
-              </a:solidFill>
-              <a:latin typeface="Aptos Display"/>
-            </a:endParaRPr>
-          </a:p>
-        </p:txBody>
-      </p:sp>
-      <p:sp>
-        <p:nvSpPr>
-          <p:cNvPr id="10" name="Rounded Rectangle 4">
+            <a:r>
+              <a:rPr lang="es-ES" sz="1600" dirty="0"/>
+              <a:t>variables </a:t>
+            </a:r>
+          </a:p>
+        </p:txBody>
+      </p:sp>
+      <p:sp>
+        <p:nvSpPr>
+          <p:cNvPr id="7" name="CuadroTexto 6">
             <a:extLst>
               <a:ext uri="{FF2B5EF4-FFF2-40B4-BE49-F238E27FC236}">
-                <a16:creationId xmlns:a16="http://schemas.microsoft.com/office/drawing/2014/main" id="{A1F2B760-44E3-423A-84C3-731A38FC9DD0}"/>
-              </a:ext>
-            </a:extLst>
-          </p:cNvPr>
-          <p:cNvSpPr/>
-          <p:nvPr/>
-        </p:nvSpPr>
-        <p:spPr>
-          <a:xfrm>
-            <a:off x="1991322" y="4963716"/>
-            <a:ext cx="4900800" cy="1288123"/>
-          </a:xfrm>
-          <a:prstGeom prst="roundRect">
-            <a:avLst/>
-          </a:prstGeom>
-          <a:solidFill>
-            <a:srgbClr val="FFFFFF"/>
-          </a:solidFill>
-          <a:ln>
-            <a:solidFill>
-              <a:srgbClr val="E61973"/>
-            </a:solidFill>
-          </a:ln>
-        </p:spPr>
-        <p:style>
-          <a:lnRef idx="1">
-            <a:schemeClr val="accent1"/>
-          </a:lnRef>
-          <a:fillRef idx="3">
-            <a:schemeClr val="accent1"/>
-          </a:fillRef>
-          <a:effectRef idx="2">
-            <a:schemeClr val="accent1"/>
-          </a:effectRef>
-          <a:fontRef idx="minor">
-            <a:schemeClr val="lt1"/>
-          </a:fontRef>
-        </p:style>
-        <p:txBody>
-          <a:bodyPr rtlCol="0" anchor="ctr"/>
-          <a:lstStyle/>
-          <a:p>
-            <a:r>
-              <a:rPr lang="es-ES" sz="1600" dirty="0"/>
-              <a:t>variables </a:t>
-            </a:r>
-          </a:p>
-        </p:txBody>
-      </p:sp>
-      <p:sp>
-        <p:nvSpPr>
-          <p:cNvPr id="5" name="Rounded Rectangle 4"/>
-          <p:cNvSpPr/>
-          <p:nvPr/>
-        </p:nvSpPr>
-        <p:spPr>
-          <a:xfrm>
-            <a:off x="1991322" y="1662778"/>
-            <a:ext cx="4900800" cy="1288123"/>
-          </a:xfrm>
-          <a:prstGeom prst="roundRect">
-            <a:avLst/>
-          </a:prstGeom>
-          <a:solidFill>
-            <a:srgbClr val="FFFFFF"/>
-          </a:solidFill>
-          <a:ln>
-            <a:solidFill>
-              <a:srgbClr val="E61973"/>
-            </a:solidFill>
-          </a:ln>
-        </p:spPr>
-        <p:style>
-          <a:lnRef idx="1">
-            <a:schemeClr val="accent1"/>
-          </a:lnRef>
-          <a:fillRef idx="3">
-            <a:schemeClr val="accent1"/>
-          </a:fillRef>
-          <a:effectRef idx="2">
-            <a:schemeClr val="accent1"/>
-          </a:effectRef>
-          <a:fontRef idx="minor">
-            <a:schemeClr val="lt1"/>
-          </a:fontRef>
-        </p:style>
-        <p:txBody>
-          <a:bodyPr rtlCol="0" anchor="ctr"/>
-          <a:lstStyle/>
-          <a:p>
-            <a:r>
-              <a:rPr lang="es-ES" sz="1600" dirty="0"/>
-              <a:t>variables </a:t>
-            </a:r>
-          </a:p>
-        </p:txBody>
-      </p:sp>
-      <p:sp>
-        <p:nvSpPr>
-          <p:cNvPr id="6" name="Rounded Rectangle 5"/>
-          <p:cNvSpPr/>
-          <p:nvPr/>
-        </p:nvSpPr>
-        <p:spPr>
-          <a:xfrm>
-            <a:off x="1995921" y="3285754"/>
-            <a:ext cx="4896201" cy="1381782"/>
-          </a:xfrm>
-          <a:prstGeom prst="roundRect">
-            <a:avLst/>
-          </a:prstGeom>
-          <a:solidFill>
-            <a:srgbClr val="FFFFFF"/>
-          </a:solidFill>
-          <a:ln>
-            <a:solidFill>
-              <a:srgbClr val="00A1DE"/>
-            </a:solidFill>
-          </a:ln>
-        </p:spPr>
-        <p:style>
-          <a:lnRef idx="1">
-            <a:schemeClr val="accent1"/>
-          </a:lnRef>
-          <a:fillRef idx="3">
-            <a:schemeClr val="accent1"/>
-          </a:fillRef>
-          <a:effectRef idx="2">
-            <a:schemeClr val="accent1"/>
-          </a:effectRef>
-          <a:fontRef idx="minor">
-            <a:schemeClr val="lt1"/>
-          </a:fontRef>
-        </p:style>
-        <p:txBody>
-          <a:bodyPr rtlCol="0" anchor="ctr"/>
-          <a:lstStyle/>
-          <a:p>
-            <a:pPr algn="ctr"/>
-            <a:endParaRPr sz="1125" dirty="0"/>
-          </a:p>
-        </p:txBody>
-      </p:sp>
-      <p:sp>
-        <p:nvSpPr>
-          <p:cNvPr id="8" name="CuadroTexto 7">
-            <a:extLst>
-              <a:ext uri="{FF2B5EF4-FFF2-40B4-BE49-F238E27FC236}">
-                <a16:creationId xmlns:a16="http://schemas.microsoft.com/office/drawing/2014/main" id="{6CF3B01D-34E6-8DAA-D4C9-6D9F445DFD3C}"/>
+                <a16:creationId xmlns:a16="http://schemas.microsoft.com/office/drawing/2014/main" id="{FCCE6C7C-BB7D-56C9-E559-B7B32FF01169}"/>
               </a:ext>
             </a:extLst>
           </p:cNvPr>
@@ -6538,8 +8382,8 @@
         </p:nvSpPr>
         <p:spPr>
           <a:xfrm>
-            <a:off x="2174048" y="1698465"/>
-            <a:ext cx="4507307" cy="3970318"/>
+            <a:off x="633847" y="543521"/>
+            <a:ext cx="7988108" cy="369332"/>
           </a:xfrm>
           <a:prstGeom prst="rect">
             <a:avLst/>
@@ -6553,112 +8397,78 @@
           <a:lstStyle/>
           <a:p>
             <a:r>
-              <a:rPr lang="es-ES" dirty="0"/>
-              <a:t>📊 </a:t>
-            </a:r>
-            <a:r>
-              <a:rPr lang="es-ES" b="1" dirty="0"/>
-              <a:t>XXXX</a:t>
-            </a:r>
-            <a:endParaRPr lang="es-ES" dirty="0"/>
-          </a:p>
-          <a:p>
-            <a:pPr>
-              <a:buFont typeface="Arial" panose="020B0604020202020204" pitchFamily="34" charset="0"/>
-              <a:buChar char="•"/>
-            </a:pPr>
-            <a:r>
-              <a:rPr lang="es-ES" dirty="0"/>
-              <a:t> XXXX</a:t>
-            </a:r>
-          </a:p>
-          <a:p>
-            <a:pPr>
-              <a:buFont typeface="Arial" panose="020B0604020202020204" pitchFamily="34" charset="0"/>
-              <a:buChar char="•"/>
-            </a:pPr>
-            <a:endParaRPr lang="es-ES" dirty="0"/>
-          </a:p>
-          <a:p>
-            <a:r>
-              <a:rPr lang="es-ES" dirty="0"/>
-              <a:t> </a:t>
-            </a:r>
-          </a:p>
-          <a:p>
-            <a:endParaRPr lang="es-ES" b="1" dirty="0"/>
-          </a:p>
-          <a:p>
-            <a:endParaRPr lang="es-ES" b="1" dirty="0"/>
-          </a:p>
-          <a:p>
-            <a:r>
-              <a:rPr lang="es-ES" dirty="0"/>
-              <a:t>📈 </a:t>
-            </a:r>
-            <a:r>
-              <a:rPr lang="es-ES" b="1" dirty="0"/>
-              <a:t>XXXX</a:t>
-            </a:r>
-            <a:endParaRPr lang="es-ES" dirty="0"/>
-          </a:p>
-          <a:p>
-            <a:pPr>
-              <a:buFont typeface="Arial" panose="020B0604020202020204" pitchFamily="34" charset="0"/>
-              <a:buChar char="•"/>
-            </a:pPr>
-            <a:r>
-              <a:rPr lang="es-ES" dirty="0"/>
-              <a:t> XXXX</a:t>
-            </a:r>
-          </a:p>
-          <a:p>
-            <a:pPr>
-              <a:buFont typeface="Arial" panose="020B0604020202020204" pitchFamily="34" charset="0"/>
-              <a:buChar char="•"/>
-            </a:pPr>
-            <a:endParaRPr lang="es-ES" dirty="0"/>
-          </a:p>
-          <a:p>
-            <a:pPr>
-              <a:buFont typeface="Arial" panose="020B0604020202020204" pitchFamily="34" charset="0"/>
-              <a:buChar char="•"/>
-            </a:pPr>
-            <a:endParaRPr lang="es-ES" dirty="0"/>
-          </a:p>
-          <a:p>
-            <a:pPr>
-              <a:buFont typeface="Arial" panose="020B0604020202020204" pitchFamily="34" charset="0"/>
-              <a:buChar char="•"/>
-            </a:pPr>
-            <a:endParaRPr lang="es-ES" dirty="0"/>
-          </a:p>
-          <a:p>
-            <a:endParaRPr lang="es-ES" b="1" dirty="0"/>
-          </a:p>
-          <a:p>
-            <a:r>
-              <a:rPr lang="es-ES" dirty="0"/>
-              <a:t>🏢 </a:t>
-            </a:r>
-            <a:r>
-              <a:rPr lang="es-ES" b="1" dirty="0"/>
-              <a:t>XXXX</a:t>
-            </a:r>
-            <a:endParaRPr lang="es-ES" dirty="0"/>
-          </a:p>
-          <a:p>
-            <a:pPr>
-              <a:buFont typeface="Arial" panose="020B0604020202020204" pitchFamily="34" charset="0"/>
-              <a:buChar char="•"/>
-            </a:pPr>
-            <a:r>
-              <a:rPr lang="es-ES" dirty="0"/>
-              <a:t> XXXX</a:t>
-            </a:r>
-          </a:p>
-        </p:txBody>
-      </p:sp>
+              <a:rPr lang="en-US" dirty="0"/>
+              <a:t>XXXXXXXXXXXXXX</a:t>
+            </a:r>
+          </a:p>
+        </p:txBody>
+      </p:sp>
+      <p:sp>
+        <p:nvSpPr>
+          <p:cNvPr id="2" name="CuadroTexto 1">
+            <a:extLst>
+              <a:ext uri="{FF2B5EF4-FFF2-40B4-BE49-F238E27FC236}">
+                <a16:creationId xmlns:a16="http://schemas.microsoft.com/office/drawing/2014/main" id="{7E1BB9B2-4E00-1519-C65B-0A6F5B18B9D8}"/>
+              </a:ext>
+            </a:extLst>
+          </p:cNvPr>
+          <p:cNvSpPr txBox="1"/>
+          <p:nvPr/>
+        </p:nvSpPr>
+        <p:spPr>
+          <a:xfrm>
+            <a:off x="438153" y="6258239"/>
+            <a:ext cx="8121459" cy="246221"/>
+          </a:xfrm>
+          <a:prstGeom prst="rect">
+            <a:avLst/>
+          </a:prstGeom>
+          <a:noFill/>
+        </p:spPr>
+        <p:txBody>
+          <a:bodyPr wrap="square">
+            <a:spAutoFit/>
+          </a:bodyPr>
+          <a:lstStyle/>
+          <a:p>
+            <a:r>
+              <a:rPr lang="en-US" sz="1000" dirty="0">
+                <a:latin typeface="+mj-lt"/>
+              </a:rPr>
+              <a:t>XXXXXXXXXXXXXXX</a:t>
+            </a:r>
+          </a:p>
+        </p:txBody>
+      </p:sp>
+      <p:pic>
+        <p:nvPicPr>
+          <p:cNvPr id="3" name="Imagen 2">
+            <a:extLst>
+              <a:ext uri="{FF2B5EF4-FFF2-40B4-BE49-F238E27FC236}">
+                <a16:creationId xmlns:a16="http://schemas.microsoft.com/office/drawing/2014/main" id="{EF90C1FE-8E5B-B914-411C-C8FCF24D711D}"/>
+              </a:ext>
+            </a:extLst>
+          </p:cNvPr>
+          <p:cNvPicPr>
+            <a:picLocks noChangeAspect="1"/>
+          </p:cNvPicPr>
+          <p:nvPr/>
+        </p:nvPicPr>
+        <p:blipFill>
+          <a:blip r:embed="rId3"/>
+          <a:srcRect t="22851" r="64431" b="22773"/>
+          <a:stretch/>
+        </p:blipFill>
+        <p:spPr>
+          <a:xfrm>
+            <a:off x="7429297" y="276722"/>
+            <a:ext cx="1013479" cy="845788"/>
+          </a:xfrm>
+          <a:prstGeom prst="rect">
+            <a:avLst/>
+          </a:prstGeom>
+        </p:spPr>
+      </p:pic>
     </p:spTree>
   </p:cSld>
   <p:clrMapOvr>
